--- a/site/assets/cizheng-pitch-v07.pptx
+++ b/site/assets/cizheng-pitch-v07.pptx
@@ -2,24 +2,25 @@
 <file path=ppt/presentation.xml><?xml version="1.0" encoding="utf-8"?>
 <p:presentation xmlns:p="http://schemas.openxmlformats.org/presentationml/2006/main">
   <p:sldMasterIdLst>
-    <p:sldMasterId xmlns:r="http://schemas.openxmlformats.org/officeDocument/2006/relationships" id="2147483648" r:id="Ra98da10951864f6f"/>
+    <p:sldMasterId xmlns:r="http://schemas.openxmlformats.org/officeDocument/2006/relationships" id="2147483648" r:id="Rb1dfe95fc8db4ff0"/>
   </p:sldMasterIdLst>
   <p:notesMasterIdLst>
-    <p:notesMasterId xmlns:r="http://schemas.openxmlformats.org/officeDocument/2006/relationships" r:id="R5829e0fda9fe475b"/>
+    <p:notesMasterId xmlns:r="http://schemas.openxmlformats.org/officeDocument/2006/relationships" r:id="R055b056c024a4636"/>
   </p:notesMasterIdLst>
   <p:sldIdLst>
-    <p:sldId xmlns:r="http://schemas.openxmlformats.org/officeDocument/2006/relationships" id="256" r:id="Rc6d555ad456a447f"/>
-    <p:sldId xmlns:r="http://schemas.openxmlformats.org/officeDocument/2006/relationships" id="257" r:id="Rb779731c34624637"/>
-    <p:sldId xmlns:r="http://schemas.openxmlformats.org/officeDocument/2006/relationships" id="258" r:id="Rb5ed41b853b7460b"/>
-    <p:sldId xmlns:r="http://schemas.openxmlformats.org/officeDocument/2006/relationships" id="259" r:id="Ra9ed836dd0014d20"/>
-    <p:sldId xmlns:r="http://schemas.openxmlformats.org/officeDocument/2006/relationships" id="260" r:id="R803ad068e6804441"/>
-    <p:sldId xmlns:r="http://schemas.openxmlformats.org/officeDocument/2006/relationships" id="261" r:id="R6351b43bd61b4c35"/>
-    <p:sldId xmlns:r="http://schemas.openxmlformats.org/officeDocument/2006/relationships" id="262" r:id="R42ffbaa4fc5a4257"/>
-    <p:sldId xmlns:r="http://schemas.openxmlformats.org/officeDocument/2006/relationships" id="263" r:id="Rd03fe251ef094a66"/>
-    <p:sldId xmlns:r="http://schemas.openxmlformats.org/officeDocument/2006/relationships" id="264" r:id="R02a36880fd444c64"/>
-    <p:sldId xmlns:r="http://schemas.openxmlformats.org/officeDocument/2006/relationships" id="265" r:id="Ra4515bc6db0b4d75"/>
-    <p:sldId xmlns:r="http://schemas.openxmlformats.org/officeDocument/2006/relationships" id="266" r:id="R3ed539fa9ebe43b7"/>
-    <p:sldId xmlns:r="http://schemas.openxmlformats.org/officeDocument/2006/relationships" id="267" r:id="R8450e743d5d04d68"/>
+    <p:sldId xmlns:r="http://schemas.openxmlformats.org/officeDocument/2006/relationships" id="256" r:id="R75d79d3c8a9f4f28"/>
+    <p:sldId xmlns:r="http://schemas.openxmlformats.org/officeDocument/2006/relationships" id="257" r:id="R6b3fa2ddfcb143c0"/>
+    <p:sldId xmlns:r="http://schemas.openxmlformats.org/officeDocument/2006/relationships" id="258" r:id="Rd9a3f864fd1d465f"/>
+    <p:sldId xmlns:r="http://schemas.openxmlformats.org/officeDocument/2006/relationships" id="259" r:id="R6c9fdd8dc3fc4a81"/>
+    <p:sldId xmlns:r="http://schemas.openxmlformats.org/officeDocument/2006/relationships" id="260" r:id="R13e6f437d3124398"/>
+    <p:sldId xmlns:r="http://schemas.openxmlformats.org/officeDocument/2006/relationships" id="261" r:id="Rc86909a09c3d42f3"/>
+    <p:sldId xmlns:r="http://schemas.openxmlformats.org/officeDocument/2006/relationships" id="262" r:id="R3c5d28fee63a49a3"/>
+    <p:sldId xmlns:r="http://schemas.openxmlformats.org/officeDocument/2006/relationships" id="263" r:id="Rbe3f85d4b2a14a6c"/>
+    <p:sldId xmlns:r="http://schemas.openxmlformats.org/officeDocument/2006/relationships" id="264" r:id="Rdaba111ac2f44537"/>
+    <p:sldId xmlns:r="http://schemas.openxmlformats.org/officeDocument/2006/relationships" id="265" r:id="Rf28c35dcb0e24b0f"/>
+    <p:sldId xmlns:r="http://schemas.openxmlformats.org/officeDocument/2006/relationships" id="266" r:id="Rb32c7e64c79d4ef7"/>
+    <p:sldId xmlns:r="http://schemas.openxmlformats.org/officeDocument/2006/relationships" id="267" r:id="R8d643b35f7ce4737"/>
+    <p:sldId xmlns:r="http://schemas.openxmlformats.org/officeDocument/2006/relationships" id="268" r:id="R1a51f52cc4eb440e"/>
   </p:sldIdLst>
   <p:sldSz cx="12192000" cy="6858000"/>
   <p:notesSz cx="6858000" cy="9144000"/>
@@ -453,7 +454,7 @@
           <a:lstStyle xmlns:a="http://schemas.openxmlformats.org/drawingml/2006/main"/>
           <a:p xmlns:a="http://schemas.openxmlformats.org/drawingml/2006/main">
             <a:r>
-              <a:t>瓷证面向陶瓷研究材料的整理、补证和交接。AI负责观察与证据整理，专业人员负责复核。器物为公开已知身份教学材料，不代表项目完成了独立鉴定。</a:t>
+              <a:t>瓷证面向陶瓷研究材料的整理、补证和交接。AI负责观察和证据整理，专业人员负责复核。器物为公开已知身份教学材料，不代表项目完成了独立鉴定。</a:t>
             </a:r>
           </a:p>
           <a:p xmlns:a="http://schemas.openxmlformats.org/drawingml/2006/main">
@@ -463,7 +464,7 @@
           </a:p>
           <a:p xmlns:a="http://schemas.openxmlformats.org/drawingml/2006/main">
             <a:r>
-              <a:t>来源与范围</a:t>
+              <a:t>来源和范围</a:t>
             </a:r>
           </a:p>
           <a:p xmlns:a="http://schemas.openxmlformats.org/drawingml/2006/main">
@@ -548,7 +549,7 @@
           <a:lstStyle xmlns:a="http://schemas.openxmlformats.org/drawingml/2006/main"/>
           <a:p xmlns:a="http://schemas.openxmlformats.org/drawingml/2006/main">
             <a:r>
-              <a:t>三种入口已经以公共教学案演示材料工作，不代表真实机构委托或合作。当前为个人作品和单人受控试用。拟议试用从小范围案卷材料整理开始，以材料整理时间、关键疑点遗漏、专家复核可用性评估产品价值。商业模式是后续探索，不虚构客户、收入、团队或已签合作。多用户权限、可信专家签署、合规审计与灾备仍需产品化。</a:t>
+              <a:t>三种入口已经以公共教学案演示材料工作，不代表真实机构委托或合作。当前为个人作品和单人受控试用。拟议试用从小范围案卷材料整理开始，以材料整理时间、关键疑点遗漏、专家复核可用性评估产品价值。商业模式是后续探索，不虚构客户、收入、团队或已签合作。多用户权限、可信专家签署、合规审计和灾备仍需产品化。</a:t>
             </a:r>
           </a:p>
           <a:p xmlns:a="http://schemas.openxmlformats.org/drawingml/2006/main">
@@ -558,7 +559,7 @@
           </a:p>
           <a:p xmlns:a="http://schemas.openxmlformats.org/drawingml/2006/main">
             <a:r>
-              <a:t>来源与范围</a:t>
+              <a:t>来源和范围</a:t>
             </a:r>
           </a:p>
           <a:p xmlns:a="http://schemas.openxmlformats.org/drawingml/2006/main">
@@ -643,7 +644,7 @@
           <a:lstStyle xmlns:a="http://schemas.openxmlformats.org/drawingml/2006/main"/>
           <a:p xmlns:a="http://schemas.openxmlformats.org/drawingml/2006/main">
             <a:r>
-              <a:t>这是下一阶段研究路线，不是已取得的专家成绩。样本应取得授权并按器物分割，专家标签与首轮证据分开，避免同器照片泄漏到训练和测试两侧。专家分别评价图像观察、区域定位、资料引用、理由、补证和拒绝判断。固定模型、资料与预算后比较有/无Skills，保留失败并在独立保留样本上回归。NVFLARE联合训练与NeMo RL后训练是未来研究，没有联合训练网络、自动在线学习或专业准确率。</a:t>
+              <a:t>这是下一阶段研究路线，不是已取得的专家成绩。样本应取得授权并按器物分割，专家标签和首轮证据分开，避免同器照片泄漏到训练和测试两侧。专家分别评价图像观察、区域定位、资料引用、理由、补证和拒绝判断。固定模型、资料和预算后比较有/无Skills，保留失败并在独立保留样本上回归。NVFLARE联合训练和NeMo RL后训练是未来研究，没有联合训练网络、自动在线学习或专业准确率。</a:t>
             </a:r>
           </a:p>
           <a:p xmlns:a="http://schemas.openxmlformats.org/drawingml/2006/main">
@@ -653,7 +654,7 @@
           </a:p>
           <a:p xmlns:a="http://schemas.openxmlformats.org/drawingml/2006/main">
             <a:r>
-              <a:t>来源与范围</a:t>
+              <a:t>来源和范围</a:t>
             </a:r>
           </a:p>
           <a:p xmlns:a="http://schemas.openxmlformats.org/drawingml/2006/main">
@@ -738,7 +739,7 @@
           <a:lstStyle xmlns:a="http://schemas.openxmlformats.org/drawingml/2006/main"/>
           <a:p xmlns:a="http://schemas.openxmlformats.org/drawingml/2006/main">
             <a:r>
-              <a:t>个人参赛作品。完整报告呈现产品、实际模型记录与部署证据。公开教学体验无需上传，不调用私有模型。公开仓库保留自研方法包、代码与脱敏部署记录。来源机构和NVIDIA不代表对本项目的背书或专业鉴定认证。</a:t>
+              <a:t>三件器物各两张Met CC0照片，保存了九次真实Spark流程。阶段A不向模型提供本件馆方年代和窑口，普通提示和Skills使用同模型、同预算；全部A结束后，阶段B再加入同件固定馆藏文字。四轮保存意见并等待补证，五轮停止，全部原件和模型原文保留，不能把停止写成成功报告。储水器由荷兰设计师Pronk设计不等同荷兰制作，彩瓷瓶没有外底或足内视角不能推出实物无款，青釉碗黄色修补外观不能单凭照片确定金缮工艺。碗的阶段B有一条来源语境引用，但底款建议和理由仍需专业评价。另有一次实际StepFun公开文字审查，属于AI反证而非专家意见。此页是公开馆藏资料的个案核查，不是独立专家鉴定或行业准确率。</a:t>
             </a:r>
           </a:p>
           <a:p xmlns:a="http://schemas.openxmlformats.org/drawingml/2006/main">
@@ -748,7 +749,117 @@
           </a:p>
           <a:p xmlns:a="http://schemas.openxmlformats.org/drawingml/2006/main">
             <a:r>
-              <a:t>来源与范围</a:t>
+              <a:t>来源和范围</a:t>
+            </a:r>
+          </a:p>
+          <a:p xmlns:a="http://schemas.openxmlformats.org/drawingml/2006/main">
+            <a:r>
+              <a:t>https://dingyucanada.github.io/cizheng-agent-skills/public-collection-check.html</a:t>
+            </a:r>
+          </a:p>
+          <a:p xmlns:a="http://schemas.openxmlformats.org/drawingml/2006/main">
+            <a:r>
+              <a:t>https://github.com/dingyucanada/cizheng-agent-skills/blob/main/docs/public-collection-case-check-20260929.md</a:t>
+            </a:r>
+          </a:p>
+          <a:p xmlns:a="http://schemas.openxmlformats.org/drawingml/2006/main">
+            <a:r>
+              <a:t>https://github.com/dingyucanada/cizheng-agent-skills/blob/main/verification/public-collection-20260929/index.json</a:t>
+            </a:r>
+          </a:p>
+          <a:p xmlns:a="http://schemas.openxmlformats.org/drawingml/2006/main">
+            <a:r>
+              <a:t>图像：The Metropolitan Museum of Art，“射手”纹青花储水器，2021.321a, b，Public Domain / CC0。https://www.metmuseum.org/art/collection/search/854455</a:t>
+            </a:r>
+          </a:p>
+          <a:p xmlns:a="http://schemas.openxmlformats.org/drawingml/2006/main">
+            <a:r>
+              <a:t>图像：The Metropolitan Museum of Art，仿古铜器形彩瓷瓶，14.40.396，Public Domain / CC0。https://www.metmuseum.org/art/collection/search/42239</a:t>
+            </a:r>
+          </a:p>
+          <a:p xmlns:a="http://schemas.openxmlformats.org/drawingml/2006/main">
+            <a:r>
+              <a:t>图像：The Metropolitan Museum of Art，龙泉青釉碗，17.57.1，Public Domain / CC0。https://www.metmuseum.org/art/collection/search/48450</a:t>
+            </a:r>
+          </a:p>
+        </p:txBody>
+      </p:sp>
+      <p:sp>
+        <p:nvSpPr>
+          <p:cNvPr id="4" name="Slide Number Placeholder 3"/>
+          <p:cNvSpPr>
+            <a:spLocks xmlns:a="http://schemas.openxmlformats.org/drawingml/2006/main" noGrp="1"/>
+          </p:cNvSpPr>
+          <p:nvPr>
+            <p:ph type="sldNum" idx="5"/>
+          </p:nvPr>
+        </p:nvSpPr>
+        <p:spPr/>
+        <p:txBody>
+          <a:bodyPr xmlns:a="http://schemas.openxmlformats.org/drawingml/2006/main"/>
+          <a:lstStyle xmlns:a="http://schemas.openxmlformats.org/drawingml/2006/main"/>
+          <a:p xmlns:a="http://schemas.openxmlformats.org/drawingml/2006/main"/>
+        </p:txBody>
+      </p:sp>
+    </p:spTree>
+  </p:cSld>
+  <p:clrMapOvr>
+    <a:masterClrMapping xmlns:a="http://schemas.openxmlformats.org/drawingml/2006/main"/>
+  </p:clrMapOvr>
+</p:notes>
+</file>
+
+<file path=ppt/notesSlides/notesSlide13.xml><?xml version="1.0" encoding="utf-8"?>
+<p:notes xmlns:p="http://schemas.openxmlformats.org/presentationml/2006/main">
+  <p:cSld>
+    <p:spTree>
+      <p:nvGrpSpPr>
+        <p:cNvPr id="1" name=""/>
+        <p:cNvGrpSpPr/>
+        <p:nvPr/>
+      </p:nvGrpSpPr>
+      <p:grpSpPr>
+        <a:xfrm xmlns:a="http://schemas.openxmlformats.org/drawingml/2006/main"/>
+      </p:grpSpPr>
+      <p:sp>
+        <p:nvSpPr>
+          <p:cNvPr id="2" name="Slide Image Placeholder 1"/>
+          <p:cNvSpPr>
+            <a:spLocks xmlns:a="http://schemas.openxmlformats.org/drawingml/2006/main" noGrp="1"/>
+          </p:cNvSpPr>
+          <p:nvPr>
+            <p:ph type="sldImg" idx="0"/>
+          </p:nvPr>
+        </p:nvSpPr>
+        <p:spPr/>
+      </p:sp>
+      <p:sp>
+        <p:nvSpPr>
+          <p:cNvPr id="3" name="Notes Placeholder 2"/>
+          <p:cNvSpPr>
+            <a:spLocks xmlns:a="http://schemas.openxmlformats.org/drawingml/2006/main" noGrp="1"/>
+          </p:cNvSpPr>
+          <p:nvPr>
+            <p:ph type="body" idx="1"/>
+          </p:nvPr>
+        </p:nvSpPr>
+        <p:spPr/>
+        <p:txBody>
+          <a:bodyPr xmlns:a="http://schemas.openxmlformats.org/drawingml/2006/main"/>
+          <a:lstStyle xmlns:a="http://schemas.openxmlformats.org/drawingml/2006/main"/>
+          <a:p xmlns:a="http://schemas.openxmlformats.org/drawingml/2006/main">
+            <a:r>
+              <a:t>个人参赛作品。完整报告呈现产品、实际模型记录和部署证据。公开教学体验无需上传，不调用私有模型。公开仓库保留自研方法包、代码和脱敏部署记录。来源机构和NVIDIA不代表对本项目的背书或专业鉴定认证。</a:t>
+            </a:r>
+          </a:p>
+          <a:p xmlns:a="http://schemas.openxmlformats.org/drawingml/2006/main">
+            <a:r>
+              <a:t/>
+            </a:r>
+          </a:p>
+          <a:p xmlns:a="http://schemas.openxmlformats.org/drawingml/2006/main">
+            <a:r>
+              <a:t>来源和范围</a:t>
             </a:r>
           </a:p>
           <a:p xmlns:a="http://schemas.openxmlformats.org/drawingml/2006/main">
@@ -848,7 +959,7 @@
           </a:p>
           <a:p xmlns:a="http://schemas.openxmlformats.org/drawingml/2006/main">
             <a:r>
-              <a:t>来源与范围</a:t>
+              <a:t>来源和范围</a:t>
             </a:r>
           </a:p>
           <a:p xmlns:a="http://schemas.openxmlformats.org/drawingml/2006/main">
@@ -943,7 +1054,7 @@
           </a:p>
           <a:p xmlns:a="http://schemas.openxmlformats.org/drawingml/2006/main">
             <a:r>
-              <a:t>来源与范围</a:t>
+              <a:t>来源和范围</a:t>
             </a:r>
           </a:p>
           <a:p xmlns:a="http://schemas.openxmlformats.org/drawingml/2006/main">
@@ -1028,7 +1139,7 @@
           <a:lstStyle xmlns:a="http://schemas.openxmlformats.org/drawingml/2006/main"/>
           <a:p xmlns:a="http://schemas.openxmlformats.org/drawingml/2006/main">
             <a:r>
-              <a:t>这页以真实保存记录说明业务链路。主视觉模型处理公开Met48607两图，StepFun step-3.7-flash只接批准的四字段文字包，没有原图或图像访问地址。两版NAT引用核查及JSON、Markdown、HTML导出有实际记录。专业问题仍待解决：初稿把同器Met18.61.4资料写为不适用本件，修订删除该句，时期与风格支持理由仍需专业复核，三项审查问题均保留未解决。流程完成不能作为鉴定准确率或Skills因果效果。</a:t>
+              <a:t>这页以真实保存记录说明业务链路。主视觉模型处理公开Met48607两图，StepFun step-3.7-flash只接批准的四字段文字包，没有原图或图像访问地址。两版NAT引用核查及JSON、Markdown、HTML导出有实际记录。专业问题仍待解决：初稿把同器Met18.61.4资料写为不适用本件，修订删除该句，时期和风格支持理由仍需专业复核，三项审查问题均保留未解决。流程完成不能作为鉴定准确率或Skills因果效果。</a:t>
             </a:r>
           </a:p>
           <a:p xmlns:a="http://schemas.openxmlformats.org/drawingml/2006/main">
@@ -1038,7 +1149,7 @@
           </a:p>
           <a:p xmlns:a="http://schemas.openxmlformats.org/drawingml/2006/main">
             <a:r>
-              <a:t>来源与范围</a:t>
+              <a:t>来源和范围</a:t>
             </a:r>
           </a:p>
           <a:p xmlns:a="http://schemas.openxmlformats.org/drawingml/2006/main">
@@ -1128,7 +1239,7 @@
           <a:lstStyle xmlns:a="http://schemas.openxmlformats.org/drawingml/2006/main"/>
           <a:p xmlns:a="http://schemas.openxmlformats.org/drawingml/2006/main">
             <a:r>
-              <a:t>七包均为真实自研文件包，按description、SKILL正文与资源渐进加载，每包有适用范围和限制。整包SHA不是专家认可或NVIDIA Verified认证。宿主限制工具权限、实际读取与进入成功主动作的材料、累计模型和工具预算。真实运行还有可选协调器材料准备，协调器加载与模型自然触发分别记录；本页不把协调器行为当作Skills自然触发或专业提升。</a:t>
+              <a:t>七包均为真实自研文件包，按description、SKILL正文和资源渐进加载，每包有适用范围和限制。整包SHA不是专家认可或NVIDIA Verified认证。宿主限制工具权限、实际读取和进入成功主动作的材料、累计模型和工具预算。真实运行还有可选协调器材料准备，协调器加载和模型自然触发分别记录；本页不把协调器行为当作Skills自然触发或专业提升。</a:t>
             </a:r>
           </a:p>
           <a:p xmlns:a="http://schemas.openxmlformats.org/drawingml/2006/main">
@@ -1138,7 +1249,7 @@
           </a:p>
           <a:p xmlns:a="http://schemas.openxmlformats.org/drawingml/2006/main">
             <a:r>
-              <a:t>来源与范围</a:t>
+              <a:t>来源和范围</a:t>
             </a:r>
           </a:p>
           <a:p xmlns:a="http://schemas.openxmlformats.org/drawingml/2006/main">
@@ -1258,7 +1369,7 @@
           <a:lstStyle xmlns:a="http://schemas.openxmlformats.org/drawingml/2006/main"/>
           <a:p xmlns:a="http://schemas.openxmlformats.org/drawingml/2006/main">
             <a:r>
-              <a:t>架构是原生可编辑对象与连接线。本地案卷使用SQLite保存原件、版本与回执，主视觉为Spark Qwen3-VL-8B。NAT经正式插件核查引用身份，不证明引用对专业结论的支持。StepFun只接明确批准的公开或脱敏文字。本轮NIM纯文本Qwen3-4B BF16为实际独立服务；TRT文字与官方Embedding+cuVS亦独立验收，主业务未自动切换。采集桥接是文件协议，不代表眼镜、手持仪器或桌面箱已完成厂商SDK与物理验收。</a:t>
+              <a:t>架构是原生可编辑对象和连接线。本地案卷使用SQLite保存原件、版本和回执，主视觉为Spark Qwen3-VL-8B。35B和27B通过独立双图案卷验证而非默认切换，较大模型不自动证明更高准确率。27B公开原始权重和进程的绑定仍待核验。NAT经正式插件核查引用身份，不证明引用对专业结论的支持。StepFun只接明确批准的公开或脱敏文字。本轮NIM纯文本Qwen3-4B BF16为实际独立服务；TRT文字和官方Embedding+cuVS亦独立验收，主业务未自动切换。采集桥接是文件协议，不代表眼镜、手持仪器或桌面箱已完成厂商SDK和物理验收。</a:t>
             </a:r>
           </a:p>
           <a:p xmlns:a="http://schemas.openxmlformats.org/drawingml/2006/main">
@@ -1268,7 +1379,7 @@
           </a:p>
           <a:p xmlns:a="http://schemas.openxmlformats.org/drawingml/2006/main">
             <a:r>
-              <a:t>来源与范围</a:t>
+              <a:t>来源和范围</a:t>
             </a:r>
           </a:p>
           <a:p xmlns:a="http://schemas.openxmlformats.org/drawingml/2006/main">
@@ -1283,7 +1394,7 @@
           </a:p>
           <a:p xmlns:a="http://schemas.openxmlformats.org/drawingml/2006/main">
             <a:r>
-              <a:t>https://github.com/dingyucanada/cizheng-agent-skills/blob/main/docs/nim-v09-update.md</a:t>
+              <a:t>https://github.com/dingyucanada/cizheng-agent-skills/blob/main/docs/spark-models-and-reasoning-v10.md</a:t>
             </a:r>
           </a:p>
           <a:p xmlns:a="http://schemas.openxmlformats.org/drawingml/2006/main">
@@ -1358,7 +1469,7 @@
           <a:lstStyle xmlns:a="http://schemas.openxmlformats.org/drawingml/2006/main"/>
           <a:p xmlns:a="http://schemas.openxmlformats.org/drawingml/2006/main">
             <a:r>
-              <a:t>主视觉Qwen3-VL-8B服务、案卷后端与独立文字/检索服务在Spark共存，模型与文件身份固定。NIM为合法官方中国分发路线的原厂SGLang Model-Free NIM Spark，保留原NIM入口，纯文字Qwen3-4B BF16，2026-09-29一次公开陶瓷POST经原NIM接口成功，CUDA trace、同容器进程与原请求/响应SHA绑定，有限八步采样不覆盖全请求。NIM模型把馆方文字记载称为独立实物证据，且多给补证项，此表证明实际运行，不证明专业质量。TensorRT-LLM使用PyTorch backend，没有序列化TRT engine。Embedding为开放官方1B v2加cuVS，而非Embedding NIM或完整SDK。其真实中文查询核验身份和数值，不代表专家相关性。未比较整案速度，未将单次文字延迟推成业务加速。</a:t>
+              <a:t>8B主视觉继续承担案卷业务。Qwen3.6-35B-A3B-NVFP4经原厂NIM的SGLang后端完成独立双图案卷流程，GPU有限采样可回查，运行后停止。35B使用Marlin NVFP4 W4A16路径，不声称完整NVFP4硬件加速。Qwen3.8-27B完成另一条独立双图案卷流程，公开工作流的原始weights_revision仍为unverified，不能证明固定原始权重和实际进程绑定。较大模型均未默认替换8B，也没有证明更高专业准确率。4B NIM和TensorRT-LLM为独立文字端点，TRT使用PyTorch backend，没有序列化engine。Embedding为开放官方1B v2加cuVS，不是Embedding NIM或完整Retriever SDK。主业务资料仍使用SQLite。这里记录部署和业务位置，不将单次延迟当作整案加速。</a:t>
             </a:r>
           </a:p>
           <a:p xmlns:a="http://schemas.openxmlformats.org/drawingml/2006/main">
@@ -1368,22 +1479,17 @@
           </a:p>
           <a:p xmlns:a="http://schemas.openxmlformats.org/drawingml/2006/main">
             <a:r>
-              <a:t>来源与范围</a:t>
+              <a:t>来源和范围</a:t>
+            </a:r>
+          </a:p>
+          <a:p xmlns:a="http://schemas.openxmlformats.org/drawingml/2006/main">
+            <a:r>
+              <a:t>https://github.com/dingyucanada/cizheng-agent-skills/blob/main/docs/spark-models-and-reasoning-v10.md</a:t>
             </a:r>
           </a:p>
           <a:p xmlns:a="http://schemas.openxmlformats.org/drawingml/2006/main">
             <a:r>
               <a:t>https://github.com/dingyucanada/cizheng-agent-skills/blob/main/docs/nim-v09-update.md</a:t>
-            </a:r>
-          </a:p>
-          <a:p xmlns:a="http://schemas.openxmlformats.org/drawingml/2006/main">
-            <a:r>
-              <a:t>https://github.com/dingyucanada/cizheng-agent-skills/blob/main/evidence/nim-v09/public-text-once/receipt.json</a:t>
-            </a:r>
-          </a:p>
-          <a:p xmlns:a="http://schemas.openxmlformats.org/drawingml/2006/main">
-            <a:r>
-              <a:t>https://github.com/dingyucanada/cizheng-agent-skills/blob/main/evidence/nim-v09/gpu-trace-summary.json</a:t>
             </a:r>
           </a:p>
           <a:p xmlns:a="http://schemas.openxmlformats.org/drawingml/2006/main">
@@ -1468,7 +1574,7 @@
           <a:lstStyle xmlns:a="http://schemas.openxmlformats.org/drawingml/2006/main"/>
           <a:p xmlns:a="http://schemas.openxmlformats.org/drawingml/2006/main">
             <a:r>
-              <a:t>筛查是已实现的独立CPU规则功能，不调用视觉模型或StepFun。结构化记载绑定本件凭据SHA和定位，自动比较年份/高度区间、同编号体系的本件编号、来源事件先后。每维只计一次，固定总权重100。矛盾指数为冲突权重，所有未知时不可评价；复核优先为冲突权重加0.5倍未知权重；覆盖为已评价权重除100。截图只用于演示软件协议，两份300–301与350–351毫米高度是合成数字，不是馆藏实测或照片测量。权重与模型依据尚未完成专家标签校准。</a:t>
+              <a:t>筛查是已实现的独立CPU规则功能，不调用视觉模型或StepFun。结构化记载绑定本件凭据SHA和定位，自动比较年份/高度区间、同编号体系的本件编号、来源事件先后。每维只计一次，固定总权重100。矛盾指数为冲突权重，所有未知时不可评价；复核优先为冲突权重加0.5倍未知权重；覆盖为已评价权重除100。截图只用于演示软件协议，两份300–301和350–351毫米高度是合成数字，不是馆藏实测或照片测量。权重和模型依据尚未完成专家标签校准。</a:t>
             </a:r>
           </a:p>
           <a:p xmlns:a="http://schemas.openxmlformats.org/drawingml/2006/main">
@@ -1478,7 +1584,7 @@
           </a:p>
           <a:p xmlns:a="http://schemas.openxmlformats.org/drawingml/2006/main">
             <a:r>
-              <a:t>来源与范围</a:t>
+              <a:t>来源和范围</a:t>
             </a:r>
           </a:p>
           <a:p xmlns:a="http://schemas.openxmlformats.org/drawingml/2006/main">
@@ -1568,7 +1674,7 @@
           <a:lstStyle xmlns:a="http://schemas.openxmlformats.org/drawingml/2006/main"/>
           <a:p xmlns:a="http://schemas.openxmlformats.org/drawingml/2006/main">
             <a:r>
-              <a:t>整体照片能支持部分可见形态，但不能补造底足、款识或修复细节。本页的拍摄循环是产品逻辑，也是可编辑流程。现已实现统一本机multipart会话协议、客户端、SHA校验、原始blob、设备声明、时间/单位与归档回执，并通过真实本机HTTP上传下载保持公共图片原字节SHA。设备身份、相机时钟和传感器尚未厂商认证或实物标定。智能眼镜、专业手持和桌面箱先导出文件到本机桥接；厂商SDK、直接拍摄控制和箱式硬件为未来研究，当前不具备材料检测或物理鉴定能力。</a:t>
+              <a:t>整体照片能支持部分可见形态，但不能补造底足、款识或修复细节。本页的拍摄循环是产品逻辑，也是可编辑流程。现已实现统一本机multipart会话协议、客户端、SHA校验、原始blob、设备声明、时间/单位和归档回执，并通过真实本机HTTP上传下载保持公共图片原字节SHA。设备身份、相机时钟和传感器尚未厂商认证或实物标定。智能眼镜、专业手持和桌面箱先导出文件到本机桥接；厂商SDK、直接拍摄控制和箱式硬件为未来研究，当前不具备材料检测或物理鉴定能力。</a:t>
             </a:r>
           </a:p>
           <a:p xmlns:a="http://schemas.openxmlformats.org/drawingml/2006/main">
@@ -1578,7 +1684,7 @@
           </a:p>
           <a:p xmlns:a="http://schemas.openxmlformats.org/drawingml/2006/main">
             <a:r>
-              <a:t>来源与范围</a:t>
+              <a:t>来源和范围</a:t>
             </a:r>
           </a:p>
           <a:p xmlns:a="http://schemas.openxmlformats.org/drawingml/2006/main">
@@ -1666,7 +1772,7 @@
   </p:cSld>
   <p:clrMap bg1="lt1" tx1="dk1" bg2="lt2" tx2="dk2" accent1="accent1" accent2="accent2" accent3="accent3" accent4="accent4" accent5="accent5" accent6="accent6" hlink="hlink" folHlink="folHlink"/>
   <p:sldLayoutIdLst>
-    <p:sldLayoutId xmlns:r="http://schemas.openxmlformats.org/officeDocument/2006/relationships" id="2147483649" r:id="Re5f77640927b4a82"/>
+    <p:sldLayoutId xmlns:r="http://schemas.openxmlformats.org/officeDocument/2006/relationships" id="2147483649" r:id="Ree3890084a9c4d2e"/>
   </p:sldLayoutIdLst>
   <p:txStyles>
     <p:titleStyle>
@@ -2221,7 +2327,7 @@
           <p:nvPr/>
         </p:nvPicPr>
         <p:blipFill>
-          <a:blip xmlns:r="http://schemas.openxmlformats.org/officeDocument/2006/relationships" xmlns:a="http://schemas.openxmlformats.org/drawingml/2006/main" r:embed="R5551aab303524e88"/>
+          <a:blip xmlns:r="http://schemas.openxmlformats.org/officeDocument/2006/relationships" xmlns:a="http://schemas.openxmlformats.org/drawingml/2006/main" r:embed="R7f183f85d1d54c4c"/>
           <a:srcRect xmlns:a="http://schemas.openxmlformats.org/drawingml/2006/main" l="0" t="3125" r="0" b="3125"/>
           <a:stretch xmlns:a="http://schemas.openxmlformats.org/drawingml/2006/main">
             <a:fillRect l="0" t="0" r="0" b="0"/>
@@ -2242,7 +2348,7 @@
           <p:cNvPr id="2" name="瓷证">
             <a:extLst xmlns:a="http://schemas.openxmlformats.org/drawingml/2006/main">
               <a:ext uri="{FF2B5EF4-FFF2-40B4-BE49-F238E27FC236}">
-                <a16:creationId xmlns:a16="http://schemas.microsoft.com/office/drawing/2014/main" id="{7D80B05A-1329-4CFD-9629-5B88433B5DA1}"/>
+                <a16:creationId xmlns:a16="http://schemas.microsoft.com/office/drawing/2014/main" id="{EE11AE25-E34B-4F62-8DC2-141CBB4852D4}"/>
               </a:ext>
             </a:extLst>
           </p:cNvPr>
@@ -2299,7 +2405,7 @@
           <p:cNvPr id="3" name="陶瓷证据研究 Agent">
             <a:extLst xmlns:a="http://schemas.openxmlformats.org/drawingml/2006/main">
               <a:ext uri="{FF2B5EF4-FFF2-40B4-BE49-F238E27FC236}">
-                <a16:creationId xmlns:a16="http://schemas.microsoft.com/office/drawing/2014/main" id="{FD29A6AF-BA75-4959-B3B0-2B5A7EE20A56}"/>
+                <a16:creationId xmlns:a16="http://schemas.microsoft.com/office/drawing/2014/main" id="{A90BA10B-9189-4A81-8C87-D7485E69AC1B}"/>
               </a:ext>
             </a:extLst>
           </p:cNvPr>
@@ -2353,10 +2459,10 @@
       </p:sp>
       <p:sp>
         <p:nvSpPr>
-          <p:cNvPr id="4" name="原件、观察与资料依据&#10;保存在一份可继续复核的案卷中">
+          <p:cNvPr id="4" name="原件、观察和资料依据&#10;保存在一份可继续复核的案卷中">
             <a:extLst xmlns:a="http://schemas.openxmlformats.org/drawingml/2006/main">
               <a:ext uri="{FF2B5EF4-FFF2-40B4-BE49-F238E27FC236}">
-                <a16:creationId xmlns:a16="http://schemas.microsoft.com/office/drawing/2014/main" id="{822062D7-5703-4916-B625-690EEF2D2500}"/>
+                <a16:creationId xmlns:a16="http://schemas.microsoft.com/office/drawing/2014/main" id="{540A95B2-9728-48E2-BD24-5753CD9EA2C8}"/>
               </a:ext>
             </a:extLst>
           </p:cNvPr>
@@ -2403,7 +2509,7 @@
                 <a:ea typeface="Hiragino Sans GB"/>
                 <a:cs typeface="Hiragino Sans GB"/>
               </a:rPr>
-              <a:t>原件、观察与资料依据</a:t>
+              <a:t>原件、观察和资料依据</a:t>
             </a:r>
           </a:p>
           <a:p xmlns:a="http://schemas.openxmlformats.org/drawingml/2006/main">
@@ -2436,7 +2542,7 @@
           <p:cNvPr id="5" name="个人参赛作品  ·  2026.09">
             <a:extLst xmlns:a="http://schemas.openxmlformats.org/drawingml/2006/main">
               <a:ext uri="{FF2B5EF4-FFF2-40B4-BE49-F238E27FC236}">
-                <a16:creationId xmlns:a16="http://schemas.microsoft.com/office/drawing/2014/main" id="{596981BE-ED58-4C8B-B4BF-519358E6708E}"/>
+                <a16:creationId xmlns:a16="http://schemas.microsoft.com/office/drawing/2014/main" id="{09C022A7-C8FD-452B-A8FE-6E181609F74D}"/>
               </a:ext>
             </a:extLst>
           </p:cNvPr>
@@ -2491,7 +2597,7 @@
     </p:spTree>
     <p:extLst>
       <p:ext uri="{BB962C8B-B14F-4D97-AF65-F5344CB8AC3E}">
-        <p14:creationId xmlns:p14="http://schemas.microsoft.com/office/powerpoint/2010/main" val="445451928"/>
+        <p14:creationId xmlns:p14="http://schemas.microsoft.com/office/powerpoint/2010/main" val="953438989"/>
       </p:ext>
     </p:extLst>
   </p:cSld>
@@ -2519,10 +2625,10 @@
       </p:grpSpPr>
       <p:sp>
         <p:nvSpPr>
-          <p:cNvPr id="7" name="专业试用的交付与采用方式">
+          <p:cNvPr id="7" name="专业试用的交付和采用方式">
             <a:extLst xmlns:a="http://schemas.openxmlformats.org/drawingml/2006/main">
               <a:ext uri="{FF2B5EF4-FFF2-40B4-BE49-F238E27FC236}">
-                <a16:creationId xmlns:a16="http://schemas.microsoft.com/office/drawing/2014/main" id="{0BAE11AA-F611-4028-9380-3D303708CDF3}"/>
+                <a16:creationId xmlns:a16="http://schemas.microsoft.com/office/drawing/2014/main" id="{E1B8B4C6-47B3-4D27-BBF6-ACCD7CF11D8E}"/>
               </a:ext>
             </a:extLst>
           </p:cNvPr>
@@ -2569,7 +2675,7 @@
                 <a:ea typeface="Hiragino Sans GB"/>
                 <a:cs typeface="Hiragino Sans GB"/>
               </a:rPr>
-              <a:t>专业试用的交付与采用方式</a:t>
+              <a:t>专业试用的交付和采用方式</a:t>
             </a:r>
           </a:p>
         </p:txBody>
@@ -2579,7 +2685,7 @@
           <p:cNvPr id="2" name="从一件器物的材料整理开始，验证交接是否真正可用">
             <a:extLst xmlns:a="http://schemas.openxmlformats.org/drawingml/2006/main">
               <a:ext uri="{FF2B5EF4-FFF2-40B4-BE49-F238E27FC236}">
-                <a16:creationId xmlns:a16="http://schemas.microsoft.com/office/drawing/2014/main" id="{A3CB8F31-2EB2-422C-A62A-429703A46AF0}"/>
+                <a16:creationId xmlns:a16="http://schemas.microsoft.com/office/drawing/2014/main" id="{F130DC85-3698-4F80-9DED-D25FD4A24FFC}"/>
               </a:ext>
             </a:extLst>
           </p:cNvPr>
@@ -2786,7 +2892,7 @@
                           <a:ea typeface="Hiragino Sans GB"/>
                           <a:cs typeface="Hiragino Sans GB"/>
                         </a:rPr>
-                        <a:t>固定文献与修订档案</a:t>
+                        <a:t>固定文献和修订档案</a:t>
                       </a:r>
                     </a:p>
                   </a:txBody>
@@ -2866,7 +2972,7 @@
                           <a:ea typeface="Hiragino Sans GB"/>
                           <a:cs typeface="Hiragino Sans GB"/>
                         </a:rPr>
-                        <a:t>来源事件与对应凭据</a:t>
+                        <a:t>来源事件和对应凭据</a:t>
                       </a:r>
                     </a:p>
                     <a:p>
@@ -2972,7 +3078,7 @@
                           <a:ea typeface="Hiragino Sans GB"/>
                           <a:cs typeface="Hiragino Sans GB"/>
                         </a:rPr>
-                        <a:t>待补证与离线交接包</a:t>
+                        <a:t>待补证和离线交接包</a:t>
                       </a:r>
                     </a:p>
                   </a:txBody>
@@ -3018,7 +3124,7 @@
           <p:cNvPr id="4" name="商业验证计划">
             <a:extLst xmlns:a="http://schemas.openxmlformats.org/drawingml/2006/main">
               <a:ext uri="{FF2B5EF4-FFF2-40B4-BE49-F238E27FC236}">
-                <a16:creationId xmlns:a16="http://schemas.microsoft.com/office/drawing/2014/main" id="{9B0D80B9-07DF-4438-B16C-76241C32C690}"/>
+                <a16:creationId xmlns:a16="http://schemas.microsoft.com/office/drawing/2014/main" id="{E2E97FB1-1784-4317-879C-FB099488118E}"/>
               </a:ext>
             </a:extLst>
           </p:cNvPr>
@@ -3072,10 +3178,10 @@
       </p:sp>
       <p:sp>
         <p:nvSpPr>
-          <p:cNvPr id="5" name="以整理时间、疑点遗漏和复核可用性评价试用，探索本地部署与服务订阅">
+          <p:cNvPr id="5" name="以整理时间、疑点遗漏和复核可用性评价试用，探索本地部署和服务订阅">
             <a:extLst xmlns:a="http://schemas.openxmlformats.org/drawingml/2006/main">
               <a:ext uri="{FF2B5EF4-FFF2-40B4-BE49-F238E27FC236}">
-                <a16:creationId xmlns:a16="http://schemas.microsoft.com/office/drawing/2014/main" id="{5D6F3FF1-52C0-42BC-B8BD-1A7EFF38913A}"/>
+                <a16:creationId xmlns:a16="http://schemas.microsoft.com/office/drawing/2014/main" id="{DDE2773C-3EBC-46FD-BC89-6FC10F480F8D}"/>
               </a:ext>
             </a:extLst>
           </p:cNvPr>
@@ -3122,7 +3228,7 @@
                 <a:ea typeface="Hiragino Sans GB"/>
                 <a:cs typeface="Hiragino Sans GB"/>
               </a:rPr>
-              <a:t>以整理时间、疑点遗漏和复核可用性评价试用，探索本地部署与服务订阅</a:t>
+              <a:t>以整理时间、疑点遗漏和复核可用性评价试用，探索本地部署和服务订阅</a:t>
             </a:r>
           </a:p>
         </p:txBody>
@@ -3132,7 +3238,7 @@
           <p:cNvPr id="6" name="10">
             <a:extLst xmlns:a="http://schemas.openxmlformats.org/drawingml/2006/main">
               <a:ext uri="{FF2B5EF4-FFF2-40B4-BE49-F238E27FC236}">
-                <a16:creationId xmlns:a16="http://schemas.microsoft.com/office/drawing/2014/main" id="{6EF7564F-397F-4B04-8FFC-9388DD142F2D}"/>
+                <a16:creationId xmlns:a16="http://schemas.microsoft.com/office/drawing/2014/main" id="{5A9846B6-52EB-4D09-BE12-9284E76B9095}"/>
               </a:ext>
             </a:extLst>
           </p:cNvPr>
@@ -3187,7 +3293,7 @@
     </p:spTree>
     <p:extLst>
       <p:ext uri="{BB962C8B-B14F-4D97-AF65-F5344CB8AC3E}">
-        <p14:creationId xmlns:p14="http://schemas.microsoft.com/office/powerpoint/2010/main" val="2026025506"/>
+        <p14:creationId xmlns:p14="http://schemas.microsoft.com/office/powerpoint/2010/main" val="776296571"/>
       </p:ext>
     </p:extLst>
   </p:cSld>
@@ -3215,10 +3321,10 @@
       </p:grpSpPr>
       <p:sp>
         <p:nvSpPr>
-          <p:cNvPr id="15" name="专家反馈驱动方法与模型改进">
+          <p:cNvPr id="15" name="专家反馈驱动方法和模型改进">
             <a:extLst xmlns:a="http://schemas.openxmlformats.org/drawingml/2006/main">
               <a:ext uri="{FF2B5EF4-FFF2-40B4-BE49-F238E27FC236}">
-                <a16:creationId xmlns:a16="http://schemas.microsoft.com/office/drawing/2014/main" id="{BD03C1DC-95C5-4DEF-826B-ECE4126803FD}"/>
+                <a16:creationId xmlns:a16="http://schemas.microsoft.com/office/drawing/2014/main" id="{BCBA35DD-1C21-42CB-AEDD-EF7062D44F19}"/>
               </a:ext>
             </a:extLst>
           </p:cNvPr>
@@ -3265,17 +3371,17 @@
                 <a:ea typeface="Hiragino Sans GB"/>
                 <a:cs typeface="Hiragino Sans GB"/>
               </a:rPr>
-              <a:t>专家反馈驱动方法与模型改进</a:t>
-            </a:r>
-          </a:p>
-        </p:txBody>
-      </p:sp>
-      <p:sp>
-        <p:nvSpPr>
-          <p:cNvPr id="2" name="下一阶段先验证观察、引用与理由，再决定训练和产品化">
+              <a:t>专家反馈驱动方法和模型改进</a:t>
+            </a:r>
+          </a:p>
+        </p:txBody>
+      </p:sp>
+      <p:sp>
+        <p:nvSpPr>
+          <p:cNvPr id="2" name="下一阶段先验证观察、引用和理由，再决定训练和产品化">
             <a:extLst xmlns:a="http://schemas.openxmlformats.org/drawingml/2006/main">
               <a:ext uri="{FF2B5EF4-FFF2-40B4-BE49-F238E27FC236}">
-                <a16:creationId xmlns:a16="http://schemas.microsoft.com/office/drawing/2014/main" id="{A27B0334-603E-4D3A-B7E0-9F81B0E131E8}"/>
+                <a16:creationId xmlns:a16="http://schemas.microsoft.com/office/drawing/2014/main" id="{B2FAE8D6-81C8-44B9-B02E-4D89351AF44B}"/>
               </a:ext>
             </a:extLst>
           </p:cNvPr>
@@ -3322,7 +3428,7 @@
                 <a:ea typeface="Hiragino Sans GB"/>
                 <a:cs typeface="Hiragino Sans GB"/>
               </a:rPr>
-              <a:t>下一阶段先验证观察、引用与理由，再决定训练和产品化</a:t>
+              <a:t>下一阶段先验证观察、引用和理由，再决定训练和产品化</a:t>
             </a:r>
           </a:p>
         </p:txBody>
@@ -3332,7 +3438,7 @@
           <p:cNvPr id="3" name="授权专家样本">
             <a:extLst xmlns:a="http://schemas.openxmlformats.org/drawingml/2006/main">
               <a:ext uri="{FF2B5EF4-FFF2-40B4-BE49-F238E27FC236}">
-                <a16:creationId xmlns:a16="http://schemas.microsoft.com/office/drawing/2014/main" id="{56405B49-7010-482B-9BCF-ADB8BC25C987}"/>
+                <a16:creationId xmlns:a16="http://schemas.microsoft.com/office/drawing/2014/main" id="{E021FD7D-A0E4-491B-9E40-6592AFE96AB4}"/>
               </a:ext>
             </a:extLst>
           </p:cNvPr>
@@ -3409,7 +3515,7 @@
                 <a:ea typeface="Hiragino Sans GB"/>
                 <a:cs typeface="Hiragino Sans GB"/>
               </a:rPr>
-              <a:t>照片与对象身份固定</a:t>
+              <a:t>照片和对象身份固定</a:t>
             </a:r>
           </a:p>
           <a:p xmlns:a="http://schemas.openxmlformats.org/drawingml/2006/main">
@@ -3442,7 +3548,7 @@
           <p:cNvPr id="4" name="独立评测">
             <a:extLst xmlns:a="http://schemas.openxmlformats.org/drawingml/2006/main">
               <a:ext uri="{FF2B5EF4-FFF2-40B4-BE49-F238E27FC236}">
-                <a16:creationId xmlns:a16="http://schemas.microsoft.com/office/drawing/2014/main" id="{3C38A158-D251-4825-BBCD-5DCA02A72E7E}"/>
+                <a16:creationId xmlns:a16="http://schemas.microsoft.com/office/drawing/2014/main" id="{EB2A8501-7369-4B17-A8C0-7731C40F9659}"/>
               </a:ext>
             </a:extLst>
           </p:cNvPr>
@@ -3519,7 +3625,7 @@
                 <a:ea typeface="Hiragino Sans GB"/>
                 <a:cs typeface="Hiragino Sans GB"/>
               </a:rPr>
-              <a:t>同模型、资料与预算</a:t>
+              <a:t>同模型、资料和预算</a:t>
             </a:r>
           </a:p>
           <a:p xmlns:a="http://schemas.openxmlformats.org/drawingml/2006/main">
@@ -3542,17 +3648,17 @@
                 <a:ea typeface="Hiragino Sans GB"/>
                 <a:cs typeface="Hiragino Sans GB"/>
               </a:rPr>
-              <a:t>有 / 无 Skills 与盲评</a:t>
-            </a:r>
-          </a:p>
-        </p:txBody>
-      </p:sp>
-      <p:sp>
-        <p:nvSpPr>
-          <p:cNvPr id="5" name="审核与保留集回归">
+              <a:t>有 / 无 Skills 和盲评</a:t>
+            </a:r>
+          </a:p>
+        </p:txBody>
+      </p:sp>
+      <p:sp>
+        <p:nvSpPr>
+          <p:cNvPr id="5" name="审核和保留集回归">
             <a:extLst xmlns:a="http://schemas.openxmlformats.org/drawingml/2006/main">
               <a:ext uri="{FF2B5EF4-FFF2-40B4-BE49-F238E27FC236}">
-                <a16:creationId xmlns:a16="http://schemas.microsoft.com/office/drawing/2014/main" id="{434A5781-826E-46F1-B447-C674C4E40CA0}"/>
+                <a16:creationId xmlns:a16="http://schemas.microsoft.com/office/drawing/2014/main" id="{F7D55A61-97BA-4873-B13C-E7C8F7A41114}"/>
               </a:ext>
             </a:extLst>
           </p:cNvPr>
@@ -3606,7 +3712,7 @@
                 <a:ea typeface="Hiragino Sans GB"/>
                 <a:cs typeface="Hiragino Sans GB"/>
               </a:rPr>
-              <a:t>审核与保留集回归</a:t>
+              <a:t>审核和保留集回归</a:t>
             </a:r>
           </a:p>
           <a:p xmlns:a="http://schemas.openxmlformats.org/drawingml/2006/main">
@@ -3629,7 +3735,7 @@
                 <a:ea typeface="Hiragino Sans GB"/>
                 <a:cs typeface="Hiragino Sans GB"/>
               </a:rPr>
-              <a:t>修改方法与模型版本</a:t>
+              <a:t>修改方法和模型版本</a:t>
             </a:r>
           </a:p>
           <a:p xmlns:a="http://schemas.openxmlformats.org/drawingml/2006/main">
@@ -3714,7 +3820,7 @@
           <p:cNvPr id="8" name="">
             <a:extLst xmlns:a="http://schemas.openxmlformats.org/drawingml/2006/main">
               <a:ext uri="{FF2B5EF4-FFF2-40B4-BE49-F238E27FC236}">
-                <a16:creationId xmlns:a16="http://schemas.microsoft.com/office/drawing/2014/main" id="{AF10A097-4DFF-4719-B6A5-0BDB20286D45}"/>
+                <a16:creationId xmlns:a16="http://schemas.microsoft.com/office/drawing/2014/main" id="{9EF6D365-80B6-4C89-8E50-AE1E285CEDAF}"/>
               </a:ext>
             </a:extLst>
           </p:cNvPr>
@@ -3744,7 +3850,7 @@
           <p:cNvPr id="9" name="研究方向">
             <a:extLst xmlns:a="http://schemas.openxmlformats.org/drawingml/2006/main">
               <a:ext uri="{FF2B5EF4-FFF2-40B4-BE49-F238E27FC236}">
-                <a16:creationId xmlns:a16="http://schemas.microsoft.com/office/drawing/2014/main" id="{2E7B0175-4B41-4690-A339-3308B2BFCFF6}"/>
+                <a16:creationId xmlns:a16="http://schemas.microsoft.com/office/drawing/2014/main" id="{1E3AE909-3161-4CAB-991C-8C0524A6137D}"/>
               </a:ext>
             </a:extLst>
           </p:cNvPr>
@@ -3798,10 +3904,10 @@
       </p:sp>
       <p:sp>
         <p:nvSpPr>
-          <p:cNvPr id="10" name="受控采集与多时相档案&#10;将专业反馈转成有许可、可审阅的离线材料">
+          <p:cNvPr id="10" name="受控采集和多时相档案&#10;将专业反馈转成有许可、可审阅的离线材料">
             <a:extLst xmlns:a="http://schemas.openxmlformats.org/drawingml/2006/main">
               <a:ext uri="{FF2B5EF4-FFF2-40B4-BE49-F238E27FC236}">
-                <a16:creationId xmlns:a16="http://schemas.microsoft.com/office/drawing/2014/main" id="{C6960EDB-0208-4ADC-956A-A598F27AC757}"/>
+                <a16:creationId xmlns:a16="http://schemas.microsoft.com/office/drawing/2014/main" id="{857253B3-33DB-41AE-86C0-D28258FC07FA}"/>
               </a:ext>
             </a:extLst>
           </p:cNvPr>
@@ -3848,7 +3954,7 @@
                 <a:ea typeface="Hiragino Sans GB"/>
                 <a:cs typeface="Hiragino Sans GB"/>
               </a:rPr>
-              <a:t>受控采集与多时相档案</a:t>
+              <a:t>受控采集和多时相档案</a:t>
             </a:r>
           </a:p>
           <a:p xmlns:a="http://schemas.openxmlformats.org/drawingml/2006/main">
@@ -3878,10 +3984,10 @@
       </p:sp>
       <p:sp>
         <p:nvSpPr>
-          <p:cNvPr id="11" name="机构协作与后训练">
+          <p:cNvPr id="11" name="机构协作和后训练">
             <a:extLst xmlns:a="http://schemas.openxmlformats.org/drawingml/2006/main">
               <a:ext uri="{FF2B5EF4-FFF2-40B4-BE49-F238E27FC236}">
-                <a16:creationId xmlns:a16="http://schemas.microsoft.com/office/drawing/2014/main" id="{4BCCFD95-CF70-4FFE-938B-6702B882D053}"/>
+                <a16:creationId xmlns:a16="http://schemas.microsoft.com/office/drawing/2014/main" id="{22674EFD-45E3-4762-B311-5B6AF0148139}"/>
               </a:ext>
             </a:extLst>
           </p:cNvPr>
@@ -3928,17 +4034,17 @@
                 <a:ea typeface="Hiragino Sans GB"/>
                 <a:cs typeface="Hiragino Sans GB"/>
               </a:rPr>
-              <a:t>机构协作与后训练</a:t>
-            </a:r>
-          </a:p>
-        </p:txBody>
-      </p:sp>
-      <p:sp>
-        <p:nvSpPr>
-          <p:cNvPr id="12" name="探索 NVFLARE 联合训练与 NeMo RL，验证后再发布版本">
+              <a:t>机构协作和后训练</a:t>
+            </a:r>
+          </a:p>
+        </p:txBody>
+      </p:sp>
+      <p:sp>
+        <p:nvSpPr>
+          <p:cNvPr id="12" name="探索 NVFLARE 联合训练和 NeMo RL，验证后再发布版本">
             <a:extLst xmlns:a="http://schemas.openxmlformats.org/drawingml/2006/main">
               <a:ext uri="{FF2B5EF4-FFF2-40B4-BE49-F238E27FC236}">
-                <a16:creationId xmlns:a16="http://schemas.microsoft.com/office/drawing/2014/main" id="{98B698B7-E7A4-45F1-803E-DA883D889AB3}"/>
+                <a16:creationId xmlns:a16="http://schemas.microsoft.com/office/drawing/2014/main" id="{27EB97A9-FC7B-442D-925C-D5E2A593BFDA}"/>
               </a:ext>
             </a:extLst>
           </p:cNvPr>
@@ -3985,17 +4091,17 @@
                 <a:ea typeface="Hiragino Sans GB"/>
                 <a:cs typeface="Hiragino Sans GB"/>
               </a:rPr>
-              <a:t>探索 NVFLARE 联合训练与 NeMo RL，验证后再发布版本</a:t>
-            </a:r>
-          </a:p>
-        </p:txBody>
-      </p:sp>
-      <p:sp>
-        <p:nvSpPr>
-          <p:cNvPr id="13" name="当前尚未完成独立专家样本评价与真品概率校准">
+              <a:t>探索 NVFLARE 联合训练和 NeMo RL，验证后再发布版本</a:t>
+            </a:r>
+          </a:p>
+        </p:txBody>
+      </p:sp>
+      <p:sp>
+        <p:nvSpPr>
+          <p:cNvPr id="13" name="当前尚未完成独立专家样本评价和真品概率校准">
             <a:extLst xmlns:a="http://schemas.openxmlformats.org/drawingml/2006/main">
               <a:ext uri="{FF2B5EF4-FFF2-40B4-BE49-F238E27FC236}">
-                <a16:creationId xmlns:a16="http://schemas.microsoft.com/office/drawing/2014/main" id="{6C3E0415-5EC9-4F20-87E5-8EF3D8089D0E}"/>
+                <a16:creationId xmlns:a16="http://schemas.microsoft.com/office/drawing/2014/main" id="{257E6174-CCFA-439A-8ED9-7DD1C9E4C0BD}"/>
               </a:ext>
             </a:extLst>
           </p:cNvPr>
@@ -4042,7 +4148,7 @@
                 <a:ea typeface="Hiragino Sans GB"/>
                 <a:cs typeface="Hiragino Sans GB"/>
               </a:rPr>
-              <a:t>当前尚未完成独立专家样本评价与真品概率校准</a:t>
+              <a:t>当前尚未完成独立专家样本评价和真品概率校准</a:t>
             </a:r>
           </a:p>
         </p:txBody>
@@ -4052,7 +4158,7 @@
           <p:cNvPr id="14" name="11">
             <a:extLst xmlns:a="http://schemas.openxmlformats.org/drawingml/2006/main">
               <a:ext uri="{FF2B5EF4-FFF2-40B4-BE49-F238E27FC236}">
-                <a16:creationId xmlns:a16="http://schemas.microsoft.com/office/drawing/2014/main" id="{EF459548-9DA6-4967-9CFC-9061FBB5949F}"/>
+                <a16:creationId xmlns:a16="http://schemas.microsoft.com/office/drawing/2014/main" id="{09162A42-829F-40C0-B1CC-96B772736C59}"/>
               </a:ext>
             </a:extLst>
           </p:cNvPr>
@@ -4107,7 +4213,7 @@
     </p:spTree>
     <p:extLst>
       <p:ext uri="{BB962C8B-B14F-4D97-AF65-F5344CB8AC3E}">
-        <p14:creationId xmlns:p14="http://schemas.microsoft.com/office/powerpoint/2010/main" val="359200355"/>
+        <p14:creationId xmlns:p14="http://schemas.microsoft.com/office/powerpoint/2010/main" val="1026448446"/>
       </p:ext>
     </p:extLst>
   </p:cSld>
@@ -4115,6 +4221,911 @@
 </file>
 
 <file path=ppt/slides/slide12.xml><?xml version="1.0" encoding="utf-8"?>
+<p:sld xmlns:p="http://schemas.openxmlformats.org/presentationml/2006/main">
+  <p:cSld>
+    <p:bg>
+      <p:bgPr>
+        <a:solidFill xmlns:a="http://schemas.openxmlformats.org/drawingml/2006/main">
+          <a:srgbClr val="FAFCFD"/>
+        </a:solidFill>
+      </p:bgPr>
+    </p:bg>
+    <p:spTree>
+      <p:nvGrpSpPr>
+        <p:cNvPr id="1" name=""/>
+        <p:cNvGrpSpPr/>
+        <p:nvPr/>
+      </p:nvGrpSpPr>
+      <p:grpSpPr>
+        <a:xfrm xmlns:a="http://schemas.openxmlformats.org/drawingml/2006/main"/>
+      </p:grpSpPr>
+      <p:sp>
+        <p:nvSpPr>
+          <p:cNvPr id="17" name="公开馆藏个案：逐条核对观察和理由">
+            <a:extLst xmlns:a="http://schemas.openxmlformats.org/drawingml/2006/main">
+              <a:ext uri="{FF2B5EF4-FFF2-40B4-BE49-F238E27FC236}">
+                <a16:creationId xmlns:a16="http://schemas.microsoft.com/office/drawing/2014/main" id="{5B84386D-0094-4FB4-B811-49B3ED156650}"/>
+              </a:ext>
+            </a:extLst>
+          </p:cNvPr>
+          <p:cNvSpPr>
+            <a:spLocks xmlns:a="http://schemas.openxmlformats.org/drawingml/2006/main" noGrp="1"/>
+          </p:cNvSpPr>
+          <p:nvPr/>
+        </p:nvSpPr>
+        <p:spPr>
+          <a:xfrm xmlns:a="http://schemas.openxmlformats.org/drawingml/2006/main">
+            <a:off x="609600" y="457200"/>
+            <a:ext cx="10972800" cy="704850"/>
+          </a:xfrm>
+          <a:prstGeom xmlns:a="http://schemas.openxmlformats.org/drawingml/2006/main" prst="rect">
+            <a:avLst/>
+          </a:prstGeom>
+          <a:noFill xmlns:a="http://schemas.openxmlformats.org/drawingml/2006/main"/>
+          <a:ln xmlns:a="http://schemas.openxmlformats.org/drawingml/2006/main" w="0">
+            <a:noFill/>
+          </a:ln>
+        </p:spPr>
+        <p:txBody>
+          <a:bodyPr xmlns:a="http://schemas.openxmlformats.org/drawingml/2006/main" lIns="0" tIns="0" rIns="0" bIns="0" anchor="t">
+            <a:noAutofit/>
+          </a:bodyPr>
+          <a:lstStyle xmlns:a="http://schemas.openxmlformats.org/drawingml/2006/main"/>
+          <a:p xmlns:a="http://schemas.openxmlformats.org/drawingml/2006/main">
+            <a:pPr algn="l">
+              <a:defRPr sz="3300" b="1">
+                <a:solidFill>
+                  <a:srgbClr val="132D49"/>
+                </a:solidFill>
+                <a:latin typeface="Hiragino Sans GB"/>
+                <a:ea typeface="Hiragino Sans GB"/>
+                <a:cs typeface="Hiragino Sans GB"/>
+              </a:defRPr>
+            </a:pPr>
+            <a:r>
+              <a:rPr sz="3300" b="1">
+                <a:solidFill>
+                  <a:srgbClr val="132D49"/>
+                </a:solidFill>
+                <a:latin typeface="Hiragino Sans GB"/>
+                <a:ea typeface="Hiragino Sans GB"/>
+                <a:cs typeface="Hiragino Sans GB"/>
+              </a:rPr>
+              <a:t>公开馆藏个案：逐条核对观察和理由</a:t>
+            </a:r>
+          </a:p>
+        </p:txBody>
+      </p:sp>
+      <p:sp>
+        <p:nvSpPr>
+          <p:cNvPr id="2" name="先看照片，再加入同件馆藏记载，检查理由如何变化">
+            <a:extLst xmlns:a="http://schemas.openxmlformats.org/drawingml/2006/main">
+              <a:ext uri="{FF2B5EF4-FFF2-40B4-BE49-F238E27FC236}">
+                <a16:creationId xmlns:a16="http://schemas.microsoft.com/office/drawing/2014/main" id="{BDDCCFA5-AAA6-4921-80C2-30828AE9DCFB}"/>
+              </a:ext>
+            </a:extLst>
+          </p:cNvPr>
+          <p:cNvSpPr>
+            <a:spLocks xmlns:a="http://schemas.openxmlformats.org/drawingml/2006/main" noGrp="1"/>
+          </p:cNvSpPr>
+          <p:nvPr/>
+        </p:nvSpPr>
+        <p:spPr>
+          <a:xfrm xmlns:a="http://schemas.openxmlformats.org/drawingml/2006/main">
+            <a:off x="628650" y="1238250"/>
+            <a:ext cx="10906125" cy="428625"/>
+          </a:xfrm>
+          <a:prstGeom xmlns:a="http://schemas.openxmlformats.org/drawingml/2006/main" prst="rect">
+            <a:avLst/>
+          </a:prstGeom>
+          <a:noFill xmlns:a="http://schemas.openxmlformats.org/drawingml/2006/main"/>
+          <a:ln xmlns:a="http://schemas.openxmlformats.org/drawingml/2006/main" w="0">
+            <a:noFill/>
+          </a:ln>
+        </p:spPr>
+        <p:txBody>
+          <a:bodyPr xmlns:a="http://schemas.openxmlformats.org/drawingml/2006/main" lIns="0" tIns="0" rIns="0" bIns="0" anchor="t">
+            <a:noAutofit/>
+          </a:bodyPr>
+          <a:lstStyle xmlns:a="http://schemas.openxmlformats.org/drawingml/2006/main"/>
+          <a:p xmlns:a="http://schemas.openxmlformats.org/drawingml/2006/main">
+            <a:pPr algn="l">
+              <a:defRPr sz="2175" b="0">
+                <a:solidFill>
+                  <a:srgbClr val="5E7181"/>
+                </a:solidFill>
+                <a:latin typeface="Hiragino Sans GB"/>
+                <a:ea typeface="Hiragino Sans GB"/>
+                <a:cs typeface="Hiragino Sans GB"/>
+              </a:defRPr>
+            </a:pPr>
+            <a:r>
+              <a:rPr sz="2175" b="0">
+                <a:solidFill>
+                  <a:srgbClr val="5E7181"/>
+                </a:solidFill>
+                <a:latin typeface="Hiragino Sans GB"/>
+                <a:ea typeface="Hiragino Sans GB"/>
+                <a:cs typeface="Hiragino Sans GB"/>
+              </a:rPr>
+              <a:t>先看照片，再加入同件馆藏记载，检查理由如何变化</a:t>
+            </a:r>
+          </a:p>
+        </p:txBody>
+      </p:sp>
+      <p:pic>
+        <p:nvPicPr>
+          <p:cNvPr id="19" name=""/>
+          <p:cNvPicPr>
+            <a:picLocks xmlns:a="http://schemas.openxmlformats.org/drawingml/2006/main" noChangeAspect="1"/>
+          </p:cNvPicPr>
+          <p:nvPr/>
+        </p:nvPicPr>
+        <p:blipFill>
+          <a:blip xmlns:r="http://schemas.openxmlformats.org/officeDocument/2006/relationships" xmlns:a="http://schemas.openxmlformats.org/drawingml/2006/main" r:embed="Rb5a857b6543e4338"/>
+          <a:stretch xmlns:a="http://schemas.openxmlformats.org/drawingml/2006/main"/>
+        </p:blipFill>
+        <p:spPr>
+          <a:xfrm xmlns:a="http://schemas.openxmlformats.org/drawingml/2006/main">
+            <a:off x="1343025" y="1771650"/>
+            <a:ext cx="1943100" cy="2590800"/>
+          </a:xfrm>
+          <a:prstGeom xmlns:a="http://schemas.openxmlformats.org/drawingml/2006/main" prst="rect">
+            <a:avLst/>
+          </a:prstGeom>
+        </p:spPr>
+      </p:pic>
+      <p:sp>
+        <p:nvSpPr>
+          <p:cNvPr id="4" name="“射手”纹青花储水器">
+            <a:extLst xmlns:a="http://schemas.openxmlformats.org/drawingml/2006/main">
+              <a:ext uri="{FF2B5EF4-FFF2-40B4-BE49-F238E27FC236}">
+                <a16:creationId xmlns:a16="http://schemas.microsoft.com/office/drawing/2014/main" id="{576A51B9-A2F2-453F-820C-6DA9971C3A20}"/>
+              </a:ext>
+            </a:extLst>
+          </p:cNvPr>
+          <p:cNvSpPr>
+            <a:spLocks xmlns:a="http://schemas.openxmlformats.org/drawingml/2006/main" noGrp="1"/>
+          </p:cNvSpPr>
+          <p:nvPr/>
+        </p:nvSpPr>
+        <p:spPr>
+          <a:xfrm xmlns:a="http://schemas.openxmlformats.org/drawingml/2006/main">
+            <a:off x="628650" y="4562475"/>
+            <a:ext cx="3409950" cy="400050"/>
+          </a:xfrm>
+          <a:prstGeom xmlns:a="http://schemas.openxmlformats.org/drawingml/2006/main" prst="rect">
+            <a:avLst/>
+          </a:prstGeom>
+          <a:noFill xmlns:a="http://schemas.openxmlformats.org/drawingml/2006/main"/>
+          <a:ln xmlns:a="http://schemas.openxmlformats.org/drawingml/2006/main" w="0">
+            <a:noFill/>
+          </a:ln>
+        </p:spPr>
+        <p:txBody>
+          <a:bodyPr xmlns:a="http://schemas.openxmlformats.org/drawingml/2006/main" lIns="0" tIns="0" rIns="0" bIns="0" anchor="t">
+            <a:noAutofit/>
+          </a:bodyPr>
+          <a:lstStyle xmlns:a="http://schemas.openxmlformats.org/drawingml/2006/main"/>
+          <a:p xmlns:a="http://schemas.openxmlformats.org/drawingml/2006/main">
+            <a:pPr algn="l">
+              <a:defRPr sz="2025" b="1">
+                <a:solidFill>
+                  <a:srgbClr val="132D49"/>
+                </a:solidFill>
+                <a:latin typeface="Hiragino Sans GB"/>
+                <a:ea typeface="Hiragino Sans GB"/>
+                <a:cs typeface="Hiragino Sans GB"/>
+              </a:defRPr>
+            </a:pPr>
+            <a:r>
+              <a:rPr sz="2025" b="1">
+                <a:solidFill>
+                  <a:srgbClr val="132D49"/>
+                </a:solidFill>
+                <a:latin typeface="Hiragino Sans GB"/>
+                <a:ea typeface="Hiragino Sans GB"/>
+                <a:cs typeface="Hiragino Sans GB"/>
+              </a:rPr>
+              <a:t>“射手”纹青花储水器</a:t>
+            </a:r>
+          </a:p>
+        </p:txBody>
+      </p:sp>
+      <p:sp>
+        <p:nvSpPr>
+          <p:cNvPr id="5" name="Met 2021.321a, b">
+            <a:extLst xmlns:a="http://schemas.openxmlformats.org/drawingml/2006/main">
+              <a:ext uri="{FF2B5EF4-FFF2-40B4-BE49-F238E27FC236}">
+                <a16:creationId xmlns:a16="http://schemas.microsoft.com/office/drawing/2014/main" id="{2DAF0F63-6AFC-4EC2-B586-873E64B85113}"/>
+              </a:ext>
+            </a:extLst>
+          </p:cNvPr>
+          <p:cNvSpPr>
+            <a:spLocks xmlns:a="http://schemas.openxmlformats.org/drawingml/2006/main" noGrp="1"/>
+          </p:cNvSpPr>
+          <p:nvPr/>
+        </p:nvSpPr>
+        <p:spPr>
+          <a:xfrm xmlns:a="http://schemas.openxmlformats.org/drawingml/2006/main">
+            <a:off x="628650" y="5010150"/>
+            <a:ext cx="3381375" cy="304800"/>
+          </a:xfrm>
+          <a:prstGeom xmlns:a="http://schemas.openxmlformats.org/drawingml/2006/main" prst="rect">
+            <a:avLst/>
+          </a:prstGeom>
+          <a:noFill xmlns:a="http://schemas.openxmlformats.org/drawingml/2006/main"/>
+          <a:ln xmlns:a="http://schemas.openxmlformats.org/drawingml/2006/main" w="0">
+            <a:noFill/>
+          </a:ln>
+        </p:spPr>
+        <p:txBody>
+          <a:bodyPr xmlns:a="http://schemas.openxmlformats.org/drawingml/2006/main" lIns="0" tIns="0" rIns="0" bIns="0" anchor="t">
+            <a:noAutofit/>
+          </a:bodyPr>
+          <a:lstStyle xmlns:a="http://schemas.openxmlformats.org/drawingml/2006/main"/>
+          <a:p xmlns:a="http://schemas.openxmlformats.org/drawingml/2006/main">
+            <a:pPr algn="l">
+              <a:defRPr sz="1575" b="0">
+                <a:solidFill>
+                  <a:srgbClr val="5E7181"/>
+                </a:solidFill>
+                <a:latin typeface="Hiragino Sans GB"/>
+                <a:ea typeface="Hiragino Sans GB"/>
+                <a:cs typeface="Hiragino Sans GB"/>
+              </a:defRPr>
+            </a:pPr>
+            <a:r>
+              <a:rPr sz="1575" b="0">
+                <a:solidFill>
+                  <a:srgbClr val="5E7181"/>
+                </a:solidFill>
+                <a:latin typeface="Hiragino Sans GB"/>
+                <a:ea typeface="Hiragino Sans GB"/>
+                <a:cs typeface="Hiragino Sans GB"/>
+              </a:rPr>
+              <a:t>Met 2021.321a, b</a:t>
+            </a:r>
+          </a:p>
+        </p:txBody>
+      </p:sp>
+      <p:sp>
+        <p:nvSpPr>
+          <p:cNvPr id="6" name="装饰风格和制作地&#10;需要分别判断">
+            <a:extLst xmlns:a="http://schemas.openxmlformats.org/drawingml/2006/main">
+              <a:ext uri="{FF2B5EF4-FFF2-40B4-BE49-F238E27FC236}">
+                <a16:creationId xmlns:a16="http://schemas.microsoft.com/office/drawing/2014/main" id="{FFED8487-A643-4B6C-AA5C-56D7DE3C6144}"/>
+              </a:ext>
+            </a:extLst>
+          </p:cNvPr>
+          <p:cNvSpPr>
+            <a:spLocks xmlns:a="http://schemas.openxmlformats.org/drawingml/2006/main" noGrp="1"/>
+          </p:cNvSpPr>
+          <p:nvPr/>
+        </p:nvSpPr>
+        <p:spPr>
+          <a:xfrm xmlns:a="http://schemas.openxmlformats.org/drawingml/2006/main">
+            <a:off x="628650" y="5486400"/>
+            <a:ext cx="3381375" cy="742950"/>
+          </a:xfrm>
+          <a:prstGeom xmlns:a="http://schemas.openxmlformats.org/drawingml/2006/main" prst="rect">
+            <a:avLst/>
+          </a:prstGeom>
+          <a:noFill xmlns:a="http://schemas.openxmlformats.org/drawingml/2006/main"/>
+          <a:ln xmlns:a="http://schemas.openxmlformats.org/drawingml/2006/main" w="0">
+            <a:noFill/>
+          </a:ln>
+        </p:spPr>
+        <p:txBody>
+          <a:bodyPr xmlns:a="http://schemas.openxmlformats.org/drawingml/2006/main" lIns="0" tIns="0" rIns="0" bIns="0" anchor="t">
+            <a:noAutofit/>
+          </a:bodyPr>
+          <a:lstStyle xmlns:a="http://schemas.openxmlformats.org/drawingml/2006/main"/>
+          <a:p xmlns:a="http://schemas.openxmlformats.org/drawingml/2006/main">
+            <a:pPr algn="l">
+              <a:defRPr sz="1875" b="1">
+                <a:solidFill>
+                  <a:srgbClr val="245B88"/>
+                </a:solidFill>
+                <a:latin typeface="Hiragino Sans GB"/>
+                <a:ea typeface="Hiragino Sans GB"/>
+                <a:cs typeface="Hiragino Sans GB"/>
+              </a:defRPr>
+            </a:pPr>
+            <a:r>
+              <a:rPr sz="1875" b="1">
+                <a:solidFill>
+                  <a:srgbClr val="245B88"/>
+                </a:solidFill>
+                <a:latin typeface="Hiragino Sans GB"/>
+                <a:ea typeface="Hiragino Sans GB"/>
+                <a:cs typeface="Hiragino Sans GB"/>
+              </a:rPr>
+              <a:t>装饰风格和制作地</a:t>
+            </a:r>
+          </a:p>
+          <a:p xmlns:a="http://schemas.openxmlformats.org/drawingml/2006/main">
+            <a:pPr algn="l">
+              <a:defRPr sz="1875" b="1">
+                <a:solidFill>
+                  <a:srgbClr val="245B88"/>
+                </a:solidFill>
+                <a:latin typeface="Hiragino Sans GB"/>
+                <a:ea typeface="Hiragino Sans GB"/>
+                <a:cs typeface="Hiragino Sans GB"/>
+              </a:defRPr>
+            </a:pPr>
+            <a:r>
+              <a:rPr sz="1875" b="1">
+                <a:solidFill>
+                  <a:srgbClr val="245B88"/>
+                </a:solidFill>
+                <a:latin typeface="Hiragino Sans GB"/>
+                <a:ea typeface="Hiragino Sans GB"/>
+                <a:cs typeface="Hiragino Sans GB"/>
+              </a:rPr>
+              <a:t>需要分别判断</a:t>
+            </a:r>
+          </a:p>
+        </p:txBody>
+      </p:sp>
+      <p:pic>
+        <p:nvPicPr>
+          <p:cNvPr id="23" name=""/>
+          <p:cNvPicPr>
+            <a:picLocks xmlns:a="http://schemas.openxmlformats.org/drawingml/2006/main" noChangeAspect="1"/>
+          </p:cNvPicPr>
+          <p:nvPr/>
+        </p:nvPicPr>
+        <p:blipFill>
+          <a:blip xmlns:r="http://schemas.openxmlformats.org/officeDocument/2006/relationships" xmlns:a="http://schemas.openxmlformats.org/drawingml/2006/main" r:embed="Rf2d39f526942498a"/>
+          <a:stretch xmlns:a="http://schemas.openxmlformats.org/drawingml/2006/main"/>
+        </p:blipFill>
+        <p:spPr>
+          <a:xfrm xmlns:a="http://schemas.openxmlformats.org/drawingml/2006/main">
+            <a:off x="5047602" y="1771650"/>
+            <a:ext cx="1944395" cy="2590800"/>
+          </a:xfrm>
+          <a:prstGeom xmlns:a="http://schemas.openxmlformats.org/drawingml/2006/main" prst="rect">
+            <a:avLst/>
+          </a:prstGeom>
+        </p:spPr>
+      </p:pic>
+      <p:sp>
+        <p:nvSpPr>
+          <p:cNvPr id="8" name="仿古铜器形彩瓷瓶">
+            <a:extLst xmlns:a="http://schemas.openxmlformats.org/drawingml/2006/main">
+              <a:ext uri="{FF2B5EF4-FFF2-40B4-BE49-F238E27FC236}">
+                <a16:creationId xmlns:a16="http://schemas.microsoft.com/office/drawing/2014/main" id="{800134E7-9D87-4B04-86FD-A14453AE9726}"/>
+              </a:ext>
+            </a:extLst>
+          </p:cNvPr>
+          <p:cNvSpPr>
+            <a:spLocks xmlns:a="http://schemas.openxmlformats.org/drawingml/2006/main" noGrp="1"/>
+          </p:cNvSpPr>
+          <p:nvPr/>
+        </p:nvSpPr>
+        <p:spPr>
+          <a:xfrm xmlns:a="http://schemas.openxmlformats.org/drawingml/2006/main">
+            <a:off x="4333875" y="4562475"/>
+            <a:ext cx="3409950" cy="400050"/>
+          </a:xfrm>
+          <a:prstGeom xmlns:a="http://schemas.openxmlformats.org/drawingml/2006/main" prst="rect">
+            <a:avLst/>
+          </a:prstGeom>
+          <a:noFill xmlns:a="http://schemas.openxmlformats.org/drawingml/2006/main"/>
+          <a:ln xmlns:a="http://schemas.openxmlformats.org/drawingml/2006/main" w="0">
+            <a:noFill/>
+          </a:ln>
+        </p:spPr>
+        <p:txBody>
+          <a:bodyPr xmlns:a="http://schemas.openxmlformats.org/drawingml/2006/main" lIns="0" tIns="0" rIns="0" bIns="0" anchor="t">
+            <a:noAutofit/>
+          </a:bodyPr>
+          <a:lstStyle xmlns:a="http://schemas.openxmlformats.org/drawingml/2006/main"/>
+          <a:p xmlns:a="http://schemas.openxmlformats.org/drawingml/2006/main">
+            <a:pPr algn="l">
+              <a:defRPr sz="2025" b="1">
+                <a:solidFill>
+                  <a:srgbClr val="132D49"/>
+                </a:solidFill>
+                <a:latin typeface="Hiragino Sans GB"/>
+                <a:ea typeface="Hiragino Sans GB"/>
+                <a:cs typeface="Hiragino Sans GB"/>
+              </a:defRPr>
+            </a:pPr>
+            <a:r>
+              <a:rPr sz="2025" b="1">
+                <a:solidFill>
+                  <a:srgbClr val="132D49"/>
+                </a:solidFill>
+                <a:latin typeface="Hiragino Sans GB"/>
+                <a:ea typeface="Hiragino Sans GB"/>
+                <a:cs typeface="Hiragino Sans GB"/>
+              </a:rPr>
+              <a:t>仿古铜器形彩瓷瓶</a:t>
+            </a:r>
+          </a:p>
+        </p:txBody>
+      </p:sp>
+      <p:sp>
+        <p:nvSpPr>
+          <p:cNvPr id="9" name="Met 14.40.396">
+            <a:extLst xmlns:a="http://schemas.openxmlformats.org/drawingml/2006/main">
+              <a:ext uri="{FF2B5EF4-FFF2-40B4-BE49-F238E27FC236}">
+                <a16:creationId xmlns:a16="http://schemas.microsoft.com/office/drawing/2014/main" id="{37ED0F30-25E1-4D96-836D-DBEBAC5EDAB3}"/>
+              </a:ext>
+            </a:extLst>
+          </p:cNvPr>
+          <p:cNvSpPr>
+            <a:spLocks xmlns:a="http://schemas.openxmlformats.org/drawingml/2006/main" noGrp="1"/>
+          </p:cNvSpPr>
+          <p:nvPr/>
+        </p:nvSpPr>
+        <p:spPr>
+          <a:xfrm xmlns:a="http://schemas.openxmlformats.org/drawingml/2006/main">
+            <a:off x="4333875" y="5010150"/>
+            <a:ext cx="3381375" cy="304800"/>
+          </a:xfrm>
+          <a:prstGeom xmlns:a="http://schemas.openxmlformats.org/drawingml/2006/main" prst="rect">
+            <a:avLst/>
+          </a:prstGeom>
+          <a:noFill xmlns:a="http://schemas.openxmlformats.org/drawingml/2006/main"/>
+          <a:ln xmlns:a="http://schemas.openxmlformats.org/drawingml/2006/main" w="0">
+            <a:noFill/>
+          </a:ln>
+        </p:spPr>
+        <p:txBody>
+          <a:bodyPr xmlns:a="http://schemas.openxmlformats.org/drawingml/2006/main" lIns="0" tIns="0" rIns="0" bIns="0" anchor="t">
+            <a:noAutofit/>
+          </a:bodyPr>
+          <a:lstStyle xmlns:a="http://schemas.openxmlformats.org/drawingml/2006/main"/>
+          <a:p xmlns:a="http://schemas.openxmlformats.org/drawingml/2006/main">
+            <a:pPr algn="l">
+              <a:defRPr sz="1575" b="0">
+                <a:solidFill>
+                  <a:srgbClr val="5E7181"/>
+                </a:solidFill>
+                <a:latin typeface="Hiragino Sans GB"/>
+                <a:ea typeface="Hiragino Sans GB"/>
+                <a:cs typeface="Hiragino Sans GB"/>
+              </a:defRPr>
+            </a:pPr>
+            <a:r>
+              <a:rPr sz="1575" b="0">
+                <a:solidFill>
+                  <a:srgbClr val="5E7181"/>
+                </a:solidFill>
+                <a:latin typeface="Hiragino Sans GB"/>
+                <a:ea typeface="Hiragino Sans GB"/>
+                <a:cs typeface="Hiragino Sans GB"/>
+              </a:rPr>
+              <a:t>Met 14.40.396</a:t>
+            </a:r>
+          </a:p>
+        </p:txBody>
+      </p:sp>
+      <p:sp>
+        <p:nvSpPr>
+          <p:cNvPr id="10" name="缺少外底或足内图&#10;不能推断实物无款">
+            <a:extLst xmlns:a="http://schemas.openxmlformats.org/drawingml/2006/main">
+              <a:ext uri="{FF2B5EF4-FFF2-40B4-BE49-F238E27FC236}">
+                <a16:creationId xmlns:a16="http://schemas.microsoft.com/office/drawing/2014/main" id="{54E2D808-C707-4DA3-BC90-ACA920BD77D7}"/>
+              </a:ext>
+            </a:extLst>
+          </p:cNvPr>
+          <p:cNvSpPr>
+            <a:spLocks xmlns:a="http://schemas.openxmlformats.org/drawingml/2006/main" noGrp="1"/>
+          </p:cNvSpPr>
+          <p:nvPr/>
+        </p:nvSpPr>
+        <p:spPr>
+          <a:xfrm xmlns:a="http://schemas.openxmlformats.org/drawingml/2006/main">
+            <a:off x="4333875" y="5486400"/>
+            <a:ext cx="3381375" cy="742950"/>
+          </a:xfrm>
+          <a:prstGeom xmlns:a="http://schemas.openxmlformats.org/drawingml/2006/main" prst="rect">
+            <a:avLst/>
+          </a:prstGeom>
+          <a:noFill xmlns:a="http://schemas.openxmlformats.org/drawingml/2006/main"/>
+          <a:ln xmlns:a="http://schemas.openxmlformats.org/drawingml/2006/main" w="0">
+            <a:noFill/>
+          </a:ln>
+        </p:spPr>
+        <p:txBody>
+          <a:bodyPr xmlns:a="http://schemas.openxmlformats.org/drawingml/2006/main" lIns="0" tIns="0" rIns="0" bIns="0" anchor="t">
+            <a:noAutofit/>
+          </a:bodyPr>
+          <a:lstStyle xmlns:a="http://schemas.openxmlformats.org/drawingml/2006/main"/>
+          <a:p xmlns:a="http://schemas.openxmlformats.org/drawingml/2006/main">
+            <a:pPr algn="l">
+              <a:defRPr sz="1875" b="1">
+                <a:solidFill>
+                  <a:srgbClr val="245B88"/>
+                </a:solidFill>
+                <a:latin typeface="Hiragino Sans GB"/>
+                <a:ea typeface="Hiragino Sans GB"/>
+                <a:cs typeface="Hiragino Sans GB"/>
+              </a:defRPr>
+            </a:pPr>
+            <a:r>
+              <a:rPr sz="1875" b="1">
+                <a:solidFill>
+                  <a:srgbClr val="245B88"/>
+                </a:solidFill>
+                <a:latin typeface="Hiragino Sans GB"/>
+                <a:ea typeface="Hiragino Sans GB"/>
+                <a:cs typeface="Hiragino Sans GB"/>
+              </a:rPr>
+              <a:t>缺少外底或足内图</a:t>
+            </a:r>
+          </a:p>
+          <a:p xmlns:a="http://schemas.openxmlformats.org/drawingml/2006/main">
+            <a:pPr algn="l">
+              <a:defRPr sz="1875" b="1">
+                <a:solidFill>
+                  <a:srgbClr val="245B88"/>
+                </a:solidFill>
+                <a:latin typeface="Hiragino Sans GB"/>
+                <a:ea typeface="Hiragino Sans GB"/>
+                <a:cs typeface="Hiragino Sans GB"/>
+              </a:defRPr>
+            </a:pPr>
+            <a:r>
+              <a:rPr sz="1875" b="1">
+                <a:solidFill>
+                  <a:srgbClr val="245B88"/>
+                </a:solidFill>
+                <a:latin typeface="Hiragino Sans GB"/>
+                <a:ea typeface="Hiragino Sans GB"/>
+                <a:cs typeface="Hiragino Sans GB"/>
+              </a:rPr>
+              <a:t>不能推断实物无款</a:t>
+            </a:r>
+          </a:p>
+        </p:txBody>
+      </p:sp>
+      <p:pic>
+        <p:nvPicPr>
+          <p:cNvPr id="27" name=""/>
+          <p:cNvPicPr>
+            <a:picLocks xmlns:a="http://schemas.openxmlformats.org/drawingml/2006/main" noChangeAspect="1"/>
+          </p:cNvPicPr>
+          <p:nvPr/>
+        </p:nvPicPr>
+        <p:blipFill>
+          <a:blip xmlns:r="http://schemas.openxmlformats.org/officeDocument/2006/relationships" xmlns:a="http://schemas.openxmlformats.org/drawingml/2006/main" r:embed="R3835ddd658eb4acd"/>
+          <a:stretch xmlns:a="http://schemas.openxmlformats.org/drawingml/2006/main"/>
+        </p:blipFill>
+        <p:spPr>
+          <a:xfrm xmlns:a="http://schemas.openxmlformats.org/drawingml/2006/main">
+            <a:off x="8084277" y="1771650"/>
+            <a:ext cx="3281495" cy="2590800"/>
+          </a:xfrm>
+          <a:prstGeom xmlns:a="http://schemas.openxmlformats.org/drawingml/2006/main" prst="rect">
+            <a:avLst/>
+          </a:prstGeom>
+        </p:spPr>
+      </p:pic>
+      <p:sp>
+        <p:nvSpPr>
+          <p:cNvPr id="12" name="龙泉青釉碗">
+            <a:extLst xmlns:a="http://schemas.openxmlformats.org/drawingml/2006/main">
+              <a:ext uri="{FF2B5EF4-FFF2-40B4-BE49-F238E27FC236}">
+                <a16:creationId xmlns:a16="http://schemas.microsoft.com/office/drawing/2014/main" id="{CE20D904-ACD2-4349-8892-514C045744F5}"/>
+              </a:ext>
+            </a:extLst>
+          </p:cNvPr>
+          <p:cNvSpPr>
+            <a:spLocks xmlns:a="http://schemas.openxmlformats.org/drawingml/2006/main" noGrp="1"/>
+          </p:cNvSpPr>
+          <p:nvPr/>
+        </p:nvSpPr>
+        <p:spPr>
+          <a:xfrm xmlns:a="http://schemas.openxmlformats.org/drawingml/2006/main">
+            <a:off x="8039100" y="4562475"/>
+            <a:ext cx="3409950" cy="400050"/>
+          </a:xfrm>
+          <a:prstGeom xmlns:a="http://schemas.openxmlformats.org/drawingml/2006/main" prst="rect">
+            <a:avLst/>
+          </a:prstGeom>
+          <a:noFill xmlns:a="http://schemas.openxmlformats.org/drawingml/2006/main"/>
+          <a:ln xmlns:a="http://schemas.openxmlformats.org/drawingml/2006/main" w="0">
+            <a:noFill/>
+          </a:ln>
+        </p:spPr>
+        <p:txBody>
+          <a:bodyPr xmlns:a="http://schemas.openxmlformats.org/drawingml/2006/main" lIns="0" tIns="0" rIns="0" bIns="0" anchor="t">
+            <a:noAutofit/>
+          </a:bodyPr>
+          <a:lstStyle xmlns:a="http://schemas.openxmlformats.org/drawingml/2006/main"/>
+          <a:p xmlns:a="http://schemas.openxmlformats.org/drawingml/2006/main">
+            <a:pPr algn="l">
+              <a:defRPr sz="2025" b="1">
+                <a:solidFill>
+                  <a:srgbClr val="132D49"/>
+                </a:solidFill>
+                <a:latin typeface="Hiragino Sans GB"/>
+                <a:ea typeface="Hiragino Sans GB"/>
+                <a:cs typeface="Hiragino Sans GB"/>
+              </a:defRPr>
+            </a:pPr>
+            <a:r>
+              <a:rPr sz="2025" b="1">
+                <a:solidFill>
+                  <a:srgbClr val="132D49"/>
+                </a:solidFill>
+                <a:latin typeface="Hiragino Sans GB"/>
+                <a:ea typeface="Hiragino Sans GB"/>
+                <a:cs typeface="Hiragino Sans GB"/>
+              </a:rPr>
+              <a:t>龙泉青釉碗</a:t>
+            </a:r>
+          </a:p>
+        </p:txBody>
+      </p:sp>
+      <p:sp>
+        <p:nvSpPr>
+          <p:cNvPr id="13" name="Met 17.57.1">
+            <a:extLst xmlns:a="http://schemas.openxmlformats.org/drawingml/2006/main">
+              <a:ext uri="{FF2B5EF4-FFF2-40B4-BE49-F238E27FC236}">
+                <a16:creationId xmlns:a16="http://schemas.microsoft.com/office/drawing/2014/main" id="{1FC51F8A-EC53-4237-BC69-8D34EF98174B}"/>
+              </a:ext>
+            </a:extLst>
+          </p:cNvPr>
+          <p:cNvSpPr>
+            <a:spLocks xmlns:a="http://schemas.openxmlformats.org/drawingml/2006/main" noGrp="1"/>
+          </p:cNvSpPr>
+          <p:nvPr/>
+        </p:nvSpPr>
+        <p:spPr>
+          <a:xfrm xmlns:a="http://schemas.openxmlformats.org/drawingml/2006/main">
+            <a:off x="8039100" y="5010150"/>
+            <a:ext cx="3381375" cy="304800"/>
+          </a:xfrm>
+          <a:prstGeom xmlns:a="http://schemas.openxmlformats.org/drawingml/2006/main" prst="rect">
+            <a:avLst/>
+          </a:prstGeom>
+          <a:noFill xmlns:a="http://schemas.openxmlformats.org/drawingml/2006/main"/>
+          <a:ln xmlns:a="http://schemas.openxmlformats.org/drawingml/2006/main" w="0">
+            <a:noFill/>
+          </a:ln>
+        </p:spPr>
+        <p:txBody>
+          <a:bodyPr xmlns:a="http://schemas.openxmlformats.org/drawingml/2006/main" lIns="0" tIns="0" rIns="0" bIns="0" anchor="t">
+            <a:noAutofit/>
+          </a:bodyPr>
+          <a:lstStyle xmlns:a="http://schemas.openxmlformats.org/drawingml/2006/main"/>
+          <a:p xmlns:a="http://schemas.openxmlformats.org/drawingml/2006/main">
+            <a:pPr algn="l">
+              <a:defRPr sz="1575" b="0">
+                <a:solidFill>
+                  <a:srgbClr val="5E7181"/>
+                </a:solidFill>
+                <a:latin typeface="Hiragino Sans GB"/>
+                <a:ea typeface="Hiragino Sans GB"/>
+                <a:cs typeface="Hiragino Sans GB"/>
+              </a:defRPr>
+            </a:pPr>
+            <a:r>
+              <a:rPr sz="1575" b="0">
+                <a:solidFill>
+                  <a:srgbClr val="5E7181"/>
+                </a:solidFill>
+                <a:latin typeface="Hiragino Sans GB"/>
+                <a:ea typeface="Hiragino Sans GB"/>
+                <a:cs typeface="Hiragino Sans GB"/>
+              </a:rPr>
+              <a:t>Met 17.57.1</a:t>
+            </a:r>
+          </a:p>
+        </p:txBody>
+      </p:sp>
+      <p:sp>
+        <p:nvSpPr>
+          <p:cNvPr id="14" name="修补外观和工艺名称&#10;需要分层核查">
+            <a:extLst xmlns:a="http://schemas.openxmlformats.org/drawingml/2006/main">
+              <a:ext uri="{FF2B5EF4-FFF2-40B4-BE49-F238E27FC236}">
+                <a16:creationId xmlns:a16="http://schemas.microsoft.com/office/drawing/2014/main" id="{98849B8F-930B-4ACB-8C0C-6A47DE038A75}"/>
+              </a:ext>
+            </a:extLst>
+          </p:cNvPr>
+          <p:cNvSpPr>
+            <a:spLocks xmlns:a="http://schemas.openxmlformats.org/drawingml/2006/main" noGrp="1"/>
+          </p:cNvSpPr>
+          <p:nvPr/>
+        </p:nvSpPr>
+        <p:spPr>
+          <a:xfrm xmlns:a="http://schemas.openxmlformats.org/drawingml/2006/main">
+            <a:off x="8039100" y="5486400"/>
+            <a:ext cx="3381375" cy="742950"/>
+          </a:xfrm>
+          <a:prstGeom xmlns:a="http://schemas.openxmlformats.org/drawingml/2006/main" prst="rect">
+            <a:avLst/>
+          </a:prstGeom>
+          <a:noFill xmlns:a="http://schemas.openxmlformats.org/drawingml/2006/main"/>
+          <a:ln xmlns:a="http://schemas.openxmlformats.org/drawingml/2006/main" w="0">
+            <a:noFill/>
+          </a:ln>
+        </p:spPr>
+        <p:txBody>
+          <a:bodyPr xmlns:a="http://schemas.openxmlformats.org/drawingml/2006/main" lIns="0" tIns="0" rIns="0" bIns="0" anchor="t">
+            <a:noAutofit/>
+          </a:bodyPr>
+          <a:lstStyle xmlns:a="http://schemas.openxmlformats.org/drawingml/2006/main"/>
+          <a:p xmlns:a="http://schemas.openxmlformats.org/drawingml/2006/main">
+            <a:pPr algn="l">
+              <a:defRPr sz="1875" b="1">
+                <a:solidFill>
+                  <a:srgbClr val="245B88"/>
+                </a:solidFill>
+                <a:latin typeface="Hiragino Sans GB"/>
+                <a:ea typeface="Hiragino Sans GB"/>
+                <a:cs typeface="Hiragino Sans GB"/>
+              </a:defRPr>
+            </a:pPr>
+            <a:r>
+              <a:rPr sz="1875" b="1">
+                <a:solidFill>
+                  <a:srgbClr val="245B88"/>
+                </a:solidFill>
+                <a:latin typeface="Hiragino Sans GB"/>
+                <a:ea typeface="Hiragino Sans GB"/>
+                <a:cs typeface="Hiragino Sans GB"/>
+              </a:rPr>
+              <a:t>修补外观和工艺名称</a:t>
+            </a:r>
+          </a:p>
+          <a:p xmlns:a="http://schemas.openxmlformats.org/drawingml/2006/main">
+            <a:pPr algn="l">
+              <a:defRPr sz="1875" b="1">
+                <a:solidFill>
+                  <a:srgbClr val="245B88"/>
+                </a:solidFill>
+                <a:latin typeface="Hiragino Sans GB"/>
+                <a:ea typeface="Hiragino Sans GB"/>
+                <a:cs typeface="Hiragino Sans GB"/>
+              </a:defRPr>
+            </a:pPr>
+            <a:r>
+              <a:rPr sz="1875" b="1">
+                <a:solidFill>
+                  <a:srgbClr val="245B88"/>
+                </a:solidFill>
+                <a:latin typeface="Hiragino Sans GB"/>
+                <a:ea typeface="Hiragino Sans GB"/>
+                <a:cs typeface="Hiragino Sans GB"/>
+              </a:rPr>
+              <a:t>需要分层核查</a:t>
+            </a:r>
+          </a:p>
+        </p:txBody>
+      </p:sp>
+      <p:sp>
+        <p:nvSpPr>
+          <p:cNvPr id="15" name="照片和馆方记载均可回查。公开资料个案核查已完成，真人专家验证列入后续工作">
+            <a:extLst xmlns:a="http://schemas.openxmlformats.org/drawingml/2006/main">
+              <a:ext uri="{FF2B5EF4-FFF2-40B4-BE49-F238E27FC236}">
+                <a16:creationId xmlns:a16="http://schemas.microsoft.com/office/drawing/2014/main" id="{9F37B6F6-F24E-4821-94C1-DE89D66AB0FE}"/>
+              </a:ext>
+            </a:extLst>
+          </p:cNvPr>
+          <p:cNvSpPr>
+            <a:spLocks xmlns:a="http://schemas.openxmlformats.org/drawingml/2006/main" noGrp="1"/>
+          </p:cNvSpPr>
+          <p:nvPr/>
+        </p:nvSpPr>
+        <p:spPr>
+          <a:xfrm xmlns:a="http://schemas.openxmlformats.org/drawingml/2006/main">
+            <a:off x="628650" y="6315075"/>
+            <a:ext cx="10839450" cy="276225"/>
+          </a:xfrm>
+          <a:prstGeom xmlns:a="http://schemas.openxmlformats.org/drawingml/2006/main" prst="rect">
+            <a:avLst/>
+          </a:prstGeom>
+          <a:noFill xmlns:a="http://schemas.openxmlformats.org/drawingml/2006/main"/>
+          <a:ln xmlns:a="http://schemas.openxmlformats.org/drawingml/2006/main" w="0">
+            <a:noFill/>
+          </a:ln>
+        </p:spPr>
+        <p:txBody>
+          <a:bodyPr xmlns:a="http://schemas.openxmlformats.org/drawingml/2006/main" lIns="0" tIns="0" rIns="0" bIns="0" anchor="t">
+            <a:noAutofit/>
+          </a:bodyPr>
+          <a:lstStyle xmlns:a="http://schemas.openxmlformats.org/drawingml/2006/main"/>
+          <a:p xmlns:a="http://schemas.openxmlformats.org/drawingml/2006/main">
+            <a:pPr algn="l">
+              <a:defRPr sz="1575" b="0">
+                <a:solidFill>
+                  <a:srgbClr val="5E7181"/>
+                </a:solidFill>
+                <a:latin typeface="Hiragino Sans GB"/>
+                <a:ea typeface="Hiragino Sans GB"/>
+                <a:cs typeface="Hiragino Sans GB"/>
+              </a:defRPr>
+            </a:pPr>
+            <a:r>
+              <a:rPr sz="1575" b="0">
+                <a:solidFill>
+                  <a:srgbClr val="5E7181"/>
+                </a:solidFill>
+                <a:latin typeface="Hiragino Sans GB"/>
+                <a:ea typeface="Hiragino Sans GB"/>
+                <a:cs typeface="Hiragino Sans GB"/>
+              </a:rPr>
+              <a:t>照片和馆方记载均可回查。公开资料个案核查已完成，真人专家验证列入后续工作</a:t>
+            </a:r>
+          </a:p>
+        </p:txBody>
+      </p:sp>
+      <p:sp>
+        <p:nvSpPr>
+          <p:cNvPr id="16" name="12">
+            <a:extLst xmlns:a="http://schemas.openxmlformats.org/drawingml/2006/main">
+              <a:ext uri="{FF2B5EF4-FFF2-40B4-BE49-F238E27FC236}">
+                <a16:creationId xmlns:a16="http://schemas.microsoft.com/office/drawing/2014/main" id="{94EA6B43-B19D-4A44-8C67-FB490D1165A4}"/>
+              </a:ext>
+            </a:extLst>
+          </p:cNvPr>
+          <p:cNvSpPr>
+            <a:spLocks xmlns:a="http://schemas.openxmlformats.org/drawingml/2006/main" noGrp="1"/>
+          </p:cNvSpPr>
+          <p:nvPr/>
+        </p:nvSpPr>
+        <p:spPr>
+          <a:xfrm xmlns:a="http://schemas.openxmlformats.org/drawingml/2006/main">
+            <a:off x="11125200" y="6419850"/>
+            <a:ext cx="457200" cy="266700"/>
+          </a:xfrm>
+          <a:prstGeom xmlns:a="http://schemas.openxmlformats.org/drawingml/2006/main" prst="rect">
+            <a:avLst/>
+          </a:prstGeom>
+          <a:noFill xmlns:a="http://schemas.openxmlformats.org/drawingml/2006/main"/>
+          <a:ln xmlns:a="http://schemas.openxmlformats.org/drawingml/2006/main" w="0">
+            <a:noFill/>
+          </a:ln>
+        </p:spPr>
+        <p:txBody>
+          <a:bodyPr xmlns:a="http://schemas.openxmlformats.org/drawingml/2006/main" lIns="0" tIns="0" rIns="0" bIns="0" anchor="t">
+            <a:noAutofit/>
+          </a:bodyPr>
+          <a:lstStyle xmlns:a="http://schemas.openxmlformats.org/drawingml/2006/main"/>
+          <a:p xmlns:a="http://schemas.openxmlformats.org/drawingml/2006/main">
+            <a:pPr algn="r">
+              <a:defRPr sz="1500" b="0">
+                <a:solidFill>
+                  <a:srgbClr val="5E7181"/>
+                </a:solidFill>
+                <a:latin typeface="Hiragino Sans GB"/>
+                <a:ea typeface="Hiragino Sans GB"/>
+                <a:cs typeface="Hiragino Sans GB"/>
+              </a:defRPr>
+            </a:pPr>
+            <a:r>
+              <a:rPr sz="1500" b="0">
+                <a:solidFill>
+                  <a:srgbClr val="5E7181"/>
+                </a:solidFill>
+                <a:latin typeface="Hiragino Sans GB"/>
+                <a:ea typeface="Hiragino Sans GB"/>
+                <a:cs typeface="Hiragino Sans GB"/>
+              </a:rPr>
+              <a:t>12</a:t>
+            </a:r>
+          </a:p>
+        </p:txBody>
+      </p:sp>
+    </p:spTree>
+    <p:extLst>
+      <p:ext uri="{BB962C8B-B14F-4D97-AF65-F5344CB8AC3E}">
+        <p14:creationId xmlns:p14="http://schemas.microsoft.com/office/powerpoint/2010/main" val="208804670"/>
+      </p:ext>
+    </p:extLst>
+  </p:cSld>
+</p:sld>
+</file>
+
+<file path=ppt/slides/slide13.xml><?xml version="1.0" encoding="utf-8"?>
 <p:sld xmlns:p="http://schemas.openxmlformats.org/presentationml/2006/main">
   <p:cSld>
     <p:bg>
@@ -4142,7 +5153,7 @@
           <p:nvPr/>
         </p:nvPicPr>
         <p:blipFill>
-          <a:blip xmlns:r="http://schemas.openxmlformats.org/officeDocument/2006/relationships" xmlns:a="http://schemas.openxmlformats.org/drawingml/2006/main" r:embed="R1f310cf472714266"/>
+          <a:blip xmlns:r="http://schemas.openxmlformats.org/officeDocument/2006/relationships" xmlns:a="http://schemas.openxmlformats.org/drawingml/2006/main" r:embed="R5add957754304b59"/>
           <a:srcRect xmlns:a="http://schemas.openxmlformats.org/drawingml/2006/main" l="19353" t="0" r="19353" b="0"/>
           <a:stretch xmlns:a="http://schemas.openxmlformats.org/drawingml/2006/main">
             <a:fillRect l="0" t="0" r="0" b="0"/>
@@ -4163,7 +5174,7 @@
           <p:cNvPr id="2" name="瓷证">
             <a:extLst xmlns:a="http://schemas.openxmlformats.org/drawingml/2006/main">
               <a:ext uri="{FF2B5EF4-FFF2-40B4-BE49-F238E27FC236}">
-                <a16:creationId xmlns:a16="http://schemas.microsoft.com/office/drawing/2014/main" id="{DDB13F9C-7BA4-430A-997B-24F269BB8FBA}"/>
+                <a16:creationId xmlns:a16="http://schemas.microsoft.com/office/drawing/2014/main" id="{A6354388-0F23-4FE5-8BA8-1FE52AA979AA}"/>
               </a:ext>
             </a:extLst>
           </p:cNvPr>
@@ -4220,7 +5231,7 @@
           <p:cNvPr id="3" name="可以继续复核的陶瓷案卷">
             <a:extLst xmlns:a="http://schemas.openxmlformats.org/drawingml/2006/main">
               <a:ext uri="{FF2B5EF4-FFF2-40B4-BE49-F238E27FC236}">
-                <a16:creationId xmlns:a16="http://schemas.microsoft.com/office/drawing/2014/main" id="{17C59E60-E7FE-48A5-B1E6-DAB1CC8D3305}"/>
+                <a16:creationId xmlns:a16="http://schemas.microsoft.com/office/drawing/2014/main" id="{ADBBE04E-39D4-4468-8E32-18219C533C5A}"/>
               </a:ext>
             </a:extLst>
           </p:cNvPr>
@@ -4274,10 +5285,10 @@
       </p:sp>
       <p:sp>
         <p:nvSpPr>
-          <p:cNvPr id="4" name="原件有出处&#10;理由有依据&#10;下一项证据有明确去处">
+          <p:cNvPr id="4" name="原图出处可追溯&#10;判断理由可核查&#10;下一项补证有明确方向">
             <a:extLst xmlns:a="http://schemas.openxmlformats.org/drawingml/2006/main">
               <a:ext uri="{FF2B5EF4-FFF2-40B4-BE49-F238E27FC236}">
-                <a16:creationId xmlns:a16="http://schemas.microsoft.com/office/drawing/2014/main" id="{02C8E60A-E24B-4159-B736-FDBE90C12A78}"/>
+                <a16:creationId xmlns:a16="http://schemas.microsoft.com/office/drawing/2014/main" id="{BDF9EBD6-24B8-46B4-93BF-EBA817B125B6}"/>
               </a:ext>
             </a:extLst>
           </p:cNvPr>
@@ -4324,7 +5335,7 @@
                 <a:ea typeface="Hiragino Sans GB"/>
                 <a:cs typeface="Hiragino Sans GB"/>
               </a:rPr>
-              <a:t>原件有出处</a:t>
+              <a:t>原图出处可追溯</a:t>
             </a:r>
           </a:p>
           <a:p xmlns:a="http://schemas.openxmlformats.org/drawingml/2006/main">
@@ -4347,7 +5358,7 @@
                 <a:ea typeface="Hiragino Sans GB"/>
                 <a:cs typeface="Hiragino Sans GB"/>
               </a:rPr>
-              <a:t>理由有依据</a:t>
+              <a:t>判断理由可核查</a:t>
             </a:r>
           </a:p>
           <a:p xmlns:a="http://schemas.openxmlformats.org/drawingml/2006/main">
@@ -4370,7 +5381,7 @@
                 <a:ea typeface="Hiragino Sans GB"/>
                 <a:cs typeface="Hiragino Sans GB"/>
               </a:rPr>
-              <a:t>下一项证据有明确去处</a:t>
+              <a:t>下一项补证有明确方向</a:t>
             </a:r>
           </a:p>
         </p:txBody>
@@ -4380,7 +5391,7 @@
           <p:cNvPr id="5" name="完整图文报告书">
             <a:extLst xmlns:a="http://schemas.openxmlformats.org/drawingml/2006/main">
               <a:ext uri="{FF2B5EF4-FFF2-40B4-BE49-F238E27FC236}">
-                <a16:creationId xmlns:a16="http://schemas.microsoft.com/office/drawing/2014/main" id="{AE20B4E0-DF8E-4671-B6A8-A12143C1CEE5}"/>
+                <a16:creationId xmlns:a16="http://schemas.microsoft.com/office/drawing/2014/main" id="{47A5220C-48D2-4441-B203-E621BE6146AB}"/>
               </a:ext>
             </a:extLst>
           </p:cNvPr>
@@ -4426,7 +5437,7 @@
                 <a:latin typeface="Hiragino Sans GB"/>
                 <a:ea typeface="Hiragino Sans GB"/>
                 <a:cs typeface="Hiragino Sans GB"/>
-                <a:hlinkClick xmlns:r="http://schemas.openxmlformats.org/officeDocument/2006/relationships" r:id="Re2667c75ce144d50"/>
+                <a:hlinkClick xmlns:r="http://schemas.openxmlformats.org/officeDocument/2006/relationships" r:id="R9493ce970b554d20"/>
               </a:rPr>
               <a:t>完整图文报告书</a:t>
             </a:r>
@@ -4435,10 +5446,10 @@
       </p:sp>
       <p:sp>
         <p:nvSpPr>
-          <p:cNvPr id="6" name="完整教学体验">
+          <p:cNvPr id="6" name="公开馆藏个案核查">
             <a:extLst xmlns:a="http://schemas.openxmlformats.org/drawingml/2006/main">
               <a:ext uri="{FF2B5EF4-FFF2-40B4-BE49-F238E27FC236}">
-                <a16:creationId xmlns:a16="http://schemas.microsoft.com/office/drawing/2014/main" id="{695CECDB-0635-4E70-A2F3-432A9A7C4E12}"/>
+                <a16:creationId xmlns:a16="http://schemas.microsoft.com/office/drawing/2014/main" id="{BD67E124-D84A-4791-BBEC-C566CC87B4B5}"/>
               </a:ext>
             </a:extLst>
           </p:cNvPr>
@@ -4484,19 +5495,19 @@
                 <a:latin typeface="Hiragino Sans GB"/>
                 <a:ea typeface="Hiragino Sans GB"/>
                 <a:cs typeface="Hiragino Sans GB"/>
-                <a:hlinkClick xmlns:r="http://schemas.openxmlformats.org/officeDocument/2006/relationships" r:id="Rf9277ba100dd40d1"/>
-              </a:rPr>
-              <a:t>完整教学体验</a:t>
-            </a:r>
-          </a:p>
-        </p:txBody>
-      </p:sp>
-      <p:sp>
-        <p:nvSpPr>
-          <p:cNvPr id="7" name="公开源码与部署证据">
+                <a:hlinkClick xmlns:r="http://schemas.openxmlformats.org/officeDocument/2006/relationships" r:id="Ra3a357cdfc064d76"/>
+              </a:rPr>
+              <a:t>公开馆藏个案核查</a:t>
+            </a:r>
+          </a:p>
+        </p:txBody>
+      </p:sp>
+      <p:sp>
+        <p:nvSpPr>
+          <p:cNvPr id="7" name="公开源码和部署证据">
             <a:extLst xmlns:a="http://schemas.openxmlformats.org/drawingml/2006/main">
               <a:ext uri="{FF2B5EF4-FFF2-40B4-BE49-F238E27FC236}">
-                <a16:creationId xmlns:a16="http://schemas.microsoft.com/office/drawing/2014/main" id="{7B1BAD5D-3962-49B5-86D1-BFBE88FBCE43}"/>
+                <a16:creationId xmlns:a16="http://schemas.microsoft.com/office/drawing/2014/main" id="{FFD5A77E-358B-4F0C-9B47-8D008715B325}"/>
               </a:ext>
             </a:extLst>
           </p:cNvPr>
@@ -4542,9 +5553,9 @@
                 <a:latin typeface="Hiragino Sans GB"/>
                 <a:ea typeface="Hiragino Sans GB"/>
                 <a:cs typeface="Hiragino Sans GB"/>
-                <a:hlinkClick xmlns:r="http://schemas.openxmlformats.org/officeDocument/2006/relationships" r:id="Rc8798fec3c2b43b4"/>
-              </a:rPr>
-              <a:t>公开源码与部署证据</a:t>
+                <a:hlinkClick xmlns:r="http://schemas.openxmlformats.org/officeDocument/2006/relationships" r:id="R76ca250c791e4644"/>
+              </a:rPr>
+              <a:t>公开源码和部署证据</a:t>
             </a:r>
           </a:p>
         </p:txBody>
@@ -4552,7 +5563,7 @@
     </p:spTree>
     <p:extLst>
       <p:ext uri="{BB962C8B-B14F-4D97-AF65-F5344CB8AC3E}">
-        <p14:creationId xmlns:p14="http://schemas.microsoft.com/office/powerpoint/2010/main" val="1415675762"/>
+        <p14:creationId xmlns:p14="http://schemas.microsoft.com/office/powerpoint/2010/main" val="289658688"/>
       </p:ext>
     </p:extLst>
   </p:cSld>
@@ -4583,7 +5594,7 @@
           <p:cNvPr id="13" name="专业复核先要找回证据">
             <a:extLst xmlns:a="http://schemas.openxmlformats.org/drawingml/2006/main">
               <a:ext uri="{FF2B5EF4-FFF2-40B4-BE49-F238E27FC236}">
-                <a16:creationId xmlns:a16="http://schemas.microsoft.com/office/drawing/2014/main" id="{AF3E1519-85D0-4438-8303-8D1FCF6BB5D9}"/>
+                <a16:creationId xmlns:a16="http://schemas.microsoft.com/office/drawing/2014/main" id="{D3DC4C5F-8D30-46A7-B7D8-88B2BE7537BD}"/>
               </a:ext>
             </a:extLst>
           </p:cNvPr>
@@ -4644,7 +5655,7 @@
           <p:nvPr/>
         </p:nvPicPr>
         <p:blipFill>
-          <a:blip xmlns:r="http://schemas.openxmlformats.org/officeDocument/2006/relationships" xmlns:a="http://schemas.openxmlformats.org/drawingml/2006/main" r:embed="Ra92c8aba2dad4acd"/>
+          <a:blip xmlns:r="http://schemas.openxmlformats.org/officeDocument/2006/relationships" xmlns:a="http://schemas.openxmlformats.org/drawingml/2006/main" r:embed="R624dead95c924879"/>
           <a:stretch xmlns:a="http://schemas.openxmlformats.org/drawingml/2006/main"/>
         </p:blipFill>
         <p:spPr>
@@ -4662,7 +5673,7 @@
           <p:cNvPr id="3" name="材料分散">
             <a:extLst xmlns:a="http://schemas.openxmlformats.org/drawingml/2006/main">
               <a:ext uri="{FF2B5EF4-FFF2-40B4-BE49-F238E27FC236}">
-                <a16:creationId xmlns:a16="http://schemas.microsoft.com/office/drawing/2014/main" id="{4C38A95A-64EA-4BC5-9989-C6978275D50D}"/>
+                <a16:creationId xmlns:a16="http://schemas.microsoft.com/office/drawing/2014/main" id="{EB16CBFB-3F96-40BD-B377-3230981108D4}"/>
               </a:ext>
             </a:extLst>
           </p:cNvPr>
@@ -4716,10 +5727,10 @@
       </p:sp>
       <p:sp>
         <p:nvSpPr>
-          <p:cNvPr id="4" name="照片、来源记录与描述难以逐条对应">
+          <p:cNvPr id="4" name="照片、来源记录和描述难以逐条对应">
             <a:extLst xmlns:a="http://schemas.openxmlformats.org/drawingml/2006/main">
               <a:ext uri="{FF2B5EF4-FFF2-40B4-BE49-F238E27FC236}">
-                <a16:creationId xmlns:a16="http://schemas.microsoft.com/office/drawing/2014/main" id="{C4033CE9-2A35-4B64-B3EE-C085860B90A6}"/>
+                <a16:creationId xmlns:a16="http://schemas.microsoft.com/office/drawing/2014/main" id="{BC88E18F-77D5-49F8-A2DE-3EBA062E204E}"/>
               </a:ext>
             </a:extLst>
           </p:cNvPr>
@@ -4766,7 +5777,7 @@
                 <a:ea typeface="Hiragino Sans GB"/>
                 <a:cs typeface="Hiragino Sans GB"/>
               </a:rPr>
-              <a:t>照片、来源记录与描述难以逐条对应</a:t>
+              <a:t>照片、来源记录和描述难以逐条对应</a:t>
             </a:r>
           </a:p>
         </p:txBody>
@@ -4776,7 +5787,7 @@
           <p:cNvPr id="5" name="">
             <a:extLst xmlns:a="http://schemas.openxmlformats.org/drawingml/2006/main">
               <a:ext uri="{FF2B5EF4-FFF2-40B4-BE49-F238E27FC236}">
-                <a16:creationId xmlns:a16="http://schemas.microsoft.com/office/drawing/2014/main" id="{5A8654A8-E774-4248-9E58-C5AD5F2006D7}"/>
+                <a16:creationId xmlns:a16="http://schemas.microsoft.com/office/drawing/2014/main" id="{CED69A72-0959-4C63-8311-F7037D6A99CC}"/>
               </a:ext>
             </a:extLst>
           </p:cNvPr>
@@ -4806,7 +5817,7 @@
           <p:cNvPr id="6" name="理由难回查">
             <a:extLst xmlns:a="http://schemas.openxmlformats.org/drawingml/2006/main">
               <a:ext uri="{FF2B5EF4-FFF2-40B4-BE49-F238E27FC236}">
-                <a16:creationId xmlns:a16="http://schemas.microsoft.com/office/drawing/2014/main" id="{F742A79B-4214-41AB-90F9-A85ECC905655}"/>
+                <a16:creationId xmlns:a16="http://schemas.microsoft.com/office/drawing/2014/main" id="{2C9CCAE7-4161-49C8-A2A7-17A8A4FD3B09}"/>
               </a:ext>
             </a:extLst>
           </p:cNvPr>
@@ -4863,7 +5874,7 @@
           <p:cNvPr id="7" name="一句归属意见需要具体观察和资料段落">
             <a:extLst xmlns:a="http://schemas.openxmlformats.org/drawingml/2006/main">
               <a:ext uri="{FF2B5EF4-FFF2-40B4-BE49-F238E27FC236}">
-                <a16:creationId xmlns:a16="http://schemas.microsoft.com/office/drawing/2014/main" id="{883E1ACB-1DD3-4C0A-8BAC-E77FDED0829E}"/>
+                <a16:creationId xmlns:a16="http://schemas.microsoft.com/office/drawing/2014/main" id="{8EB937EF-1F10-442E-9D73-72DDC38B81FC}"/>
               </a:ext>
             </a:extLst>
           </p:cNvPr>
@@ -4920,7 +5931,7 @@
           <p:cNvPr id="8" name="">
             <a:extLst xmlns:a="http://schemas.openxmlformats.org/drawingml/2006/main">
               <a:ext uri="{FF2B5EF4-FFF2-40B4-BE49-F238E27FC236}">
-                <a16:creationId xmlns:a16="http://schemas.microsoft.com/office/drawing/2014/main" id="{50F402E8-4D97-4DEB-B79F-90077A3092E7}"/>
+                <a16:creationId xmlns:a16="http://schemas.microsoft.com/office/drawing/2014/main" id="{50B8573E-5760-4B90-A2D1-4C29EB639912}"/>
               </a:ext>
             </a:extLst>
           </p:cNvPr>
@@ -4950,7 +5961,7 @@
           <p:cNvPr id="9" name="补证缺少顺序">
             <a:extLst xmlns:a="http://schemas.openxmlformats.org/drawingml/2006/main">
               <a:ext uri="{FF2B5EF4-FFF2-40B4-BE49-F238E27FC236}">
-                <a16:creationId xmlns:a16="http://schemas.microsoft.com/office/drawing/2014/main" id="{993AD8A5-C90F-4950-909B-01F57EAE8214}"/>
+                <a16:creationId xmlns:a16="http://schemas.microsoft.com/office/drawing/2014/main" id="{3D16F7AA-31D1-41F1-9415-55651920DA83}"/>
               </a:ext>
             </a:extLst>
           </p:cNvPr>
@@ -5007,7 +6018,7 @@
           <p:cNvPr id="10" name="下一张照片应回应当前证据缺口">
             <a:extLst xmlns:a="http://schemas.openxmlformats.org/drawingml/2006/main">
               <a:ext uri="{FF2B5EF4-FFF2-40B4-BE49-F238E27FC236}">
-                <a16:creationId xmlns:a16="http://schemas.microsoft.com/office/drawing/2014/main" id="{70D79020-9AA6-45AE-9209-DB4026450887}"/>
+                <a16:creationId xmlns:a16="http://schemas.microsoft.com/office/drawing/2014/main" id="{0FB6EE6D-B4BE-4D9D-BE9F-5077DDB36D61}"/>
               </a:ext>
             </a:extLst>
           </p:cNvPr>
@@ -5064,7 +6075,7 @@
           <p:cNvPr id="11" name="交付目标：一条可回到原图、原文件和出处的研究路径">
             <a:extLst xmlns:a="http://schemas.openxmlformats.org/drawingml/2006/main">
               <a:ext uri="{FF2B5EF4-FFF2-40B4-BE49-F238E27FC236}">
-                <a16:creationId xmlns:a16="http://schemas.microsoft.com/office/drawing/2014/main" id="{818385F8-4F1C-4F06-9C84-F22180C5C489}"/>
+                <a16:creationId xmlns:a16="http://schemas.microsoft.com/office/drawing/2014/main" id="{56095E07-B43E-4806-81E9-161EFE92C8AC}"/>
               </a:ext>
             </a:extLst>
           </p:cNvPr>
@@ -5121,7 +6132,7 @@
           <p:cNvPr id="12" name="02">
             <a:extLst xmlns:a="http://schemas.openxmlformats.org/drawingml/2006/main">
               <a:ext uri="{FF2B5EF4-FFF2-40B4-BE49-F238E27FC236}">
-                <a16:creationId xmlns:a16="http://schemas.microsoft.com/office/drawing/2014/main" id="{293DAC54-CFD0-494A-84EE-16FD18608DB3}"/>
+                <a16:creationId xmlns:a16="http://schemas.microsoft.com/office/drawing/2014/main" id="{1D4D94B9-4E6B-4D4A-A51F-F40EE77E981C}"/>
               </a:ext>
             </a:extLst>
           </p:cNvPr>
@@ -5176,7 +6187,7 @@
     </p:spTree>
     <p:extLst>
       <p:ext uri="{BB962C8B-B14F-4D97-AF65-F5344CB8AC3E}">
-        <p14:creationId xmlns:p14="http://schemas.microsoft.com/office/powerpoint/2010/main" val="400454836"/>
+        <p14:creationId xmlns:p14="http://schemas.microsoft.com/office/powerpoint/2010/main" val="1936142225"/>
       </p:ext>
     </p:extLst>
   </p:cSld>
@@ -5207,7 +6218,7 @@
           <p:cNvPr id="11" name="一份案卷承接整段研究工作">
             <a:extLst xmlns:a="http://schemas.openxmlformats.org/drawingml/2006/main">
               <a:ext uri="{FF2B5EF4-FFF2-40B4-BE49-F238E27FC236}">
-                <a16:creationId xmlns:a16="http://schemas.microsoft.com/office/drawing/2014/main" id="{CE50E065-48C4-4273-AEB3-C97BCE05396D}"/>
+                <a16:creationId xmlns:a16="http://schemas.microsoft.com/office/drawing/2014/main" id="{01198E2E-85F4-438D-8BE3-D287C4C7C079}"/>
               </a:ext>
             </a:extLst>
           </p:cNvPr>
@@ -5264,7 +6275,7 @@
           <p:cNvPr id="2" name="原图定位、资料阅读和待补证，直接对应到同一件器物">
             <a:extLst xmlns:a="http://schemas.openxmlformats.org/drawingml/2006/main">
               <a:ext uri="{FF2B5EF4-FFF2-40B4-BE49-F238E27FC236}">
-                <a16:creationId xmlns:a16="http://schemas.microsoft.com/office/drawing/2014/main" id="{36F78CEA-25FA-4AA6-9970-275A66747072}"/>
+                <a16:creationId xmlns:a16="http://schemas.microsoft.com/office/drawing/2014/main" id="{B206B9FD-DE07-48AC-BFB9-8F72357E00E0}"/>
               </a:ext>
             </a:extLst>
           </p:cNvPr>
@@ -5325,7 +6336,7 @@
           <p:nvPr/>
         </p:nvPicPr>
         <p:blipFill>
-          <a:blip xmlns:r="http://schemas.openxmlformats.org/officeDocument/2006/relationships" xmlns:a="http://schemas.openxmlformats.org/drawingml/2006/main" r:embed="R2306221be668441d"/>
+          <a:blip xmlns:r="http://schemas.openxmlformats.org/officeDocument/2006/relationships" xmlns:a="http://schemas.openxmlformats.org/drawingml/2006/main" r:embed="R31dd0ae553254694"/>
           <a:srcRect xmlns:a="http://schemas.openxmlformats.org/drawingml/2006/main" l="16600" t="8300" r="0" b="0"/>
           <a:stretch xmlns:a="http://schemas.openxmlformats.org/drawingml/2006/main"/>
         </p:blipFill>
@@ -5344,7 +6355,7 @@
           <p:cNvPr id="4" name="原件">
             <a:extLst xmlns:a="http://schemas.openxmlformats.org/drawingml/2006/main">
               <a:ext uri="{FF2B5EF4-FFF2-40B4-BE49-F238E27FC236}">
-                <a16:creationId xmlns:a16="http://schemas.microsoft.com/office/drawing/2014/main" id="{A9FE1B26-50E2-49C5-B1C5-648A94E33816}"/>
+                <a16:creationId xmlns:a16="http://schemas.microsoft.com/office/drawing/2014/main" id="{8A295C1C-A49F-452C-ABC3-D9BEF94B3FB6}"/>
               </a:ext>
             </a:extLst>
           </p:cNvPr>
@@ -5398,10 +6409,10 @@
       </p:sp>
       <p:sp>
         <p:nvSpPr>
-          <p:cNvPr id="5" name="SHA 与来源&#10;保留原始字节">
+          <p:cNvPr id="5" name="SHA 和来源&#10;保留原始字节">
             <a:extLst xmlns:a="http://schemas.openxmlformats.org/drawingml/2006/main">
               <a:ext uri="{FF2B5EF4-FFF2-40B4-BE49-F238E27FC236}">
-                <a16:creationId xmlns:a16="http://schemas.microsoft.com/office/drawing/2014/main" id="{921207C2-C5AD-4DD6-BCF1-4A19D8D99BA4}"/>
+                <a16:creationId xmlns:a16="http://schemas.microsoft.com/office/drawing/2014/main" id="{611AC0F3-1713-4C56-B255-9853BC95779E}"/>
               </a:ext>
             </a:extLst>
           </p:cNvPr>
@@ -5448,7 +6459,7 @@
                 <a:ea typeface="Hiragino Sans GB"/>
                 <a:cs typeface="Hiragino Sans GB"/>
               </a:rPr>
-              <a:t>SHA 与来源</a:t>
+              <a:t>SHA 和来源</a:t>
             </a:r>
           </a:p>
           <a:p xmlns:a="http://schemas.openxmlformats.org/drawingml/2006/main">
@@ -5481,7 +6492,7 @@
           <p:cNvPr id="6" name="观察">
             <a:extLst xmlns:a="http://schemas.openxmlformats.org/drawingml/2006/main">
               <a:ext uri="{FF2B5EF4-FFF2-40B4-BE49-F238E27FC236}">
-                <a16:creationId xmlns:a16="http://schemas.microsoft.com/office/drawing/2014/main" id="{0F88337A-E10C-4D03-92C4-17CD61074B7B}"/>
+                <a16:creationId xmlns:a16="http://schemas.microsoft.com/office/drawing/2014/main" id="{9FD95B83-C67D-4FD5-9055-F9E0636E19B3}"/>
               </a:ext>
             </a:extLst>
           </p:cNvPr>
@@ -5538,7 +6549,7 @@
           <p:cNvPr id="7" name="区域有位置&#10;理由可回查">
             <a:extLst xmlns:a="http://schemas.openxmlformats.org/drawingml/2006/main">
               <a:ext uri="{FF2B5EF4-FFF2-40B4-BE49-F238E27FC236}">
-                <a16:creationId xmlns:a16="http://schemas.microsoft.com/office/drawing/2014/main" id="{0D6D01AC-770E-4703-B983-660BA26B565B}"/>
+                <a16:creationId xmlns:a16="http://schemas.microsoft.com/office/drawing/2014/main" id="{54A446F6-7B2F-45D8-AAE2-F985BF334F0B}"/>
               </a:ext>
             </a:extLst>
           </p:cNvPr>
@@ -5618,7 +6629,7 @@
           <p:cNvPr id="8" name="版本">
             <a:extLst xmlns:a="http://schemas.openxmlformats.org/drawingml/2006/main">
               <a:ext uri="{FF2B5EF4-FFF2-40B4-BE49-F238E27FC236}">
-                <a16:creationId xmlns:a16="http://schemas.microsoft.com/office/drawing/2014/main" id="{C8084734-3140-44FD-8D06-6853A93B8C37}"/>
+                <a16:creationId xmlns:a16="http://schemas.microsoft.com/office/drawing/2014/main" id="{9F3EC6C0-0D74-43B3-8D2E-7CFADC8D7E92}"/>
               </a:ext>
             </a:extLst>
           </p:cNvPr>
@@ -5675,7 +6686,7 @@
           <p:cNvPr id="9" name="补证后保留历史">
             <a:extLst xmlns:a="http://schemas.openxmlformats.org/drawingml/2006/main">
               <a:ext uri="{FF2B5EF4-FFF2-40B4-BE49-F238E27FC236}">
-                <a16:creationId xmlns:a16="http://schemas.microsoft.com/office/drawing/2014/main" id="{E07724AE-ACAA-4D0F-B743-26E34050E838}"/>
+                <a16:creationId xmlns:a16="http://schemas.microsoft.com/office/drawing/2014/main" id="{4FEBA0F1-68B7-4DBE-A432-D54297B0603E}"/>
               </a:ext>
             </a:extLst>
           </p:cNvPr>
@@ -5732,7 +6743,7 @@
           <p:cNvPr id="10" name="03">
             <a:extLst xmlns:a="http://schemas.openxmlformats.org/drawingml/2006/main">
               <a:ext uri="{FF2B5EF4-FFF2-40B4-BE49-F238E27FC236}">
-                <a16:creationId xmlns:a16="http://schemas.microsoft.com/office/drawing/2014/main" id="{CF8D1D7A-6C4E-4385-8D27-2B3602C11CE6}"/>
+                <a16:creationId xmlns:a16="http://schemas.microsoft.com/office/drawing/2014/main" id="{28482561-2D6E-489A-B7DF-CAC9495C6D5E}"/>
               </a:ext>
             </a:extLst>
           </p:cNvPr>
@@ -5787,7 +6798,7 @@
     </p:spTree>
     <p:extLst>
       <p:ext uri="{BB962C8B-B14F-4D97-AF65-F5344CB8AC3E}">
-        <p14:creationId xmlns:p14="http://schemas.microsoft.com/office/powerpoint/2010/main" val="1385240510"/>
+        <p14:creationId xmlns:p14="http://schemas.microsoft.com/office/powerpoint/2010/main" val="1390376754"/>
       </p:ext>
     </p:extLst>
   </p:cSld>
@@ -5815,10 +6826,10 @@
       </p:grpSpPr>
       <p:sp>
         <p:nvSpPr>
-          <p:cNvPr id="18" name="真实案卷的审查与修订闭环">
+          <p:cNvPr id="18" name="真实案卷的审查和修订闭环">
             <a:extLst xmlns:a="http://schemas.openxmlformats.org/drawingml/2006/main">
               <a:ext uri="{FF2B5EF4-FFF2-40B4-BE49-F238E27FC236}">
-                <a16:creationId xmlns:a16="http://schemas.microsoft.com/office/drawing/2014/main" id="{08150B9F-19B9-4639-B5DA-3FB9CDB6CC36}"/>
+                <a16:creationId xmlns:a16="http://schemas.microsoft.com/office/drawing/2014/main" id="{542495AE-170B-47CC-A492-065CE943F9AF}"/>
               </a:ext>
             </a:extLst>
           </p:cNvPr>
@@ -5865,17 +6876,17 @@
                 <a:ea typeface="Hiragino Sans GB"/>
                 <a:cs typeface="Hiragino Sans GB"/>
               </a:rPr>
-              <a:t>真实案卷的审查与修订闭环</a:t>
-            </a:r>
-          </a:p>
-        </p:txBody>
-      </p:sp>
-      <p:sp>
-        <p:nvSpPr>
-          <p:cNvPr id="2" name="公开双图案卷已经保存初稿、文字审查、本地回查与导出">
+              <a:t>真实案卷的审查和修订闭环</a:t>
+            </a:r>
+          </a:p>
+        </p:txBody>
+      </p:sp>
+      <p:sp>
+        <p:nvSpPr>
+          <p:cNvPr id="2" name="公开双图案卷已经保存初稿、文字审查、本地回查和导出">
             <a:extLst xmlns:a="http://schemas.openxmlformats.org/drawingml/2006/main">
               <a:ext uri="{FF2B5EF4-FFF2-40B4-BE49-F238E27FC236}">
-                <a16:creationId xmlns:a16="http://schemas.microsoft.com/office/drawing/2014/main" id="{6EE506E2-880A-4F23-8655-F9B99704DB08}"/>
+                <a16:creationId xmlns:a16="http://schemas.microsoft.com/office/drawing/2014/main" id="{779307B5-711D-412A-A010-928CFE5FB470}"/>
               </a:ext>
             </a:extLst>
           </p:cNvPr>
@@ -5922,17 +6933,17 @@
                 <a:ea typeface="Hiragino Sans GB"/>
                 <a:cs typeface="Hiragino Sans GB"/>
               </a:rPr>
-              <a:t>公开双图案卷已经保存初稿、文字审查、本地回查与导出</a:t>
-            </a:r>
-          </a:p>
-        </p:txBody>
-      </p:sp>
-      <p:sp>
-        <p:nvSpPr>
-          <p:cNvPr id="3" name="原件与资料">
+              <a:t>公开双图案卷已经保存初稿、文字审查、本地回查和导出</a:t>
+            </a:r>
+          </a:p>
+        </p:txBody>
+      </p:sp>
+      <p:sp>
+        <p:nvSpPr>
+          <p:cNvPr id="3" name="原件和资料">
             <a:extLst xmlns:a="http://schemas.openxmlformats.org/drawingml/2006/main">
               <a:ext uri="{FF2B5EF4-FFF2-40B4-BE49-F238E27FC236}">
-                <a16:creationId xmlns:a16="http://schemas.microsoft.com/office/drawing/2014/main" id="{9DA8BB54-06E0-4B1E-9581-C3A098501077}"/>
+                <a16:creationId xmlns:a16="http://schemas.microsoft.com/office/drawing/2014/main" id="{055FFCA7-0561-4E54-878B-D46D4B769BBA}"/>
               </a:ext>
             </a:extLst>
           </p:cNvPr>
@@ -5986,7 +6997,7 @@
                 <a:ea typeface="Hiragino Sans GB"/>
                 <a:cs typeface="Hiragino Sans GB"/>
               </a:rPr>
-              <a:t>原件与资料</a:t>
+              <a:t>原件和资料</a:t>
             </a:r>
           </a:p>
           <a:p xmlns:a="http://schemas.openxmlformats.org/drawingml/2006/main">
@@ -6032,7 +7043,7 @@
                 <a:ea typeface="Hiragino Sans GB"/>
                 <a:cs typeface="Hiragino Sans GB"/>
               </a:rPr>
-              <a:t>固定正文与回执</a:t>
+              <a:t>固定正文和回执</a:t>
             </a:r>
           </a:p>
         </p:txBody>
@@ -6042,7 +7053,7 @@
           <p:cNvPr id="4" name="本地研究">
             <a:extLst xmlns:a="http://schemas.openxmlformats.org/drawingml/2006/main">
               <a:ext uri="{FF2B5EF4-FFF2-40B4-BE49-F238E27FC236}">
-                <a16:creationId xmlns:a16="http://schemas.microsoft.com/office/drawing/2014/main" id="{C0473E5E-54C6-407F-8D14-8A5172AEC0E7}"/>
+                <a16:creationId xmlns:a16="http://schemas.microsoft.com/office/drawing/2014/main" id="{D32745A4-7BB0-4DAF-8DB3-9442133ADDDE}"/>
               </a:ext>
             </a:extLst>
           </p:cNvPr>
@@ -6142,7 +7153,7 @@
                 <a:ea typeface="Hiragino Sans GB"/>
                 <a:cs typeface="Hiragino Sans GB"/>
               </a:rPr>
-              <a:t>分项理由与缺口</a:t>
+              <a:t>分项理由和缺口</a:t>
             </a:r>
           </a:p>
         </p:txBody>
@@ -6152,7 +7163,7 @@
           <p:cNvPr id="5" name="文字审查">
             <a:extLst xmlns:a="http://schemas.openxmlformats.org/drawingml/2006/main">
               <a:ext uri="{FF2B5EF4-FFF2-40B4-BE49-F238E27FC236}">
-                <a16:creationId xmlns:a16="http://schemas.microsoft.com/office/drawing/2014/main" id="{C51F4248-7EE7-42EE-8675-F3C5ECA4AA85}"/>
+                <a16:creationId xmlns:a16="http://schemas.microsoft.com/office/drawing/2014/main" id="{C6142431-6A4F-43AC-8C45-34C6F553A640}"/>
               </a:ext>
             </a:extLst>
           </p:cNvPr>
@@ -6259,10 +7270,10 @@
       </p:sp>
       <p:sp>
         <p:nvSpPr>
-          <p:cNvPr id="6" name="复看与修订">
+          <p:cNvPr id="6" name="复看和修订">
             <a:extLst xmlns:a="http://schemas.openxmlformats.org/drawingml/2006/main">
               <a:ext uri="{FF2B5EF4-FFF2-40B4-BE49-F238E27FC236}">
-                <a16:creationId xmlns:a16="http://schemas.microsoft.com/office/drawing/2014/main" id="{C77DBE83-4090-45D1-91E2-6FB9447119BB}"/>
+                <a16:creationId xmlns:a16="http://schemas.microsoft.com/office/drawing/2014/main" id="{6C309648-2A6A-42AD-8894-185B477AFC2F}"/>
               </a:ext>
             </a:extLst>
           </p:cNvPr>
@@ -6316,7 +7327,7 @@
                 <a:ea typeface="Hiragino Sans GB"/>
                 <a:cs typeface="Hiragino Sans GB"/>
               </a:rPr>
-              <a:t>复看与修订</a:t>
+              <a:t>复看和修订</a:t>
             </a:r>
           </a:p>
           <a:p xmlns:a="http://schemas.openxmlformats.org/drawingml/2006/main">
@@ -6372,7 +7383,7 @@
           <p:cNvPr id="7" name="交接案卷">
             <a:extLst xmlns:a="http://schemas.openxmlformats.org/drawingml/2006/main">
               <a:ext uri="{FF2B5EF4-FFF2-40B4-BE49-F238E27FC236}">
-                <a16:creationId xmlns:a16="http://schemas.microsoft.com/office/drawing/2014/main" id="{B1E75EFF-16A4-4F7F-923C-39C66D422FBA}"/>
+                <a16:creationId xmlns:a16="http://schemas.microsoft.com/office/drawing/2014/main" id="{04A138A2-A7C0-4852-A6E6-9057D88B9EC0}"/>
               </a:ext>
             </a:extLst>
           </p:cNvPr>
@@ -6449,7 +7460,7 @@
                 <a:ea typeface="Hiragino Sans GB"/>
                 <a:cs typeface="Hiragino Sans GB"/>
               </a:rPr>
-              <a:t>报告与原件</a:t>
+              <a:t>报告和原件</a:t>
             </a:r>
           </a:p>
           <a:p xmlns:a="http://schemas.openxmlformats.org/drawingml/2006/main">
@@ -6586,7 +7597,7 @@
           <p:cNvPr id="12" name="审查提出的问题">
             <a:extLst xmlns:a="http://schemas.openxmlformats.org/drawingml/2006/main">
               <a:ext uri="{FF2B5EF4-FFF2-40B4-BE49-F238E27FC236}">
-                <a16:creationId xmlns:a16="http://schemas.microsoft.com/office/drawing/2014/main" id="{FE8534EB-7320-40E8-B6EB-64AA568B4E6E}"/>
+                <a16:creationId xmlns:a16="http://schemas.microsoft.com/office/drawing/2014/main" id="{0A3DD17F-1557-442E-A770-2DF2001FB599}"/>
               </a:ext>
             </a:extLst>
           </p:cNvPr>
@@ -6643,7 +7654,7 @@
           <p:cNvPr id="13" name="“风格主张无具体特征比对依据”">
             <a:extLst xmlns:a="http://schemas.openxmlformats.org/drawingml/2006/main">
               <a:ext uri="{FF2B5EF4-FFF2-40B4-BE49-F238E27FC236}">
-                <a16:creationId xmlns:a16="http://schemas.microsoft.com/office/drawing/2014/main" id="{B1FE4C5D-C5FE-473C-A914-378069098AE9}"/>
+                <a16:creationId xmlns:a16="http://schemas.microsoft.com/office/drawing/2014/main" id="{037BD906-B3D9-4378-B0DA-8E69276CDBA2}"/>
               </a:ext>
             </a:extLst>
           </p:cNvPr>
@@ -6700,7 +7711,7 @@
           <p:cNvPr id="14" name="修订保留的状态">
             <a:extLst xmlns:a="http://schemas.openxmlformats.org/drawingml/2006/main">
               <a:ext uri="{FF2B5EF4-FFF2-40B4-BE49-F238E27FC236}">
-                <a16:creationId xmlns:a16="http://schemas.microsoft.com/office/drawing/2014/main" id="{9101F545-6D6A-42CC-AB37-F9CB07122F49}"/>
+                <a16:creationId xmlns:a16="http://schemas.microsoft.com/office/drawing/2014/main" id="{6DB4100F-452A-411C-B0A2-783A06B56833}"/>
               </a:ext>
             </a:extLst>
           </p:cNvPr>
@@ -6754,10 +7765,10 @@
       </p:sp>
       <p:sp>
         <p:nvSpPr>
-          <p:cNvPr id="15" name="制作时期、窑口与风格仍为证据不足&#10;待补证问题与原初稿继续可回查">
+          <p:cNvPr id="15" name="制作时期、窑口和风格仍为证据不足&#10;待补证问题和原初稿继续可回查">
             <a:extLst xmlns:a="http://schemas.openxmlformats.org/drawingml/2006/main">
               <a:ext uri="{FF2B5EF4-FFF2-40B4-BE49-F238E27FC236}">
-                <a16:creationId xmlns:a16="http://schemas.microsoft.com/office/drawing/2014/main" id="{1D55BCCE-2511-4279-99CC-F19244C53427}"/>
+                <a16:creationId xmlns:a16="http://schemas.microsoft.com/office/drawing/2014/main" id="{C25710CC-7B50-48D7-8FE1-46399E735285}"/>
               </a:ext>
             </a:extLst>
           </p:cNvPr>
@@ -6804,7 +7815,7 @@
                 <a:ea typeface="Hiragino Sans GB"/>
                 <a:cs typeface="Hiragino Sans GB"/>
               </a:rPr>
-              <a:t>制作时期、窑口与风格仍为证据不足</a:t>
+              <a:t>制作时期、窑口和风格仍为证据不足</a:t>
             </a:r>
           </a:p>
           <a:p xmlns:a="http://schemas.openxmlformats.org/drawingml/2006/main">
@@ -6827,7 +7838,7 @@
                 <a:ea typeface="Hiragino Sans GB"/>
                 <a:cs typeface="Hiragino Sans GB"/>
               </a:rPr>
-              <a:t>待补证问题与原初稿继续可回查</a:t>
+              <a:t>待补证问题和原初稿继续可回查</a:t>
             </a:r>
           </a:p>
         </p:txBody>
@@ -6837,7 +7848,7 @@
           <p:cNvPr id="16" name="本例仍有资料对应和论据支持问题，独立专家评价列入下一阶段">
             <a:extLst xmlns:a="http://schemas.openxmlformats.org/drawingml/2006/main">
               <a:ext uri="{FF2B5EF4-FFF2-40B4-BE49-F238E27FC236}">
-                <a16:creationId xmlns:a16="http://schemas.microsoft.com/office/drawing/2014/main" id="{CC36271C-7FC2-4463-B614-E9EB9B50B04D}"/>
+                <a16:creationId xmlns:a16="http://schemas.microsoft.com/office/drawing/2014/main" id="{7ADA5446-59BA-4F2B-946F-A9A7A6ECCB3D}"/>
               </a:ext>
             </a:extLst>
           </p:cNvPr>
@@ -6894,7 +7905,7 @@
           <p:cNvPr id="17" name="04">
             <a:extLst xmlns:a="http://schemas.openxmlformats.org/drawingml/2006/main">
               <a:ext uri="{FF2B5EF4-FFF2-40B4-BE49-F238E27FC236}">
-                <a16:creationId xmlns:a16="http://schemas.microsoft.com/office/drawing/2014/main" id="{8E4FCC0A-4CE9-4A86-B056-AC9CD1D72111}"/>
+                <a16:creationId xmlns:a16="http://schemas.microsoft.com/office/drawing/2014/main" id="{D0EE2B3D-CB86-4C66-8BC6-6DDB023C1451}"/>
               </a:ext>
             </a:extLst>
           </p:cNvPr>
@@ -6949,7 +7960,7 @@
     </p:spTree>
     <p:extLst>
       <p:ext uri="{BB962C8B-B14F-4D97-AF65-F5344CB8AC3E}">
-        <p14:creationId xmlns:p14="http://schemas.microsoft.com/office/powerpoint/2010/main" val="2124181366"/>
+        <p14:creationId xmlns:p14="http://schemas.microsoft.com/office/powerpoint/2010/main" val="1312719326"/>
       </p:ext>
     </p:extLst>
   </p:cSld>
@@ -6980,7 +7991,7 @@
           <p:cNvPr id="30" name="Agent Skills 把方法写成执行步骤">
             <a:extLst xmlns:a="http://schemas.openxmlformats.org/drawingml/2006/main">
               <a:ext uri="{FF2B5EF4-FFF2-40B4-BE49-F238E27FC236}">
-                <a16:creationId xmlns:a16="http://schemas.microsoft.com/office/drawing/2014/main" id="{4616D3BD-1171-4806-9922-40AE5D354F78}"/>
+                <a16:creationId xmlns:a16="http://schemas.microsoft.com/office/drawing/2014/main" id="{81F4A28B-8F87-46F4-998B-C8F8E90A931F}"/>
               </a:ext>
             </a:extLst>
           </p:cNvPr>
@@ -7037,7 +8048,7 @@
           <p:cNvPr id="2" name="7 个自研领域方法包">
             <a:extLst xmlns:a="http://schemas.openxmlformats.org/drawingml/2006/main">
               <a:ext uri="{FF2B5EF4-FFF2-40B4-BE49-F238E27FC236}">
-                <a16:creationId xmlns:a16="http://schemas.microsoft.com/office/drawing/2014/main" id="{7011B1B9-EDEC-44A9-BF93-05AD3E2FAE89}"/>
+                <a16:creationId xmlns:a16="http://schemas.microsoft.com/office/drawing/2014/main" id="{260D8B70-623B-4CE4-81C6-8C79332A15BF}"/>
               </a:ext>
             </a:extLst>
           </p:cNvPr>
@@ -7091,10 +8102,10 @@
       </p:sp>
       <p:sp>
         <p:nvSpPr>
-          <p:cNvPr id="3" name="任务与补拍路由">
+          <p:cNvPr id="3" name="任务和补拍路由">
             <a:extLst xmlns:a="http://schemas.openxmlformats.org/drawingml/2006/main">
               <a:ext uri="{FF2B5EF4-FFF2-40B4-BE49-F238E27FC236}">
-                <a16:creationId xmlns:a16="http://schemas.microsoft.com/office/drawing/2014/main" id="{CEC7724A-E23F-4736-973D-32AC58289913}"/>
+                <a16:creationId xmlns:a16="http://schemas.microsoft.com/office/drawing/2014/main" id="{6BC32810-8EFC-4071-B535-795F204F721B}"/>
               </a:ext>
             </a:extLst>
           </p:cNvPr>
@@ -7141,7 +8152,7 @@
                 <a:ea typeface="Hiragino Sans GB"/>
                 <a:cs typeface="Hiragino Sans GB"/>
               </a:rPr>
-              <a:t>任务与补拍路由</a:t>
+              <a:t>任务和补拍路由</a:t>
             </a:r>
           </a:p>
         </p:txBody>
@@ -7151,7 +8162,7 @@
           <p:cNvPr id="4" name="确认任务和缺失部位">
             <a:extLst xmlns:a="http://schemas.openxmlformats.org/drawingml/2006/main">
               <a:ext uri="{FF2B5EF4-FFF2-40B4-BE49-F238E27FC236}">
-                <a16:creationId xmlns:a16="http://schemas.microsoft.com/office/drawing/2014/main" id="{C42AEFDC-D9BD-467B-82FF-C3BFF2148F32}"/>
+                <a16:creationId xmlns:a16="http://schemas.microsoft.com/office/drawing/2014/main" id="{A3B53EDD-5EEB-427C-873D-56BF007C7640}"/>
               </a:ext>
             </a:extLst>
           </p:cNvPr>
@@ -7208,7 +8219,7 @@
           <p:cNvPr id="5" name="陶瓷编目研究">
             <a:extLst xmlns:a="http://schemas.openxmlformats.org/drawingml/2006/main">
               <a:ext uri="{FF2B5EF4-FFF2-40B4-BE49-F238E27FC236}">
-                <a16:creationId xmlns:a16="http://schemas.microsoft.com/office/drawing/2014/main" id="{0FC8113D-A69B-4957-B826-80DA45A0D3CE}"/>
+                <a16:creationId xmlns:a16="http://schemas.microsoft.com/office/drawing/2014/main" id="{42CFB216-884D-4318-8838-EE0A8D23EC14}"/>
               </a:ext>
             </a:extLst>
           </p:cNvPr>
@@ -7262,10 +8273,10 @@
       </p:sp>
       <p:sp>
         <p:nvSpPr>
-          <p:cNvPr id="6" name="分开观察、记载与主张">
+          <p:cNvPr id="6" name="分开观察、记载和主张">
             <a:extLst xmlns:a="http://schemas.openxmlformats.org/drawingml/2006/main">
               <a:ext uri="{FF2B5EF4-FFF2-40B4-BE49-F238E27FC236}">
-                <a16:creationId xmlns:a16="http://schemas.microsoft.com/office/drawing/2014/main" id="{BBBA6BC4-5613-4128-9697-FE16E1403CE5}"/>
+                <a16:creationId xmlns:a16="http://schemas.microsoft.com/office/drawing/2014/main" id="{96C02A21-A293-4178-81E1-F83C5F9D2F57}"/>
               </a:ext>
             </a:extLst>
           </p:cNvPr>
@@ -7312,7 +8323,7 @@
                 <a:ea typeface="Hiragino Sans GB"/>
                 <a:cs typeface="Hiragino Sans GB"/>
               </a:rPr>
-              <a:t>分开观察、记载与主张</a:t>
+              <a:t>分开观察、记载和主张</a:t>
             </a:r>
           </a:p>
         </p:txBody>
@@ -7322,7 +8333,7 @@
           <p:cNvPr id="7" name="青花比较研究">
             <a:extLst xmlns:a="http://schemas.openxmlformats.org/drawingml/2006/main">
               <a:ext uri="{FF2B5EF4-FFF2-40B4-BE49-F238E27FC236}">
-                <a16:creationId xmlns:a16="http://schemas.microsoft.com/office/drawing/2014/main" id="{FFD36518-C20C-4634-9A44-1E46AD1BCB54}"/>
+                <a16:creationId xmlns:a16="http://schemas.microsoft.com/office/drawing/2014/main" id="{2AA1B3DC-6E6B-4494-90CE-3B5098F02D38}"/>
               </a:ext>
             </a:extLst>
           </p:cNvPr>
@@ -7376,10 +8387,10 @@
       </p:sp>
       <p:sp>
         <p:nvSpPr>
-          <p:cNvPr id="8" name="记录反例与竞争解释">
+          <p:cNvPr id="8" name="记录反例和竞争解释">
             <a:extLst xmlns:a="http://schemas.openxmlformats.org/drawingml/2006/main">
               <a:ext uri="{FF2B5EF4-FFF2-40B4-BE49-F238E27FC236}">
-                <a16:creationId xmlns:a16="http://schemas.microsoft.com/office/drawing/2014/main" id="{1B1F80A4-B216-48BF-BB01-C7C27EA9A8BB}"/>
+                <a16:creationId xmlns:a16="http://schemas.microsoft.com/office/drawing/2014/main" id="{CA2B8EBA-7BAE-4DCB-9418-643BA7CB9C63}"/>
               </a:ext>
             </a:extLst>
           </p:cNvPr>
@@ -7426,7 +8437,7 @@
                 <a:ea typeface="Hiragino Sans GB"/>
                 <a:cs typeface="Hiragino Sans GB"/>
               </a:rPr>
-              <a:t>记录反例与竞争解释</a:t>
+              <a:t>记录反例和竞争解释</a:t>
             </a:r>
           </a:p>
         </p:txBody>
@@ -7436,7 +8447,7 @@
           <p:cNvPr id="9" name="状况竞争解释">
             <a:extLst xmlns:a="http://schemas.openxmlformats.org/drawingml/2006/main">
               <a:ext uri="{FF2B5EF4-FFF2-40B4-BE49-F238E27FC236}">
-                <a16:creationId xmlns:a16="http://schemas.microsoft.com/office/drawing/2014/main" id="{49C03E1F-99F3-4C64-B9BB-909A109EC0F7}"/>
+                <a16:creationId xmlns:a16="http://schemas.microsoft.com/office/drawing/2014/main" id="{9CC3CF55-9FCB-466B-92C9-5FAAFD4800FE}"/>
               </a:ext>
             </a:extLst>
           </p:cNvPr>
@@ -7493,7 +8504,7 @@
           <p:cNvPr id="10" name="提出可检查的假说">
             <a:extLst xmlns:a="http://schemas.openxmlformats.org/drawingml/2006/main">
               <a:ext uri="{FF2B5EF4-FFF2-40B4-BE49-F238E27FC236}">
-                <a16:creationId xmlns:a16="http://schemas.microsoft.com/office/drawing/2014/main" id="{D25EAA79-BEB2-487F-99A6-37DD9EBAB122}"/>
+                <a16:creationId xmlns:a16="http://schemas.microsoft.com/office/drawing/2014/main" id="{02AE1FF7-65F5-4ED1-9E8E-ED903CCEB6B7}"/>
               </a:ext>
             </a:extLst>
           </p:cNvPr>
@@ -7550,7 +8561,7 @@
           <p:cNvPr id="11" name="来源经历核查">
             <a:extLst xmlns:a="http://schemas.openxmlformats.org/drawingml/2006/main">
               <a:ext uri="{FF2B5EF4-FFF2-40B4-BE49-F238E27FC236}">
-                <a16:creationId xmlns:a16="http://schemas.microsoft.com/office/drawing/2014/main" id="{8B324978-8722-4E5F-A525-69209FE7F534}"/>
+                <a16:creationId xmlns:a16="http://schemas.microsoft.com/office/drawing/2014/main" id="{C580D601-A2C4-4DB8-BC7A-D8434AC247B9}"/>
               </a:ext>
             </a:extLst>
           </p:cNvPr>
@@ -7604,10 +8615,10 @@
       </p:sp>
       <p:sp>
         <p:nvSpPr>
-          <p:cNvPr id="12" name="核对事件与本件凭据">
+          <p:cNvPr id="12" name="核对事件和本件凭据">
             <a:extLst xmlns:a="http://schemas.openxmlformats.org/drawingml/2006/main">
               <a:ext uri="{FF2B5EF4-FFF2-40B4-BE49-F238E27FC236}">
-                <a16:creationId xmlns:a16="http://schemas.microsoft.com/office/drawing/2014/main" id="{6CD218DF-6641-4333-BB12-4349438EE9F1}"/>
+                <a16:creationId xmlns:a16="http://schemas.microsoft.com/office/drawing/2014/main" id="{58B87D65-964F-42F2-A91C-3BF9DA3C0568}"/>
               </a:ext>
             </a:extLst>
           </p:cNvPr>
@@ -7654,7 +8665,7 @@
                 <a:ea typeface="Hiragino Sans GB"/>
                 <a:cs typeface="Hiragino Sans GB"/>
               </a:rPr>
-              <a:t>核对事件与本件凭据</a:t>
+              <a:t>核对事件和本件凭据</a:t>
             </a:r>
           </a:p>
         </p:txBody>
@@ -7664,7 +8675,7 @@
           <p:cNvPr id="13" name="文字凭据核查">
             <a:extLst xmlns:a="http://schemas.openxmlformats.org/drawingml/2006/main">
               <a:ext uri="{FF2B5EF4-FFF2-40B4-BE49-F238E27FC236}">
-                <a16:creationId xmlns:a16="http://schemas.microsoft.com/office/drawing/2014/main" id="{11478BA9-478B-461E-8EDE-17E851D71540}"/>
+                <a16:creationId xmlns:a16="http://schemas.microsoft.com/office/drawing/2014/main" id="{1D08AD8B-4CA2-4A47-9602-6DCE0AB55875}"/>
               </a:ext>
             </a:extLst>
           </p:cNvPr>
@@ -7721,7 +8732,7 @@
           <p:cNvPr id="14" name="分列相符、冲突和缺失">
             <a:extLst xmlns:a="http://schemas.openxmlformats.org/drawingml/2006/main">
               <a:ext uri="{FF2B5EF4-FFF2-40B4-BE49-F238E27FC236}">
-                <a16:creationId xmlns:a16="http://schemas.microsoft.com/office/drawing/2014/main" id="{598E4FDB-D2D9-4DD8-9605-D02AAAA1312F}"/>
+                <a16:creationId xmlns:a16="http://schemas.microsoft.com/office/drawing/2014/main" id="{13B5C8AD-277A-4EEF-87B6-0723411A1437}"/>
               </a:ext>
             </a:extLst>
           </p:cNvPr>
@@ -7775,10 +8786,10 @@
       </p:sp>
       <p:sp>
         <p:nvSpPr>
-          <p:cNvPr id="15" name="补证与版本修订">
+          <p:cNvPr id="15" name="补证和版本修订">
             <a:extLst xmlns:a="http://schemas.openxmlformats.org/drawingml/2006/main">
               <a:ext uri="{FF2B5EF4-FFF2-40B4-BE49-F238E27FC236}">
-                <a16:creationId xmlns:a16="http://schemas.microsoft.com/office/drawing/2014/main" id="{BA57CE89-A4C7-455D-9A74-F07328333446}"/>
+                <a16:creationId xmlns:a16="http://schemas.microsoft.com/office/drawing/2014/main" id="{83CAB29F-50E1-4AE2-86FE-AFF1F5031B5B}"/>
               </a:ext>
             </a:extLst>
           </p:cNvPr>
@@ -7825,7 +8836,7 @@
                 <a:ea typeface="Hiragino Sans GB"/>
                 <a:cs typeface="Hiragino Sans GB"/>
               </a:rPr>
-              <a:t>补证与版本修订</a:t>
+              <a:t>补证和版本修订</a:t>
             </a:r>
           </a:p>
         </p:txBody>
@@ -7835,7 +8846,7 @@
           <p:cNvPr id="16" name="解释新证据改变了什么">
             <a:extLst xmlns:a="http://schemas.openxmlformats.org/drawingml/2006/main">
               <a:ext uri="{FF2B5EF4-FFF2-40B4-BE49-F238E27FC236}">
-                <a16:creationId xmlns:a16="http://schemas.microsoft.com/office/drawing/2014/main" id="{D22B109C-9C8C-4CD3-A975-BB46BDDE0D02}"/>
+                <a16:creationId xmlns:a16="http://schemas.microsoft.com/office/drawing/2014/main" id="{F4E4FCBE-21A5-43E9-B602-C68F066E623E}"/>
               </a:ext>
             </a:extLst>
           </p:cNvPr>
@@ -7892,7 +8903,7 @@
           <p:cNvPr id="17" name="发现描述">
             <a:extLst xmlns:a="http://schemas.openxmlformats.org/drawingml/2006/main">
               <a:ext uri="{FF2B5EF4-FFF2-40B4-BE49-F238E27FC236}">
-                <a16:creationId xmlns:a16="http://schemas.microsoft.com/office/drawing/2014/main" id="{D8B8A280-11EC-43E7-868C-09C91674753A}"/>
+                <a16:creationId xmlns:a16="http://schemas.microsoft.com/office/drawing/2014/main" id="{B8D6D1E3-9397-4479-A4BA-C29E166A60E5}"/>
               </a:ext>
             </a:extLst>
           </p:cNvPr>
@@ -7979,7 +8990,7 @@
           <p:cNvPr id="18" name="读取正文">
             <a:extLst xmlns:a="http://schemas.openxmlformats.org/drawingml/2006/main">
               <a:ext uri="{FF2B5EF4-FFF2-40B4-BE49-F238E27FC236}">
-                <a16:creationId xmlns:a16="http://schemas.microsoft.com/office/drawing/2014/main" id="{82DB4F44-6A84-4EAC-A665-3492258E1CA1}"/>
+                <a16:creationId xmlns:a16="http://schemas.microsoft.com/office/drawing/2014/main" id="{6F22D797-3A52-4D35-AB18-E18FBA2C100A}"/>
               </a:ext>
             </a:extLst>
           </p:cNvPr>
@@ -8066,7 +9077,7 @@
           <p:cNvPr id="19" name="按需资源">
             <a:extLst xmlns:a="http://schemas.openxmlformats.org/drawingml/2006/main">
               <a:ext uri="{FF2B5EF4-FFF2-40B4-BE49-F238E27FC236}">
-                <a16:creationId xmlns:a16="http://schemas.microsoft.com/office/drawing/2014/main" id="{4AE23EEB-208E-4E60-8A30-355B872E1E8A}"/>
+                <a16:creationId xmlns:a16="http://schemas.microsoft.com/office/drawing/2014/main" id="{AE9C5F43-F09D-45E6-A0B7-265F072CDF88}"/>
               </a:ext>
             </a:extLst>
           </p:cNvPr>
@@ -8143,7 +9154,7 @@
                 <a:ea typeface="Hiragino Sans GB"/>
                 <a:cs typeface="Hiragino Sans GB"/>
               </a:rPr>
-              <a:t>参考与检查</a:t>
+              <a:t>参考和检查</a:t>
             </a:r>
           </a:p>
         </p:txBody>
@@ -8205,7 +9216,7 @@
           <p:cNvPr id="22" name="版本可回放">
             <a:extLst xmlns:a="http://schemas.openxmlformats.org/drawingml/2006/main">
               <a:ext uri="{FF2B5EF4-FFF2-40B4-BE49-F238E27FC236}">
-                <a16:creationId xmlns:a16="http://schemas.microsoft.com/office/drawing/2014/main" id="{F9F87ED4-4B42-4C26-89E3-17026760C928}"/>
+                <a16:creationId xmlns:a16="http://schemas.microsoft.com/office/drawing/2014/main" id="{3FD2D752-751D-4D4C-8406-24373B7B7C96}"/>
               </a:ext>
             </a:extLst>
           </p:cNvPr>
@@ -8259,10 +9270,10 @@
       </p:sp>
       <p:sp>
         <p:nvSpPr>
-          <p:cNvPr id="23" name="整包 SHA 固定实际采用的方法与资源">
+          <p:cNvPr id="23" name="整包 SHA 固定实际采用的方法和资源">
             <a:extLst xmlns:a="http://schemas.openxmlformats.org/drawingml/2006/main">
               <a:ext uri="{FF2B5EF4-FFF2-40B4-BE49-F238E27FC236}">
-                <a16:creationId xmlns:a16="http://schemas.microsoft.com/office/drawing/2014/main" id="{72725009-A705-4986-8D76-052B3A1252F0}"/>
+                <a16:creationId xmlns:a16="http://schemas.microsoft.com/office/drawing/2014/main" id="{17D39EA3-D319-4DC0-B0EE-1A7E0B32AB5D}"/>
               </a:ext>
             </a:extLst>
           </p:cNvPr>
@@ -8309,7 +9320,7 @@
                 <a:ea typeface="Hiragino Sans GB"/>
                 <a:cs typeface="Hiragino Sans GB"/>
               </a:rPr>
-              <a:t>整包 SHA 固定实际采用的方法与资源</a:t>
+              <a:t>整包 SHA 固定实际采用的方法和资源</a:t>
             </a:r>
           </a:p>
         </p:txBody>
@@ -8319,7 +9330,7 @@
           <p:cNvPr id="24" name="权限由宿主执行">
             <a:extLst xmlns:a="http://schemas.openxmlformats.org/drawingml/2006/main">
               <a:ext uri="{FF2B5EF4-FFF2-40B4-BE49-F238E27FC236}">
-                <a16:creationId xmlns:a16="http://schemas.microsoft.com/office/drawing/2014/main" id="{488CF0D3-AEE7-4719-AEEB-C74618311040}"/>
+                <a16:creationId xmlns:a16="http://schemas.microsoft.com/office/drawing/2014/main" id="{088AB1FD-F406-4E3D-BDC0-ADE8AE64B1E6}"/>
               </a:ext>
             </a:extLst>
           </p:cNvPr>
@@ -8373,10 +9384,10 @@
       </p:sp>
       <p:sp>
         <p:nvSpPr>
-          <p:cNvPr id="25" name="注册工具、真实读回执与累计预算共同约束">
+          <p:cNvPr id="25" name="注册工具、真实读回执和累计预算共同约束">
             <a:extLst xmlns:a="http://schemas.openxmlformats.org/drawingml/2006/main">
               <a:ext uri="{FF2B5EF4-FFF2-40B4-BE49-F238E27FC236}">
-                <a16:creationId xmlns:a16="http://schemas.microsoft.com/office/drawing/2014/main" id="{1922078E-C1AF-48F0-B6F5-E7ACB9D5AE54}"/>
+                <a16:creationId xmlns:a16="http://schemas.microsoft.com/office/drawing/2014/main" id="{22C205CF-4DB8-442A-A450-1B3A639B41C7}"/>
               </a:ext>
             </a:extLst>
           </p:cNvPr>
@@ -8423,7 +9434,7 @@
                 <a:ea typeface="Hiragino Sans GB"/>
                 <a:cs typeface="Hiragino Sans GB"/>
               </a:rPr>
-              <a:t>注册工具、真实读回执与累计预算共同约束</a:t>
+              <a:t>注册工具、真实读回执和累计预算共同约束</a:t>
             </a:r>
           </a:p>
         </p:txBody>
@@ -8433,7 +9444,7 @@
           <p:cNvPr id="26" name="意见对应证据">
             <a:extLst xmlns:a="http://schemas.openxmlformats.org/drawingml/2006/main">
               <a:ext uri="{FF2B5EF4-FFF2-40B4-BE49-F238E27FC236}">
-                <a16:creationId xmlns:a16="http://schemas.microsoft.com/office/drawing/2014/main" id="{0789F0B9-30D3-4CC2-A324-DA379C418FF4}"/>
+                <a16:creationId xmlns:a16="http://schemas.microsoft.com/office/drawing/2014/main" id="{AF5B56CA-C5A7-4971-B145-BFB4DFEABE25}"/>
               </a:ext>
             </a:extLst>
           </p:cNvPr>
@@ -8487,10 +9498,10 @@
       </p:sp>
       <p:sp>
         <p:nvSpPr>
-          <p:cNvPr id="27" name="本轮观察编号与实际阅读段落绑定">
+          <p:cNvPr id="27" name="本轮观察编号和实际阅读段落绑定">
             <a:extLst xmlns:a="http://schemas.openxmlformats.org/drawingml/2006/main">
               <a:ext uri="{FF2B5EF4-FFF2-40B4-BE49-F238E27FC236}">
-                <a16:creationId xmlns:a16="http://schemas.microsoft.com/office/drawing/2014/main" id="{FC814CB6-77AB-4732-B13F-9226F91B4BBD}"/>
+                <a16:creationId xmlns:a16="http://schemas.microsoft.com/office/drawing/2014/main" id="{42E9F1DA-41D6-4797-8DBF-C4679397A8DC}"/>
               </a:ext>
             </a:extLst>
           </p:cNvPr>
@@ -8537,7 +9548,7 @@
                 <a:ea typeface="Hiragino Sans GB"/>
                 <a:cs typeface="Hiragino Sans GB"/>
               </a:rPr>
-              <a:t>本轮观察编号与实际阅读段落绑定</a:t>
+              <a:t>本轮观察编号和实际阅读段落绑定</a:t>
             </a:r>
           </a:p>
         </p:txBody>
@@ -8547,7 +9558,7 @@
           <p:cNvPr id="28" name="领域包由项目开发，专业方法效果将在同模型、同预算评测中验证">
             <a:extLst xmlns:a="http://schemas.openxmlformats.org/drawingml/2006/main">
               <a:ext uri="{FF2B5EF4-FFF2-40B4-BE49-F238E27FC236}">
-                <a16:creationId xmlns:a16="http://schemas.microsoft.com/office/drawing/2014/main" id="{89D2D70F-33A5-4458-A228-9172652AE0BB}"/>
+                <a16:creationId xmlns:a16="http://schemas.microsoft.com/office/drawing/2014/main" id="{DC91886F-D7C9-4AEF-88CA-B5AD2A9F68CF}"/>
               </a:ext>
             </a:extLst>
           </p:cNvPr>
@@ -8604,7 +9615,7 @@
           <p:cNvPr id="29" name="05">
             <a:extLst xmlns:a="http://schemas.openxmlformats.org/drawingml/2006/main">
               <a:ext uri="{FF2B5EF4-FFF2-40B4-BE49-F238E27FC236}">
-                <a16:creationId xmlns:a16="http://schemas.microsoft.com/office/drawing/2014/main" id="{3DF97F0F-E9E7-489C-9BA9-D800A87556A3}"/>
+                <a16:creationId xmlns:a16="http://schemas.microsoft.com/office/drawing/2014/main" id="{C1464281-5E4D-49F8-B17E-1A5DC7C5A580}"/>
               </a:ext>
             </a:extLst>
           </p:cNvPr>
@@ -8659,7 +9670,7 @@
     </p:spTree>
     <p:extLst>
       <p:ext uri="{BB962C8B-B14F-4D97-AF65-F5344CB8AC3E}">
-        <p14:creationId xmlns:p14="http://schemas.microsoft.com/office/powerpoint/2010/main" val="1844081282"/>
+        <p14:creationId xmlns:p14="http://schemas.microsoft.com/office/powerpoint/2010/main" val="2094288063"/>
       </p:ext>
     </p:extLst>
   </p:cSld>
@@ -8687,10 +9698,10 @@
       </p:grpSpPr>
       <p:sp>
         <p:nvSpPr>
-          <p:cNvPr id="22" name="中文系统架构：本地证据与受控协作">
+          <p:cNvPr id="22" name="本地证据和受控模型协作">
             <a:extLst xmlns:a="http://schemas.openxmlformats.org/drawingml/2006/main">
               <a:ext uri="{FF2B5EF4-FFF2-40B4-BE49-F238E27FC236}">
-                <a16:creationId xmlns:a16="http://schemas.microsoft.com/office/drawing/2014/main" id="{E6A0D51F-9652-492F-AB27-7B34197B7EE2}"/>
+                <a16:creationId xmlns:a16="http://schemas.microsoft.com/office/drawing/2014/main" id="{5D721DCD-1FA7-48AD-8986-76F0C0CB8E8D}"/>
               </a:ext>
             </a:extLst>
           </p:cNvPr>
@@ -8737,17 +9748,17 @@
                 <a:ea typeface="Hiragino Sans GB"/>
                 <a:cs typeface="Hiragino Sans GB"/>
               </a:rPr>
-              <a:t>中文系统架构：本地证据与受控协作</a:t>
-            </a:r>
-          </a:p>
-        </p:txBody>
-      </p:sp>
-      <p:sp>
-        <p:nvSpPr>
-          <p:cNvPr id="2" name="原件与案卷留在指定本地节点，外部协作使用批准文字">
+              <a:t>本地证据和受控模型协作</a:t>
+            </a:r>
+          </a:p>
+        </p:txBody>
+      </p:sp>
+      <p:sp>
+        <p:nvSpPr>
+          <p:cNvPr id="2" name="原图和案卷留在 Spark，外部审查只使用批准文字">
             <a:extLst xmlns:a="http://schemas.openxmlformats.org/drawingml/2006/main">
               <a:ext uri="{FF2B5EF4-FFF2-40B4-BE49-F238E27FC236}">
-                <a16:creationId xmlns:a16="http://schemas.microsoft.com/office/drawing/2014/main" id="{954FDA01-48F3-416B-B683-74FD722800DC}"/>
+                <a16:creationId xmlns:a16="http://schemas.microsoft.com/office/drawing/2014/main" id="{CA0287EF-5AF8-4BB3-A2E2-9A3218199D5C}"/>
               </a:ext>
             </a:extLst>
           </p:cNvPr>
@@ -8794,17 +9805,17 @@
                 <a:ea typeface="Hiragino Sans GB"/>
                 <a:cs typeface="Hiragino Sans GB"/>
               </a:rPr>
-              <a:t>原件与案卷留在指定本地节点，外部协作使用批准文字</a:t>
-            </a:r>
-          </a:p>
-        </p:txBody>
-      </p:sp>
-      <p:sp>
-        <p:nvSpPr>
-          <p:cNvPr id="3" name="本地工作台与DGX Spark边界">
+              <a:t>原图和案卷留在 Spark，外部审查只使用批准文字</a:t>
+            </a:r>
+          </a:p>
+        </p:txBody>
+      </p:sp>
+      <p:sp>
+        <p:nvSpPr>
+          <p:cNvPr id="3" name="本地工作台和DGX Spark边界">
             <a:extLst xmlns:a="http://schemas.openxmlformats.org/drawingml/2006/main">
               <a:ext uri="{FF2B5EF4-FFF2-40B4-BE49-F238E27FC236}">
-                <a16:creationId xmlns:a16="http://schemas.microsoft.com/office/drawing/2014/main" id="{5B11533E-80BF-4200-ACE4-018F39FA91C0}"/>
+                <a16:creationId xmlns:a16="http://schemas.microsoft.com/office/drawing/2014/main" id="{A16BAB8E-DA1D-4C62-BAFA-EA920EF0299D}"/>
               </a:ext>
             </a:extLst>
           </p:cNvPr>
@@ -8833,10 +9844,10 @@
       </p:sp>
       <p:sp>
         <p:nvSpPr>
-          <p:cNvPr id="4" name="本地专业工作台与 DGX Spark">
+          <p:cNvPr id="4" name="本地专业工作台和 DGX Spark">
             <a:extLst xmlns:a="http://schemas.openxmlformats.org/drawingml/2006/main">
               <a:ext uri="{FF2B5EF4-FFF2-40B4-BE49-F238E27FC236}">
-                <a16:creationId xmlns:a16="http://schemas.microsoft.com/office/drawing/2014/main" id="{B0464E05-14D0-4A5D-A46F-282371E1AA64}"/>
+                <a16:creationId xmlns:a16="http://schemas.microsoft.com/office/drawing/2014/main" id="{29F76B2B-AF16-41FF-913D-070065059D08}"/>
               </a:ext>
             </a:extLst>
           </p:cNvPr>
@@ -8883,17 +9894,17 @@
                 <a:ea typeface="Hiragino Sans GB"/>
                 <a:cs typeface="Hiragino Sans GB"/>
               </a:rPr>
-              <a:t>本地专业工作台与 DGX Spark</a:t>
-            </a:r>
-          </a:p>
-        </p:txBody>
-      </p:sp>
-      <p:sp>
-        <p:nvSpPr>
-          <p:cNvPr id="5" name="采集与资料">
+              <a:t>本地专业工作台和 DGX Spark</a:t>
+            </a:r>
+          </a:p>
+        </p:txBody>
+      </p:sp>
+      <p:sp>
+        <p:nvSpPr>
+          <p:cNvPr id="5" name="采集和资料">
             <a:extLst xmlns:a="http://schemas.openxmlformats.org/drawingml/2006/main">
               <a:ext uri="{FF2B5EF4-FFF2-40B4-BE49-F238E27FC236}">
-                <a16:creationId xmlns:a16="http://schemas.microsoft.com/office/drawing/2014/main" id="{FBD72102-EF1E-48AB-90D0-7B94D3D4682B}"/>
+                <a16:creationId xmlns:a16="http://schemas.microsoft.com/office/drawing/2014/main" id="{C0979C2D-9BAC-47D6-A7CD-523CE8BBB8FC}"/>
               </a:ext>
             </a:extLst>
           </p:cNvPr>
@@ -8947,7 +9958,7 @@
                 <a:ea typeface="Hiragino Sans GB"/>
                 <a:cs typeface="Hiragino Sans GB"/>
               </a:rPr>
-              <a:t>采集与资料</a:t>
+              <a:t>采集和资料</a:t>
             </a:r>
           </a:p>
           <a:p xmlns:a="http://schemas.openxmlformats.org/drawingml/2006/main">
@@ -8970,7 +9981,7 @@
                 <a:ea typeface="Hiragino Sans GB"/>
                 <a:cs typeface="Hiragino Sans GB"/>
               </a:rPr>
-              <a:t>原图与许可文字</a:t>
+              <a:t>原图和许可文字</a:t>
             </a:r>
           </a:p>
           <a:p xmlns:a="http://schemas.openxmlformats.org/drawingml/2006/main">
@@ -8993,7 +10004,7 @@
                 <a:ea typeface="Hiragino Sans GB"/>
                 <a:cs typeface="Hiragino Sans GB"/>
               </a:rPr>
-              <a:t>网页与本机桥接</a:t>
+              <a:t>网页和本机桥接</a:t>
             </a:r>
           </a:p>
         </p:txBody>
@@ -9003,7 +10014,7 @@
           <p:cNvPr id="6" name="版本化案卷">
             <a:extLst xmlns:a="http://schemas.openxmlformats.org/drawingml/2006/main">
               <a:ext uri="{FF2B5EF4-FFF2-40B4-BE49-F238E27FC236}">
-                <a16:creationId xmlns:a16="http://schemas.microsoft.com/office/drawing/2014/main" id="{5C70D106-6709-4D7F-A6A1-DD10AE7F8016}"/>
+                <a16:creationId xmlns:a16="http://schemas.microsoft.com/office/drawing/2014/main" id="{9B450A9C-197F-4964-ABD2-FAB3BE8265AC}"/>
               </a:ext>
             </a:extLst>
           </p:cNvPr>
@@ -9080,7 +10091,7 @@
                 <a:ea typeface="Hiragino Sans GB"/>
                 <a:cs typeface="Hiragino Sans GB"/>
               </a:rPr>
-              <a:t>原件 SHA 与来源</a:t>
+              <a:t>原件 SHA 和来源</a:t>
             </a:r>
           </a:p>
           <a:p xmlns:a="http://schemas.openxmlformats.org/drawingml/2006/main">
@@ -9113,7 +10124,7 @@
           <p:cNvPr id="7" name="研究 Agent 宿主">
             <a:extLst xmlns:a="http://schemas.openxmlformats.org/drawingml/2006/main">
               <a:ext uri="{FF2B5EF4-FFF2-40B4-BE49-F238E27FC236}">
-                <a16:creationId xmlns:a16="http://schemas.microsoft.com/office/drawing/2014/main" id="{F08888B9-4C67-4E37-BF78-A7498E4AC0FC}"/>
+                <a16:creationId xmlns:a16="http://schemas.microsoft.com/office/drawing/2014/main" id="{38F01FE7-DC0B-4795-9F4E-FA9AC4C24CB0}"/>
               </a:ext>
             </a:extLst>
           </p:cNvPr>
@@ -9190,7 +10201,7 @@
                 <a:ea typeface="Hiragino Sans GB"/>
                 <a:cs typeface="Hiragino Sans GB"/>
               </a:rPr>
-              <a:t>注册工具与预算</a:t>
+              <a:t>注册工具和预算</a:t>
             </a:r>
           </a:p>
           <a:p xmlns:a="http://schemas.openxmlformats.org/drawingml/2006/main">
@@ -9220,10 +10231,10 @@
       </p:sp>
       <p:sp>
         <p:nvSpPr>
-          <p:cNvPr id="8" name="复核与证据报告">
+          <p:cNvPr id="8" name="复核和证据报告">
             <a:extLst xmlns:a="http://schemas.openxmlformats.org/drawingml/2006/main">
               <a:ext uri="{FF2B5EF4-FFF2-40B4-BE49-F238E27FC236}">
-                <a16:creationId xmlns:a16="http://schemas.microsoft.com/office/drawing/2014/main" id="{321864DC-24DC-4F7A-98CF-F704F9CB27A9}"/>
+                <a16:creationId xmlns:a16="http://schemas.microsoft.com/office/drawing/2014/main" id="{7A4E875A-77FB-4767-A26D-A42453F00E1A}"/>
               </a:ext>
             </a:extLst>
           </p:cNvPr>
@@ -9277,7 +10288,7 @@
                 <a:ea typeface="Hiragino Sans GB"/>
                 <a:cs typeface="Hiragino Sans GB"/>
               </a:rPr>
-              <a:t>复核与证据报告</a:t>
+              <a:t>复核和证据报告</a:t>
             </a:r>
           </a:p>
           <a:p xmlns:a="http://schemas.openxmlformats.org/drawingml/2006/main">
@@ -9300,7 +10311,7 @@
                 <a:ea typeface="Hiragino Sans GB"/>
                 <a:cs typeface="Hiragino Sans GB"/>
               </a:rPr>
-              <a:t>支持、矛盾与缺口</a:t>
+              <a:t>支持、矛盾和缺口</a:t>
             </a:r>
           </a:p>
           <a:p xmlns:a="http://schemas.openxmlformats.org/drawingml/2006/main">
@@ -9330,10 +10341,10 @@
       </p:sp>
       <p:sp>
         <p:nvSpPr>
-          <p:cNvPr id="9" name="固定知识与引用">
+          <p:cNvPr id="9" name="固定知识和引用">
             <a:extLst xmlns:a="http://schemas.openxmlformats.org/drawingml/2006/main">
               <a:ext uri="{FF2B5EF4-FFF2-40B4-BE49-F238E27FC236}">
-                <a16:creationId xmlns:a16="http://schemas.microsoft.com/office/drawing/2014/main" id="{6DE46670-440A-4142-B909-EA3D918B53A2}"/>
+                <a16:creationId xmlns:a16="http://schemas.microsoft.com/office/drawing/2014/main" id="{86252901-47B9-48D9-BC2E-A79757AD064B}"/>
               </a:ext>
             </a:extLst>
           </p:cNvPr>
@@ -9387,7 +10398,7 @@
                 <a:ea typeface="Hiragino Sans GB"/>
                 <a:cs typeface="Hiragino Sans GB"/>
               </a:rPr>
-              <a:t>固定知识与引用</a:t>
+              <a:t>固定知识和引用</a:t>
             </a:r>
           </a:p>
           <a:p xmlns:a="http://schemas.openxmlformats.org/drawingml/2006/main">
@@ -9433,17 +10444,17 @@
                 <a:ea typeface="Hiragino Sans GB"/>
                 <a:cs typeface="Hiragino Sans GB"/>
               </a:rPr>
-              <a:t>NAT 核对版本与段落</a:t>
-            </a:r>
-          </a:p>
-        </p:txBody>
-      </p:sp>
-      <p:sp>
-        <p:nvSpPr>
-          <p:cNvPr id="10" name="方法与本地视觉">
+              <a:t>NAT 核对版本和段落</a:t>
+            </a:r>
+          </a:p>
+        </p:txBody>
+      </p:sp>
+      <p:sp>
+        <p:nvSpPr>
+          <p:cNvPr id="10" name="方法和视觉核查">
             <a:extLst xmlns:a="http://schemas.openxmlformats.org/drawingml/2006/main">
               <a:ext uri="{FF2B5EF4-FFF2-40B4-BE49-F238E27FC236}">
-                <a16:creationId xmlns:a16="http://schemas.microsoft.com/office/drawing/2014/main" id="{7319069D-5E14-4161-9E98-6A677F7C0644}"/>
+                <a16:creationId xmlns:a16="http://schemas.microsoft.com/office/drawing/2014/main" id="{F602BF8D-65C2-41A5-B446-D21049D38C01}"/>
               </a:ext>
             </a:extLst>
           </p:cNvPr>
@@ -9497,7 +10508,7 @@
                 <a:ea typeface="Hiragino Sans GB"/>
                 <a:cs typeface="Hiragino Sans GB"/>
               </a:rPr>
-              <a:t>方法与本地视觉</a:t>
+              <a:t>方法和视觉核查</a:t>
             </a:r>
           </a:p>
           <a:p xmlns:a="http://schemas.openxmlformats.org/drawingml/2006/main">
@@ -9520,7 +10531,7 @@
                 <a:ea typeface="Hiragino Sans GB"/>
                 <a:cs typeface="Hiragino Sans GB"/>
               </a:rPr>
-              <a:t>7 Skills 渐进加载</a:t>
+              <a:t>7 Skills / 8B 主流程</a:t>
             </a:r>
           </a:p>
           <a:p xmlns:a="http://schemas.openxmlformats.org/drawingml/2006/main">
@@ -9543,7 +10554,7 @@
                 <a:ea typeface="Hiragino Sans GB"/>
                 <a:cs typeface="Hiragino Sans GB"/>
               </a:rPr>
-              <a:t>8B 视觉 / CUDA</a:t>
+              <a:t>35B / 27B 候选</a:t>
             </a:r>
           </a:p>
         </p:txBody>
@@ -9553,7 +10564,7 @@
           <p:cNvPr id="11" name="独立已部署服务">
             <a:extLst xmlns:a="http://schemas.openxmlformats.org/drawingml/2006/main">
               <a:ext uri="{FF2B5EF4-FFF2-40B4-BE49-F238E27FC236}">
-                <a16:creationId xmlns:a16="http://schemas.microsoft.com/office/drawing/2014/main" id="{FCD3EC02-E0E6-447A-B77B-F8443041EA6D}"/>
+                <a16:creationId xmlns:a16="http://schemas.microsoft.com/office/drawing/2014/main" id="{C9BBB373-6CE1-4811-848A-179976257B40}"/>
               </a:ext>
             </a:extLst>
           </p:cNvPr>
@@ -9630,7 +10641,7 @@
                 <a:ea typeface="Hiragino Sans GB"/>
                 <a:cs typeface="Hiragino Sans GB"/>
               </a:rPr>
-              <a:t>NIM 与 TRT-LLM</a:t>
+              <a:t>NIM 和 TRT-LLM</a:t>
             </a:r>
           </a:p>
           <a:p xmlns:a="http://schemas.openxmlformats.org/drawingml/2006/main">
@@ -9663,7 +10674,7 @@
           <p:cNvPr id="12" name="可选文字审查">
             <a:extLst xmlns:a="http://schemas.openxmlformats.org/drawingml/2006/main">
               <a:ext uri="{FF2B5EF4-FFF2-40B4-BE49-F238E27FC236}">
-                <a16:creationId xmlns:a16="http://schemas.microsoft.com/office/drawing/2014/main" id="{B9AFAFD1-AC1C-472E-AEFB-7B7868D461F4}"/>
+                <a16:creationId xmlns:a16="http://schemas.microsoft.com/office/drawing/2014/main" id="{59034AB5-65E6-4BA7-8C72-F463AFDB098F}"/>
               </a:ext>
             </a:extLst>
           </p:cNvPr>
@@ -9929,10 +10940,10 @@
       </p:cxnSp>
       <p:sp>
         <p:nvSpPr>
-          <p:cNvPr id="19" name="批准文字与审查结果">
+          <p:cNvPr id="19" name="批准文字和审查结果">
             <a:extLst xmlns:a="http://schemas.openxmlformats.org/drawingml/2006/main">
               <a:ext uri="{FF2B5EF4-FFF2-40B4-BE49-F238E27FC236}">
-                <a16:creationId xmlns:a16="http://schemas.microsoft.com/office/drawing/2014/main" id="{C64E4DC3-52D3-4B1E-BF7D-8A3E11789EC3}"/>
+                <a16:creationId xmlns:a16="http://schemas.microsoft.com/office/drawing/2014/main" id="{2D9ED325-3B72-4108-BB44-C47CFBE7A6D8}"/>
               </a:ext>
             </a:extLst>
           </p:cNvPr>
@@ -9979,17 +10990,17 @@
                 <a:ea typeface="Hiragino Sans GB"/>
                 <a:cs typeface="Hiragino Sans GB"/>
               </a:rPr>
-              <a:t>批准文字与审查结果</a:t>
-            </a:r>
-          </a:p>
-        </p:txBody>
-      </p:sp>
-      <p:sp>
-        <p:nvSpPr>
-          <p:cNvPr id="20" name="独立服务已实测，主案卷仍沿用视觉与 SQLite 资料路径">
+              <a:t>批准文字和审查结果</a:t>
+            </a:r>
+          </a:p>
+        </p:txBody>
+      </p:sp>
+      <p:sp>
+        <p:nvSpPr>
+          <p:cNvPr id="20" name="主服务保持 8B，较大模型经受控核查后再考虑切换">
             <a:extLst xmlns:a="http://schemas.openxmlformats.org/drawingml/2006/main">
               <a:ext uri="{FF2B5EF4-FFF2-40B4-BE49-F238E27FC236}">
-                <a16:creationId xmlns:a16="http://schemas.microsoft.com/office/drawing/2014/main" id="{1DC4E2CC-D178-471D-9C27-F18A1809E1CD}"/>
+                <a16:creationId xmlns:a16="http://schemas.microsoft.com/office/drawing/2014/main" id="{2EBD404E-6020-479B-A0E8-D8B2FF127E87}"/>
               </a:ext>
             </a:extLst>
           </p:cNvPr>
@@ -10036,7 +11047,7 @@
                 <a:ea typeface="Hiragino Sans GB"/>
                 <a:cs typeface="Hiragino Sans GB"/>
               </a:rPr>
-              <a:t>独立服务已实测，主案卷仍沿用视觉与 SQLite 资料路径</a:t>
+              <a:t>主服务保持 8B，较大模型经受控核查后再考虑切换</a:t>
             </a:r>
           </a:p>
         </p:txBody>
@@ -10046,7 +11057,7 @@
           <p:cNvPr id="21" name="06">
             <a:extLst xmlns:a="http://schemas.openxmlformats.org/drawingml/2006/main">
               <a:ext uri="{FF2B5EF4-FFF2-40B4-BE49-F238E27FC236}">
-                <a16:creationId xmlns:a16="http://schemas.microsoft.com/office/drawing/2014/main" id="{92945117-F6C8-439B-80A1-C2BB06640375}"/>
+                <a16:creationId xmlns:a16="http://schemas.microsoft.com/office/drawing/2014/main" id="{E3E576D5-ACBE-4A8E-BC97-914C8A0001FB}"/>
               </a:ext>
             </a:extLst>
           </p:cNvPr>
@@ -10101,7 +11112,7 @@
     </p:spTree>
     <p:extLst>
       <p:ext uri="{BB962C8B-B14F-4D97-AF65-F5344CB8AC3E}">
-        <p14:creationId xmlns:p14="http://schemas.microsoft.com/office/powerpoint/2010/main" val="1559838110"/>
+        <p14:creationId xmlns:p14="http://schemas.microsoft.com/office/powerpoint/2010/main" val="510942553"/>
       </p:ext>
     </p:extLst>
   </p:cSld>
@@ -10129,10 +11140,10 @@
       </p:grpSpPr>
       <p:sp>
         <p:nvSpPr>
-          <p:cNvPr id="7" name="Spark 的价值：原件、方法与推理共存">
+          <p:cNvPr id="6" name="Spark 本地部署和模型分工">
             <a:extLst xmlns:a="http://schemas.openxmlformats.org/drawingml/2006/main">
               <a:ext uri="{FF2B5EF4-FFF2-40B4-BE49-F238E27FC236}">
-                <a16:creationId xmlns:a16="http://schemas.microsoft.com/office/drawing/2014/main" id="{CD586D69-2819-41A2-8F35-2A0796F5B5BD}"/>
+                <a16:creationId xmlns:a16="http://schemas.microsoft.com/office/drawing/2014/main" id="{626CC754-3F1B-4033-AB51-C2687720E2A7}"/>
               </a:ext>
             </a:extLst>
           </p:cNvPr>
@@ -10179,17 +11190,17 @@
                 <a:ea typeface="Hiragino Sans GB"/>
                 <a:cs typeface="Hiragino Sans GB"/>
               </a:rPr>
-              <a:t>Spark 的价值：原件、方法与推理共存</a:t>
-            </a:r>
-          </a:p>
-        </p:txBody>
-      </p:sp>
-      <p:sp>
-        <p:nvSpPr>
-          <p:cNvPr id="2" name="固定模型与资料身份，使同一案卷的研究过程可以重放">
+              <a:t>Spark 本地部署和模型分工</a:t>
+            </a:r>
+          </a:p>
+        </p:txBody>
+      </p:sp>
+      <p:sp>
+        <p:nvSpPr>
+          <p:cNvPr id="2" name="原件和资料版本固定，模型变更通过受控核查保留记录">
             <a:extLst xmlns:a="http://schemas.openxmlformats.org/drawingml/2006/main">
               <a:ext uri="{FF2B5EF4-FFF2-40B4-BE49-F238E27FC236}">
-                <a16:creationId xmlns:a16="http://schemas.microsoft.com/office/drawing/2014/main" id="{B29FCFD0-4082-4415-B483-D1E5469AE71E}"/>
+                <a16:creationId xmlns:a16="http://schemas.microsoft.com/office/drawing/2014/main" id="{627A91C0-F0FF-4BB8-9CE6-386009A61D6A}"/>
               </a:ext>
             </a:extLst>
           </p:cNvPr>
@@ -10236,20 +11247,20 @@
                 <a:ea typeface="Hiragino Sans GB"/>
                 <a:cs typeface="Hiragino Sans GB"/>
               </a:rPr>
-              <a:t>固定模型与资料身份，使同一案卷的研究过程可以重放</a:t>
+              <a:t>原件和资料版本固定，模型变更通过受控核查保留记录</a:t>
             </a:r>
           </a:p>
         </p:txBody>
       </p:sp>
       <p:graphicFrame>
         <p:nvGraphicFramePr>
-          <p:cNvPr id="9" name=""/>
+          <p:cNvPr id="8" name=""/>
           <p:cNvGraphicFramePr/>
           <p:nvPr/>
         </p:nvGraphicFramePr>
         <p:xfrm>
-          <a:off xmlns:a="http://schemas.openxmlformats.org/drawingml/2006/main" x="628650" y="1971675"/>
-          <a:ext xmlns:a="http://schemas.openxmlformats.org/drawingml/2006/main" cx="10934700" cy="3457575"/>
+          <a:off xmlns:a="http://schemas.openxmlformats.org/drawingml/2006/main" x="628650" y="1800225"/>
+          <a:ext xmlns:a="http://schemas.openxmlformats.org/drawingml/2006/main" cx="10934700" cy="4200525"/>
         </p:xfrm>
         <a:graphic xmlns:a="http://schemas.openxmlformats.org/drawingml/2006/main">
           <a:graphicData uri="http://schemas.openxmlformats.org/drawingml/2006/table">
@@ -10269,7 +11280,7 @@
                     <a:lstStyle/>
                     <a:p>
                       <a:r>
-                        <a:rPr sz="1875" b="1">
+                        <a:rPr sz="1800" b="1">
                           <a:solidFill>
                             <a:srgbClr val="FFFFFF"/>
                           </a:solidFill>
@@ -10295,7 +11306,7 @@
                     <a:lstStyle/>
                     <a:p>
                       <a:r>
-                        <a:rPr sz="1875" b="1">
+                        <a:rPr sz="1800" b="1">
                           <a:solidFill>
                             <a:srgbClr val="FFFFFF"/>
                           </a:solidFill>
@@ -10321,7 +11332,7 @@
                     <a:lstStyle/>
                     <a:p>
                       <a:r>
-                        <a:rPr sz="1875" b="1">
+                        <a:rPr sz="1800" b="1">
                           <a:solidFill>
                             <a:srgbClr val="FFFFFF"/>
                           </a:solidFill>
@@ -10349,7 +11360,7 @@
                     <a:lstStyle/>
                     <a:p>
                       <a:r>
-                        <a:rPr sz="1875" b="0">
+                        <a:rPr sz="1800" b="0">
                           <a:solidFill>
                             <a:srgbClr val="1C334B"/>
                           </a:solidFill>
@@ -10357,7 +11368,7 @@
                           <a:ea typeface="Hiragino Sans GB"/>
                           <a:cs typeface="Hiragino Sans GB"/>
                         </a:rPr>
-                        <a:t>多图与区域研究</a:t>
+                        <a:t>案卷主视觉</a:t>
                       </a:r>
                     </a:p>
                   </a:txBody>
@@ -10375,7 +11386,7 @@
                     <a:lstStyle/>
                     <a:p>
                       <a:r>
-                        <a:rPr sz="1875" b="0">
+                        <a:rPr sz="1800" b="0">
                           <a:solidFill>
                             <a:srgbClr val="1C334B"/>
                           </a:solidFill>
@@ -10388,7 +11399,7 @@
                     </a:p>
                     <a:p>
                       <a:r>
-                        <a:rPr sz="1875" b="0">
+                        <a:rPr sz="1800" b="0">
                           <a:solidFill>
                             <a:srgbClr val="1C334B"/>
                           </a:solidFill>
@@ -10414,7 +11425,7 @@
                     <a:lstStyle/>
                     <a:p>
                       <a:r>
-                        <a:rPr sz="1875" b="0">
+                        <a:rPr sz="1800" b="0">
                           <a:solidFill>
                             <a:srgbClr val="1C334B"/>
                           </a:solidFill>
@@ -10422,7 +11433,7 @@
                           <a:ea typeface="Hiragino Sans GB"/>
                           <a:cs typeface="Hiragino Sans GB"/>
                         </a:rPr>
-                        <a:t>案卷主视觉流程</a:t>
+                        <a:t>多图和区域研究主流程</a:t>
                       </a:r>
                     </a:p>
                   </a:txBody>
@@ -10442,7 +11453,7 @@
                     <a:lstStyle/>
                     <a:p>
                       <a:r>
-                        <a:rPr sz="1875" b="0">
+                        <a:rPr sz="1800" b="0">
                           <a:solidFill>
                             <a:srgbClr val="1C334B"/>
                           </a:solidFill>
@@ -10450,7 +11461,7 @@
                           <a:ea typeface="Hiragino Sans GB"/>
                           <a:cs typeface="Hiragino Sans GB"/>
                         </a:rPr>
-                        <a:t>领域方法与引用</a:t>
+                        <a:t>较大视觉模型</a:t>
                       </a:r>
                     </a:p>
                   </a:txBody>
@@ -10468,7 +11479,113 @@
                     <a:lstStyle/>
                     <a:p>
                       <a:r>
-                        <a:rPr sz="1875" b="0">
+                        <a:rPr sz="1800" b="0">
+                          <a:solidFill>
+                            <a:srgbClr val="1C334B"/>
+                          </a:solidFill>
+                          <a:latin typeface="Hiragino Sans GB"/>
+                          <a:ea typeface="Hiragino Sans GB"/>
+                          <a:cs typeface="Hiragino Sans GB"/>
+                        </a:rPr>
+                        <a:t>35B / 27B 视觉候选</a:t>
+                      </a:r>
+                    </a:p>
+                    <a:p>
+                      <a:r>
+                        <a:rPr sz="1800" b="0">
+                          <a:solidFill>
+                            <a:srgbClr val="1C334B"/>
+                          </a:solidFill>
+                          <a:latin typeface="Hiragino Sans GB"/>
+                          <a:ea typeface="Hiragino Sans GB"/>
+                          <a:cs typeface="Hiragino Sans GB"/>
+                        </a:rPr>
+                        <a:t>NIM（SGLang 后端）</a:t>
+                      </a:r>
+                    </a:p>
+                  </a:txBody>
+                  <a:tcPr marL="91440" marR="91440" marT="45720" marB="45720" anchor="ctr">
+                    <a:solidFill>
+                      <a:srgbClr val="FFFFFF"/>
+                    </a:solidFill>
+                  </a:tcPr>
+                </a:tc>
+                <a:tc>
+                  <a:txBody>
+                    <a:bodyPr lIns="133350" tIns="85725" rIns="133350" bIns="85725">
+                      <a:noAutofit/>
+                    </a:bodyPr>
+                    <a:lstStyle/>
+                    <a:p>
+                      <a:r>
+                        <a:rPr sz="1800" b="0">
+                          <a:solidFill>
+                            <a:srgbClr val="1C334B"/>
+                          </a:solidFill>
+                          <a:latin typeface="Hiragino Sans GB"/>
+                          <a:ea typeface="Hiragino Sans GB"/>
+                          <a:cs typeface="Hiragino Sans GB"/>
+                        </a:rPr>
+                        <a:t>已完成独立案卷核查</a:t>
+                      </a:r>
+                    </a:p>
+                    <a:p>
+                      <a:r>
+                        <a:rPr sz="1800" b="0">
+                          <a:solidFill>
+                            <a:srgbClr val="1C334B"/>
+                          </a:solidFill>
+                          <a:latin typeface="Hiragino Sans GB"/>
+                          <a:ea typeface="Hiragino Sans GB"/>
+                          <a:cs typeface="Hiragino Sans GB"/>
+                        </a:rPr>
+                        <a:t>主服务保持 8B</a:t>
+                      </a:r>
+                    </a:p>
+                  </a:txBody>
+                  <a:tcPr marL="91440" marR="91440" marT="45720" marB="45720" anchor="ctr">
+                    <a:solidFill>
+                      <a:srgbClr val="FFFFFF"/>
+                    </a:solidFill>
+                  </a:tcPr>
+                </a:tc>
+              </a:tr>
+              <a:tr h="742950">
+                <a:tc>
+                  <a:txBody>
+                    <a:bodyPr lIns="133350" tIns="85725" rIns="133350" bIns="85725">
+                      <a:noAutofit/>
+                    </a:bodyPr>
+                    <a:lstStyle/>
+                    <a:p>
+                      <a:r>
+                        <a:rPr sz="1800" b="0">
+                          <a:solidFill>
+                            <a:srgbClr val="1C334B"/>
+                          </a:solidFill>
+                          <a:latin typeface="Hiragino Sans GB"/>
+                          <a:ea typeface="Hiragino Sans GB"/>
+                          <a:cs typeface="Hiragino Sans GB"/>
+                        </a:rPr>
+                        <a:t>领域方法和引用</a:t>
+                      </a:r>
+                    </a:p>
+                  </a:txBody>
+                  <a:tcPr marL="91440" marR="91440" marT="45720" marB="45720" anchor="ctr">
+                    <a:solidFill>
+                      <a:srgbClr val="FFFFFF"/>
+                    </a:solidFill>
+                  </a:tcPr>
+                </a:tc>
+                <a:tc>
+                  <a:txBody>
+                    <a:bodyPr lIns="133350" tIns="85725" rIns="133350" bIns="85725">
+                      <a:noAutofit/>
+                    </a:bodyPr>
+                    <a:lstStyle/>
+                    <a:p>
+                      <a:r>
+                        <a:rPr sz="1800" b="0">
                           <a:solidFill>
                             <a:srgbClr val="1C334B"/>
                           </a:solidFill>
@@ -10481,7 +11598,7 @@
                     </a:p>
                     <a:p>
                       <a:r>
-                        <a:rPr sz="1875" b="0">
+                        <a:rPr sz="1800" b="0">
                           <a:solidFill>
                             <a:srgbClr val="1C334B"/>
                           </a:solidFill>
@@ -10507,7 +11624,7 @@
                     <a:lstStyle/>
                     <a:p>
                       <a:r>
-                        <a:rPr sz="1875" b="0">
+                        <a:rPr sz="1800" b="0">
                           <a:solidFill>
                             <a:srgbClr val="1C334B"/>
                           </a:solidFill>
@@ -10515,7 +11632,7 @@
                           <a:ea typeface="Hiragino Sans GB"/>
                           <a:cs typeface="Hiragino Sans GB"/>
                         </a:rPr>
-                        <a:t>方法执行与引用身份核查</a:t>
+                        <a:t>方法执行和引用身份核查</a:t>
                       </a:r>
                     </a:p>
                   </a:txBody>
@@ -10535,7 +11652,7 @@
                     <a:lstStyle/>
                     <a:p>
                       <a:r>
-                        <a:rPr sz="1875" b="0">
+                        <a:rPr sz="1800" b="0">
                           <a:solidFill>
                             <a:srgbClr val="1C334B"/>
                           </a:solidFill>
@@ -10543,7 +11660,7 @@
                           <a:ea typeface="Hiragino Sans GB"/>
                           <a:cs typeface="Hiragino Sans GB"/>
                         </a:rPr>
-                        <a:t>公开文字归纳</a:t>
+                        <a:t>本地文字推理</a:t>
                       </a:r>
                     </a:p>
                   </a:txBody>
@@ -10561,7 +11678,7 @@
                     <a:lstStyle/>
                     <a:p>
                       <a:r>
-                        <a:rPr sz="1875" b="0">
+                        <a:rPr sz="1800" b="0">
                           <a:solidFill>
                             <a:srgbClr val="1C334B"/>
                           </a:solidFill>
@@ -10569,12 +11686,12 @@
                           <a:ea typeface="Hiragino Sans GB"/>
                           <a:cs typeface="Hiragino Sans GB"/>
                         </a:rPr>
-                        <a:t>原厂 NIM / Qwen3-4B</a:t>
+                        <a:t>NIM / Qwen3-4B</a:t>
                       </a:r>
                     </a:p>
                     <a:p>
                       <a:r>
-                        <a:rPr sz="1875" b="0">
+                        <a:rPr sz="1800" b="0">
                           <a:solidFill>
                             <a:srgbClr val="1C334B"/>
                           </a:solidFill>
@@ -10600,7 +11717,7 @@
                     <a:lstStyle/>
                     <a:p>
                       <a:r>
-                        <a:rPr sz="1875" b="0">
+                        <a:rPr sz="1800" b="0">
                           <a:solidFill>
                             <a:srgbClr val="1C334B"/>
                           </a:solidFill>
@@ -10628,7 +11745,7 @@
                     <a:lstStyle/>
                     <a:p>
                       <a:r>
-                        <a:rPr sz="1875" b="0">
+                        <a:rPr sz="1800" b="0">
                           <a:solidFill>
                             <a:srgbClr val="1C334B"/>
                           </a:solidFill>
@@ -10654,7 +11771,7 @@
                     <a:lstStyle/>
                     <a:p>
                       <a:r>
-                        <a:rPr sz="1875" b="0">
+                        <a:rPr sz="1800" b="0">
                           <a:solidFill>
                             <a:srgbClr val="1C334B"/>
                           </a:solidFill>
@@ -10667,7 +11784,7 @@
                     </a:p>
                     <a:p>
                       <a:r>
-                        <a:rPr sz="1875" b="0">
+                        <a:rPr sz="1800" b="0">
                           <a:solidFill>
                             <a:srgbClr val="1C334B"/>
                           </a:solidFill>
@@ -10693,7 +11810,7 @@
                     <a:lstStyle/>
                     <a:p>
                       <a:r>
-                        <a:rPr sz="1875" b="0">
+                        <a:rPr sz="1800" b="0">
                           <a:solidFill>
                             <a:srgbClr val="1C334B"/>
                           </a:solidFill>
@@ -10706,7 +11823,7 @@
                     </a:p>
                     <a:p>
                       <a:r>
-                        <a:rPr sz="1875" b="0">
+                        <a:rPr sz="1800" b="0">
                           <a:solidFill>
                             <a:srgbClr val="1C334B"/>
                           </a:solidFill>
@@ -10731,10 +11848,10 @@
       </p:graphicFrame>
       <p:sp>
         <p:nvSpPr>
-          <p:cNvPr id="4" name="NIM 与 TensorRT-LLM 均完成公开陶瓷文字请求及绑定 CUDA 核验">
+          <p:cNvPr id="4" name="候选均未设为默认，27B 原始权重和进程的关联待补验">
             <a:extLst xmlns:a="http://schemas.openxmlformats.org/drawingml/2006/main">
               <a:ext uri="{FF2B5EF4-FFF2-40B4-BE49-F238E27FC236}">
-                <a16:creationId xmlns:a16="http://schemas.microsoft.com/office/drawing/2014/main" id="{977404E8-4982-4322-B04B-9D02CBD3BB15}"/>
+                <a16:creationId xmlns:a16="http://schemas.microsoft.com/office/drawing/2014/main" id="{89E104B7-4F11-469C-B5EE-BA96880831A0}"/>
               </a:ext>
             </a:extLst>
           </p:cNvPr>
@@ -10745,8 +11862,8 @@
         </p:nvSpPr>
         <p:spPr>
           <a:xfrm xmlns:a="http://schemas.openxmlformats.org/drawingml/2006/main">
-            <a:off x="628650" y="5734050"/>
-            <a:ext cx="10858500" cy="381000"/>
+            <a:off x="628650" y="6191250"/>
+            <a:ext cx="10382250" cy="295275"/>
           </a:xfrm>
           <a:prstGeom xmlns:a="http://schemas.openxmlformats.org/drawingml/2006/main" prst="rect">
             <a:avLst/>
@@ -10763,7 +11880,7 @@
           <a:lstStyle xmlns:a="http://schemas.openxmlformats.org/drawingml/2006/main"/>
           <a:p xmlns:a="http://schemas.openxmlformats.org/drawingml/2006/main">
             <a:pPr algn="l">
-              <a:defRPr sz="1950" b="1">
+              <a:defRPr sz="1800" b="0">
                 <a:solidFill>
                   <a:srgbClr val="245B88"/>
                 </a:solidFill>
@@ -10773,7 +11890,7 @@
               </a:defRPr>
             </a:pPr>
             <a:r>
-              <a:rPr sz="1950" b="1">
+              <a:rPr sz="1800" b="0">
                 <a:solidFill>
                   <a:srgbClr val="245B88"/>
                 </a:solidFill>
@@ -10781,17 +11898,17 @@
                 <a:ea typeface="Hiragino Sans GB"/>
                 <a:cs typeface="Hiragino Sans GB"/>
               </a:rPr>
-              <a:t>NIM 与 TensorRT-LLM 均完成公开陶瓷文字请求及绑定 CUDA 核验</a:t>
-            </a:r>
-          </a:p>
-        </p:txBody>
-      </p:sp>
-      <p:sp>
-        <p:nvSpPr>
-          <p:cNvPr id="5" name="独立服务的真实运行与专业质量分别验证，文字输出仍需复核">
+              <a:t>候选均未设为默认，27B 原始权重和进程的关联待补验</a:t>
+            </a:r>
+          </a:p>
+        </p:txBody>
+      </p:sp>
+      <p:sp>
+        <p:nvSpPr>
+          <p:cNvPr id="5" name="07">
             <a:extLst xmlns:a="http://schemas.openxmlformats.org/drawingml/2006/main">
               <a:ext uri="{FF2B5EF4-FFF2-40B4-BE49-F238E27FC236}">
-                <a16:creationId xmlns:a16="http://schemas.microsoft.com/office/drawing/2014/main" id="{F77BAAD9-FD88-4480-9BFF-9903B7063989}"/>
+                <a16:creationId xmlns:a16="http://schemas.microsoft.com/office/drawing/2014/main" id="{1B7A3082-8FBB-4E67-B811-5D84D80825A8}"/>
               </a:ext>
             </a:extLst>
           </p:cNvPr>
@@ -10802,8 +11919,8 @@
         </p:nvSpPr>
         <p:spPr>
           <a:xfrm xmlns:a="http://schemas.openxmlformats.org/drawingml/2006/main">
-            <a:off x="628650" y="6153150"/>
-            <a:ext cx="10525125" cy="285750"/>
+            <a:off x="11125200" y="6419850"/>
+            <a:ext cx="457200" cy="266700"/>
           </a:xfrm>
           <a:prstGeom xmlns:a="http://schemas.openxmlformats.org/drawingml/2006/main" prst="rect">
             <a:avLst/>
@@ -10819,63 +11936,6 @@
           </a:bodyPr>
           <a:lstStyle xmlns:a="http://schemas.openxmlformats.org/drawingml/2006/main"/>
           <a:p xmlns:a="http://schemas.openxmlformats.org/drawingml/2006/main">
-            <a:pPr algn="l">
-              <a:defRPr sz="1650" b="0">
-                <a:solidFill>
-                  <a:srgbClr val="5E7181"/>
-                </a:solidFill>
-                <a:latin typeface="Hiragino Sans GB"/>
-                <a:ea typeface="Hiragino Sans GB"/>
-                <a:cs typeface="Hiragino Sans GB"/>
-              </a:defRPr>
-            </a:pPr>
-            <a:r>
-              <a:rPr sz="1650" b="0">
-                <a:solidFill>
-                  <a:srgbClr val="5E7181"/>
-                </a:solidFill>
-                <a:latin typeface="Hiragino Sans GB"/>
-                <a:ea typeface="Hiragino Sans GB"/>
-                <a:cs typeface="Hiragino Sans GB"/>
-              </a:rPr>
-              <a:t>独立服务的真实运行与专业质量分别验证，文字输出仍需复核</a:t>
-            </a:r>
-          </a:p>
-        </p:txBody>
-      </p:sp>
-      <p:sp>
-        <p:nvSpPr>
-          <p:cNvPr id="6" name="07">
-            <a:extLst xmlns:a="http://schemas.openxmlformats.org/drawingml/2006/main">
-              <a:ext uri="{FF2B5EF4-FFF2-40B4-BE49-F238E27FC236}">
-                <a16:creationId xmlns:a16="http://schemas.microsoft.com/office/drawing/2014/main" id="{1CEB63BA-4B7E-4A42-B4F4-D136A199B445}"/>
-              </a:ext>
-            </a:extLst>
-          </p:cNvPr>
-          <p:cNvSpPr>
-            <a:spLocks xmlns:a="http://schemas.openxmlformats.org/drawingml/2006/main" noGrp="1"/>
-          </p:cNvSpPr>
-          <p:nvPr/>
-        </p:nvSpPr>
-        <p:spPr>
-          <a:xfrm xmlns:a="http://schemas.openxmlformats.org/drawingml/2006/main">
-            <a:off x="11125200" y="6419850"/>
-            <a:ext cx="457200" cy="266700"/>
-          </a:xfrm>
-          <a:prstGeom xmlns:a="http://schemas.openxmlformats.org/drawingml/2006/main" prst="rect">
-            <a:avLst/>
-          </a:prstGeom>
-          <a:noFill xmlns:a="http://schemas.openxmlformats.org/drawingml/2006/main"/>
-          <a:ln xmlns:a="http://schemas.openxmlformats.org/drawingml/2006/main" w="0">
-            <a:noFill/>
-          </a:ln>
-        </p:spPr>
-        <p:txBody>
-          <a:bodyPr xmlns:a="http://schemas.openxmlformats.org/drawingml/2006/main" lIns="0" tIns="0" rIns="0" bIns="0" anchor="t">
-            <a:noAutofit/>
-          </a:bodyPr>
-          <a:lstStyle xmlns:a="http://schemas.openxmlformats.org/drawingml/2006/main"/>
-          <a:p xmlns:a="http://schemas.openxmlformats.org/drawingml/2006/main">
             <a:pPr algn="r">
               <a:defRPr sz="1500" b="0">
                 <a:solidFill>
@@ -10903,7 +11963,7 @@
     </p:spTree>
     <p:extLst>
       <p:ext uri="{BB962C8B-B14F-4D97-AF65-F5344CB8AC3E}">
-        <p14:creationId xmlns:p14="http://schemas.microsoft.com/office/powerpoint/2010/main" val="763479352"/>
+        <p14:creationId xmlns:p14="http://schemas.microsoft.com/office/powerpoint/2010/main" val="979101105"/>
       </p:ext>
     </p:extLst>
   </p:cSld>
@@ -10934,7 +11994,7 @@
           <p:cNvPr id="10" name="六维矛盾筛查：先安排复核工作">
             <a:extLst xmlns:a="http://schemas.openxmlformats.org/drawingml/2006/main">
               <a:ext uri="{FF2B5EF4-FFF2-40B4-BE49-F238E27FC236}">
-                <a16:creationId xmlns:a16="http://schemas.microsoft.com/office/drawing/2014/main" id="{6BA1095C-522C-4DEC-AC8A-DA5892AFF5B9}"/>
+                <a16:creationId xmlns:a16="http://schemas.microsoft.com/office/drawing/2014/main" id="{3D3DFFC8-6237-4EC4-A5E6-638D69C08B5E}"/>
               </a:ext>
             </a:extLst>
           </p:cNvPr>
@@ -10991,7 +12051,7 @@
           <p:cNvPr id="2" name="本地规则比较已保存记载，每个提示都给出下一项补证">
             <a:extLst xmlns:a="http://schemas.openxmlformats.org/drawingml/2006/main">
               <a:ext uri="{FF2B5EF4-FFF2-40B4-BE49-F238E27FC236}">
-                <a16:creationId xmlns:a16="http://schemas.microsoft.com/office/drawing/2014/main" id="{FB54F757-4A3B-49BA-A60A-D90ADE6CC74F}"/>
+                <a16:creationId xmlns:a16="http://schemas.microsoft.com/office/drawing/2014/main" id="{0D8A41D1-E0F1-4F07-96CF-2F5181170CE7}"/>
               </a:ext>
             </a:extLst>
           </p:cNvPr>
@@ -11052,7 +12112,7 @@
           <p:nvPr/>
         </p:nvPicPr>
         <p:blipFill>
-          <a:blip xmlns:r="http://schemas.openxmlformats.org/officeDocument/2006/relationships" xmlns:a="http://schemas.openxmlformats.org/drawingml/2006/main" r:embed="R3545bde7b14949dc"/>
+          <a:blip xmlns:r="http://schemas.openxmlformats.org/officeDocument/2006/relationships" xmlns:a="http://schemas.openxmlformats.org/drawingml/2006/main" r:embed="Rabfa1c84858c4f1e"/>
           <a:srcRect xmlns:a="http://schemas.openxmlformats.org/drawingml/2006/main" l="16670" t="11900" r="19440" b="57500"/>
           <a:stretch xmlns:a="http://schemas.openxmlformats.org/drawingml/2006/main"/>
         </p:blipFill>
@@ -11371,7 +12431,7 @@
                           <a:ea typeface="Hiragino Sans GB"/>
                           <a:cs typeface="Hiragino Sans GB"/>
                         </a:rPr>
-                        <a:t>状况与修复</a:t>
+                        <a:t>状况和修复</a:t>
                       </a:r>
                     </a:p>
                   </a:txBody>
@@ -11525,7 +12585,7 @@
           <p:cNvPr id="5" name="矛盾＝冲突权重">
             <a:extLst xmlns:a="http://schemas.openxmlformats.org/drawingml/2006/main">
               <a:ext uri="{FF2B5EF4-FFF2-40B4-BE49-F238E27FC236}">
-                <a16:creationId xmlns:a16="http://schemas.microsoft.com/office/drawing/2014/main" id="{AC0D2DB7-2261-4D87-AD77-30DE195EBD9E}"/>
+                <a16:creationId xmlns:a16="http://schemas.microsoft.com/office/drawing/2014/main" id="{A9F06258-28B0-4BDD-9CA9-7380B9CAD094}"/>
               </a:ext>
             </a:extLst>
           </p:cNvPr>
@@ -11582,7 +12642,7 @@
           <p:cNvPr id="6" name="复核优先＝冲突权重 + 0.5 × 未知权重">
             <a:extLst xmlns:a="http://schemas.openxmlformats.org/drawingml/2006/main">
               <a:ext uri="{FF2B5EF4-FFF2-40B4-BE49-F238E27FC236}">
-                <a16:creationId xmlns:a16="http://schemas.microsoft.com/office/drawing/2014/main" id="{53F5792A-0766-4359-AFF1-7917ADD30467}"/>
+                <a16:creationId xmlns:a16="http://schemas.microsoft.com/office/drawing/2014/main" id="{825C793A-92A5-468F-A038-B02DEE44418A}"/>
               </a:ext>
             </a:extLst>
           </p:cNvPr>
@@ -11639,7 +12699,7 @@
           <p:cNvPr id="7" name="覆盖＝已评价权重 / 100&#10;未知状态单列">
             <a:extLst xmlns:a="http://schemas.openxmlformats.org/drawingml/2006/main">
               <a:ext uri="{FF2B5EF4-FFF2-40B4-BE49-F238E27FC236}">
-                <a16:creationId xmlns:a16="http://schemas.microsoft.com/office/drawing/2014/main" id="{88E8D221-9D9D-4E89-9F0B-CDAA0A04B6CE}"/>
+                <a16:creationId xmlns:a16="http://schemas.microsoft.com/office/drawing/2014/main" id="{8980423D-28A9-43C9-B5BE-9A0747790551}"/>
               </a:ext>
             </a:extLst>
           </p:cNvPr>
@@ -11719,7 +12779,7 @@
           <p:cNvPr id="8" name="指数用于工作排序，非真品率或置信度。图中高度矛盾来自明确标记的合成协议练习">
             <a:extLst xmlns:a="http://schemas.openxmlformats.org/drawingml/2006/main">
               <a:ext uri="{FF2B5EF4-FFF2-40B4-BE49-F238E27FC236}">
-                <a16:creationId xmlns:a16="http://schemas.microsoft.com/office/drawing/2014/main" id="{FFD87B27-7B00-44AD-8FE4-6A20B4AF4FC2}"/>
+                <a16:creationId xmlns:a16="http://schemas.microsoft.com/office/drawing/2014/main" id="{C4AC5CE6-A918-41C3-9923-98138C5C1BCF}"/>
               </a:ext>
             </a:extLst>
           </p:cNvPr>
@@ -11776,7 +12836,7 @@
           <p:cNvPr id="9" name="08">
             <a:extLst xmlns:a="http://schemas.openxmlformats.org/drawingml/2006/main">
               <a:ext uri="{FF2B5EF4-FFF2-40B4-BE49-F238E27FC236}">
-                <a16:creationId xmlns:a16="http://schemas.microsoft.com/office/drawing/2014/main" id="{6FDA111E-199C-470D-95AA-1ADD97F42D46}"/>
+                <a16:creationId xmlns:a16="http://schemas.microsoft.com/office/drawing/2014/main" id="{6EE0E8DD-8B7E-4025-A243-D4EAA899299A}"/>
               </a:ext>
             </a:extLst>
           </p:cNvPr>
@@ -11831,7 +12891,7 @@
     </p:spTree>
     <p:extLst>
       <p:ext uri="{BB962C8B-B14F-4D97-AF65-F5344CB8AC3E}">
-        <p14:creationId xmlns:p14="http://schemas.microsoft.com/office/powerpoint/2010/main" val="891668360"/>
+        <p14:creationId xmlns:p14="http://schemas.microsoft.com/office/powerpoint/2010/main" val="524502646"/>
       </p:ext>
     </p:extLst>
   </p:cSld>
@@ -11862,7 +12922,7 @@
           <p:cNvPr id="14" name="证据缺口决定下一项拍摄">
             <a:extLst xmlns:a="http://schemas.openxmlformats.org/drawingml/2006/main">
               <a:ext uri="{FF2B5EF4-FFF2-40B4-BE49-F238E27FC236}">
-                <a16:creationId xmlns:a16="http://schemas.microsoft.com/office/drawing/2014/main" id="{1F250FB3-F4EE-4D78-817B-5586D1517499}"/>
+                <a16:creationId xmlns:a16="http://schemas.microsoft.com/office/drawing/2014/main" id="{3DB58326-B382-4092-8451-936E6C02D765}"/>
               </a:ext>
             </a:extLst>
           </p:cNvPr>
@@ -11923,7 +12983,7 @@
           <p:nvPr/>
         </p:nvPicPr>
         <p:blipFill>
-          <a:blip xmlns:r="http://schemas.openxmlformats.org/officeDocument/2006/relationships" xmlns:a="http://schemas.openxmlformats.org/drawingml/2006/main" r:embed="Rb09cc0587bae4a8e"/>
+          <a:blip xmlns:r="http://schemas.openxmlformats.org/officeDocument/2006/relationships" xmlns:a="http://schemas.openxmlformats.org/drawingml/2006/main" r:embed="R947c82e44c5440f5"/>
           <a:stretch xmlns:a="http://schemas.openxmlformats.org/drawingml/2006/main"/>
         </p:blipFill>
         <p:spPr>
@@ -11941,7 +13001,7 @@
           <p:cNvPr id="3" name="两张整体图还留下什么？">
             <a:extLst xmlns:a="http://schemas.openxmlformats.org/drawingml/2006/main">
               <a:ext uri="{FF2B5EF4-FFF2-40B4-BE49-F238E27FC236}">
-                <a16:creationId xmlns:a16="http://schemas.microsoft.com/office/drawing/2014/main" id="{7DEF5900-D667-419F-9F03-45F31AA29D01}"/>
+                <a16:creationId xmlns:a16="http://schemas.microsoft.com/office/drawing/2014/main" id="{A52F3D5E-A496-4B18-BBDD-7443806E9991}"/>
               </a:ext>
             </a:extLst>
           </p:cNvPr>
@@ -11995,10 +13055,10 @@
       </p:sp>
       <p:sp>
         <p:nvSpPr>
-          <p:cNvPr id="4" name="底足、款识与修复细节需要对应照片或实物检查">
+          <p:cNvPr id="4" name="底足、款识和修复细节需要对应照片或实物检查">
             <a:extLst xmlns:a="http://schemas.openxmlformats.org/drawingml/2006/main">
               <a:ext uri="{FF2B5EF4-FFF2-40B4-BE49-F238E27FC236}">
-                <a16:creationId xmlns:a16="http://schemas.microsoft.com/office/drawing/2014/main" id="{7839C11E-1BAE-4984-8149-32B4A2C30449}"/>
+                <a16:creationId xmlns:a16="http://schemas.microsoft.com/office/drawing/2014/main" id="{45086598-1B3C-4CD8-908E-25CB2A271AAF}"/>
               </a:ext>
             </a:extLst>
           </p:cNvPr>
@@ -12045,7 +13105,7 @@
                 <a:ea typeface="Hiragino Sans GB"/>
                 <a:cs typeface="Hiragino Sans GB"/>
               </a:rPr>
-              <a:t>底足、款识与修复细节需要对应照片或实物检查</a:t>
+              <a:t>底足、款识和修复细节需要对应照片或实物检查</a:t>
             </a:r>
           </a:p>
         </p:txBody>
@@ -12055,7 +13115,7 @@
           <p:cNvPr id="5" name="本轮证据缺口">
             <a:extLst xmlns:a="http://schemas.openxmlformats.org/drawingml/2006/main">
               <a:ext uri="{FF2B5EF4-FFF2-40B4-BE49-F238E27FC236}">
-                <a16:creationId xmlns:a16="http://schemas.microsoft.com/office/drawing/2014/main" id="{97C1FFAF-E384-420D-BE68-C59F36AF4442}"/>
+                <a16:creationId xmlns:a16="http://schemas.microsoft.com/office/drawing/2014/main" id="{AD8BAFC8-391E-474F-A4E7-B2541C1E89FC}"/>
               </a:ext>
             </a:extLst>
           </p:cNvPr>
@@ -12132,7 +13192,7 @@
                 <a:ea typeface="Hiragino Sans GB"/>
                 <a:cs typeface="Hiragino Sans GB"/>
               </a:rPr>
-              <a:t>缺失部位与原因</a:t>
+              <a:t>缺失部位和原因</a:t>
             </a:r>
           </a:p>
         </p:txBody>
@@ -12142,7 +13202,7 @@
           <p:cNvPr id="6" name="下一项补拍">
             <a:extLst xmlns:a="http://schemas.openxmlformats.org/drawingml/2006/main">
               <a:ext uri="{FF2B5EF4-FFF2-40B4-BE49-F238E27FC236}">
-                <a16:creationId xmlns:a16="http://schemas.microsoft.com/office/drawing/2014/main" id="{C7BB0D44-F696-42DA-8751-209BC613920E}"/>
+                <a16:creationId xmlns:a16="http://schemas.microsoft.com/office/drawing/2014/main" id="{A606495D-B25A-4A49-943E-ADBFE9FA409C}"/>
               </a:ext>
             </a:extLst>
           </p:cNvPr>
@@ -12219,17 +13279,17 @@
                 <a:ea typeface="Hiragino Sans GB"/>
                 <a:cs typeface="Hiragino Sans GB"/>
               </a:rPr>
-              <a:t>视角、条件与尺度</a:t>
-            </a:r>
-          </a:p>
-        </p:txBody>
-      </p:sp>
-      <p:sp>
-        <p:nvSpPr>
-          <p:cNvPr id="7" name="新原件与版本">
+              <a:t>视角、条件和尺度</a:t>
+            </a:r>
+          </a:p>
+        </p:txBody>
+      </p:sp>
+      <p:sp>
+        <p:nvSpPr>
+          <p:cNvPr id="7" name="新原件和版本">
             <a:extLst xmlns:a="http://schemas.openxmlformats.org/drawingml/2006/main">
               <a:ext uri="{FF2B5EF4-FFF2-40B4-BE49-F238E27FC236}">
-                <a16:creationId xmlns:a16="http://schemas.microsoft.com/office/drawing/2014/main" id="{E3D717E0-DCC2-48F7-8280-8E169322F75F}"/>
+                <a16:creationId xmlns:a16="http://schemas.microsoft.com/office/drawing/2014/main" id="{616D3499-0C35-41D1-BD62-D200C9B445E3}"/>
               </a:ext>
             </a:extLst>
           </p:cNvPr>
@@ -12283,7 +13343,7 @@
                 <a:ea typeface="Hiragino Sans GB"/>
                 <a:cs typeface="Hiragino Sans GB"/>
               </a:rPr>
-              <a:t>新原件与版本</a:t>
+              <a:t>新原件和版本</a:t>
             </a:r>
           </a:p>
           <a:p xmlns:a="http://schemas.openxmlformats.org/drawingml/2006/main">
@@ -12368,7 +13428,7 @@
           <p:cNvPr id="10" name="已实现">
             <a:extLst xmlns:a="http://schemas.openxmlformats.org/drawingml/2006/main">
               <a:ext uri="{FF2B5EF4-FFF2-40B4-BE49-F238E27FC236}">
-                <a16:creationId xmlns:a16="http://schemas.microsoft.com/office/drawing/2014/main" id="{DB274D94-316E-4619-B9AD-A52EC26F2F20}"/>
+                <a16:creationId xmlns:a16="http://schemas.microsoft.com/office/drawing/2014/main" id="{A9CE795B-78A1-46BD-96B2-B6BD78951503}"/>
               </a:ext>
             </a:extLst>
           </p:cNvPr>
@@ -12422,10 +13482,10 @@
       </p:sp>
       <p:sp>
         <p:nvSpPr>
-          <p:cNvPr id="11" name="采集桥接、原件 SHA、设备声明与归档回执&#10;公开图的真实 HTTP 往返核验保持原字节一">
+          <p:cNvPr id="11" name="采集桥接、原件 SHA、设备声明和归档回执&#10;公开图的真实 HTTP 往返核验保持原字节一">
             <a:extLst xmlns:a="http://schemas.openxmlformats.org/drawingml/2006/main">
               <a:ext uri="{FF2B5EF4-FFF2-40B4-BE49-F238E27FC236}">
-                <a16:creationId xmlns:a16="http://schemas.microsoft.com/office/drawing/2014/main" id="{2570493A-6CF9-414A-9FB8-88A850A3BE5D}"/>
+                <a16:creationId xmlns:a16="http://schemas.microsoft.com/office/drawing/2014/main" id="{1539C44E-C1EC-4AB8-80F0-69AD5B684F6D}"/>
               </a:ext>
             </a:extLst>
           </p:cNvPr>
@@ -12472,7 +13532,7 @@
                 <a:ea typeface="Hiragino Sans GB"/>
                 <a:cs typeface="Hiragino Sans GB"/>
               </a:rPr>
-              <a:t>采集桥接、原件 SHA、设备声明与归档回执</a:t>
+              <a:t>采集桥接、原件 SHA、设备声明和归档回执</a:t>
             </a:r>
           </a:p>
           <a:p xmlns:a="http://schemas.openxmlformats.org/drawingml/2006/main">
@@ -12502,10 +13562,10 @@
       </p:sp>
       <p:sp>
         <p:nvSpPr>
-          <p:cNvPr id="12" name="受控光线、多视角、色卡与比例尺进入后续采集研究。眼镜 SDK、桌面箱与标定仍待开发">
+          <p:cNvPr id="12" name="受控光线、多视角、色卡和比例尺进入后续采集研究。眼镜 SDK、桌面箱和标定仍待开发">
             <a:extLst xmlns:a="http://schemas.openxmlformats.org/drawingml/2006/main">
               <a:ext uri="{FF2B5EF4-FFF2-40B4-BE49-F238E27FC236}">
-                <a16:creationId xmlns:a16="http://schemas.microsoft.com/office/drawing/2014/main" id="{7EC02EC8-E43C-4B53-ADCB-FE70924171BD}"/>
+                <a16:creationId xmlns:a16="http://schemas.microsoft.com/office/drawing/2014/main" id="{07E1326F-C487-4BA7-9F4D-A0557C78D89D}"/>
               </a:ext>
             </a:extLst>
           </p:cNvPr>
@@ -12552,7 +13612,7 @@
                 <a:ea typeface="Hiragino Sans GB"/>
                 <a:cs typeface="Hiragino Sans GB"/>
               </a:rPr>
-              <a:t>受控光线、多视角、色卡与比例尺进入后续采集研究。眼镜 SDK、桌面箱与标定仍待开发</a:t>
+              <a:t>受控光线、多视角、色卡和比例尺进入后续采集研究。眼镜 SDK、桌面箱和标定仍待开发</a:t>
             </a:r>
           </a:p>
         </p:txBody>
@@ -12562,7 +13622,7 @@
           <p:cNvPr id="13" name="09">
             <a:extLst xmlns:a="http://schemas.openxmlformats.org/drawingml/2006/main">
               <a:ext uri="{FF2B5EF4-FFF2-40B4-BE49-F238E27FC236}">
-                <a16:creationId xmlns:a16="http://schemas.microsoft.com/office/drawing/2014/main" id="{0201EDFF-4636-44AF-BD71-A359FAB354E8}"/>
+                <a16:creationId xmlns:a16="http://schemas.microsoft.com/office/drawing/2014/main" id="{D61E8A8B-271E-4303-B85A-4EA0A1902B94}"/>
               </a:ext>
             </a:extLst>
           </p:cNvPr>
@@ -12617,7 +13677,7 @@
     </p:spTree>
     <p:extLst>
       <p:ext uri="{BB962C8B-B14F-4D97-AF65-F5344CB8AC3E}">
-        <p14:creationId xmlns:p14="http://schemas.microsoft.com/office/powerpoint/2010/main" val="1544706184"/>
+        <p14:creationId xmlns:p14="http://schemas.microsoft.com/office/powerpoint/2010/main" val="215778131"/>
       </p:ext>
     </p:extLst>
   </p:cSld>
